--- a/Review-II.pptx
+++ b/Review-II.pptx
@@ -14,11 +14,12 @@
     <p:sldId id="259" r:id="rId5"/>
     <p:sldId id="260" r:id="rId6"/>
     <p:sldId id="268" r:id="rId19"/>
+    <p:sldId id="269" r:id="rId20"/>
     <p:sldId id="261" r:id="rId7"/>
     <p:sldId id="262" r:id="rId8"/>
     <p:sldId id="263" r:id="rId9"/>
     <p:sldId id="264" r:id="rId10"/>
-    <p:sldId id="269" r:id="rId20"/>
+    <p:sldId id="270" r:id="rId21"/>
     <p:sldId id="265" r:id="rId11"/>
     <p:sldId id="266" r:id="rId12"/>
     <p:sldId id="267" r:id="rId13"/>
@@ -1878,7 +1879,7 @@
                 <a:ea typeface="Calibri" pitchFamily="34" charset="-122"/>
                 <a:cs typeface="Calibri" pitchFamily="34" charset="-120"/>
               </a:rPr>
-              <a:t>12</a:t>
+              <a:t>13</a:t>
             </a:r>
             <a:endParaRPr lang="en-US" sz="1000" dirty="0"/>
           </a:p>
@@ -2089,7 +2090,7 @@
                 <a:ea typeface="Calibri" pitchFamily="34" charset="-122"/>
                 <a:cs typeface="Calibri" pitchFamily="34" charset="-120"/>
               </a:rPr>
-              <a:t>Project report and manuscript (compliance chapters need no real data; section mapping drafted, to be verified against the Gazette text). Real hospital dataset → one column map, then the same pipeline; results reported beside the synthetic ones. Three further literature references to reach fifteen.</a:t>
+              <a:t>Project report: all eight chapters drafted; second pass for length, and the section mapping to be verified against the Gazette text before citations enter it. Manuscript compressed from chapters 3–7. Real hospital dataset → one column map, then the same pipeline; results reported beside the synthetic ones.</a:t>
             </a:r>
             <a:endParaRPr lang="en-US" sz="1500" dirty="0"/>
           </a:p>
@@ -2203,7 +2204,7 @@
                 <a:ea typeface="Calibri" pitchFamily="34" charset="-122"/>
                 <a:cs typeface="Calibri" pitchFamily="34" charset="-120"/>
               </a:rPr>
-              <a:t>13</a:t>
+              <a:t>14</a:t>
             </a:r>
             <a:endParaRPr lang="en-US" sz="1000" dirty="0"/>
           </a:p>
@@ -2565,6 +2566,69 @@
             </a:r>
             <a:endParaRPr lang="en-US" sz="1600" dirty="0"/>
           </a:p>
+          <a:p>
+            <a:pPr marL="177800" indent="-177800">
+              <a:spcAft>
+                <a:spcPts val="800"/>
+              </a:spcAft>
+              <a:buSzPct val="100000"/>
+              <a:buChar char="•"/>
+            </a:pPr>
+            <a:r>
+              <a:rPr lang="en-US" sz="1050" dirty="0">
+                <a:solidFill>
+                  <a:srgbClr val="000000"/>
+                </a:solidFill>
+                <a:latin typeface="Calibri" pitchFamily="34" charset="0"/>
+                <a:ea typeface="Calibri" pitchFamily="34" charset="-122"/>
+                <a:cs typeface="Calibri" pitchFamily="34" charset="-120"/>
+              </a:rPr>
+              <a:t>[14] C. V. Cook, "Tokenization techniques for privacy-preserving healthcare data: tokenization nuts and bolts," Frontiers in Drug Safety and Regulation, vol. 5, art. 1599217, 2025, doi:10.3389/fdsfr.2025.1599217.</a:t>
+            </a:r>
+            <a:endParaRPr lang="en-US" sz="1600" dirty="0"/>
+          </a:p>
+          <a:p>
+            <a:pPr marL="177800" indent="-177800">
+              <a:spcAft>
+                <a:spcPts val="800"/>
+              </a:spcAft>
+              <a:buSzPct val="100000"/>
+              <a:buChar char="•"/>
+            </a:pPr>
+            <a:r>
+              <a:rPr lang="en-US" sz="1050" dirty="0">
+                <a:solidFill>
+                  <a:srgbClr val="000000"/>
+                </a:solidFill>
+                <a:latin typeface="Calibri" pitchFamily="34" charset="0"/>
+                <a:ea typeface="Calibri" pitchFamily="34" charset="-122"/>
+                <a:cs typeface="Calibri" pitchFamily="34" charset="-120"/>
+              </a:rPr>
+              <a:t>[15] M. A. de Carvalho Junior and P. Bandiera-Paiva, "Health Information System Role-Based Access Control Current Security Trends and Challenges," Journal of Healthcare Engineering, vol. 2018, art. 6510249, 2018, doi:10.1155/2018/6510249.</a:t>
+            </a:r>
+            <a:endParaRPr lang="en-US" sz="1600" dirty="0"/>
+          </a:p>
+          <a:p>
+            <a:pPr marL="177800" indent="-177800">
+              <a:spcAft>
+                <a:spcPts val="800"/>
+              </a:spcAft>
+              <a:buSzPct val="100000"/>
+              <a:buChar char="•"/>
+            </a:pPr>
+            <a:r>
+              <a:rPr lang="en-US" sz="1050" dirty="0">
+                <a:solidFill>
+                  <a:srgbClr val="000000"/>
+                </a:solidFill>
+                <a:latin typeface="Calibri" pitchFamily="34" charset="0"/>
+                <a:ea typeface="Calibri" pitchFamily="34" charset="-122"/>
+                <a:cs typeface="Calibri" pitchFamily="34" charset="-120"/>
+              </a:rPr>
+              <a:t>[16] A. Rule, M. F. Chiang, and M. R. Hribar, "Using electronic health record audit logs to study clinical activity: a systematic review of aims, measures, and methods," Journal of the American Medical Informatics Association, vol. 27, no. 3, pp. 480–490, 2020, doi:10.1093/jamia/ocz196.</a:t>
+            </a:r>
+            <a:endParaRPr lang="en-US" sz="1600" dirty="0"/>
+          </a:p>
         </p:txBody>
       </p:sp>
       <p:sp>
@@ -2600,7 +2664,7 @@
                 <a:ea typeface="Calibri" pitchFamily="34" charset="-122"/>
                 <a:cs typeface="Calibri" pitchFamily="34" charset="-120"/>
               </a:rPr>
-              <a:t>IEEE format. [1]–[12] are cited on the literature slides; [13] on the problem, methodology and results slides.</a:t>
+              <a:t>IEEE format. [1]–[12] and [14]–[16] are cited on the literature slides; [13] on the problem, methodology and results slides.</a:t>
             </a:r>
             <a:endParaRPr lang="en-US" sz="1200" dirty="0"/>
           </a:p>
@@ -2672,7 +2736,7 @@
                 <a:ea typeface="Calibri" pitchFamily="34" charset="-122"/>
                 <a:cs typeface="Calibri" pitchFamily="34" charset="-120"/>
               </a:rPr>
-              <a:t>14</a:t>
+              <a:t>15</a:t>
             </a:r>
             <a:endParaRPr lang="en-US" sz="1000" dirty="0"/>
           </a:p>
@@ -3324,7 +3388,7 @@
                           <a:ea typeface="Calibri" pitchFamily="34" charset="-122"/>
                           <a:cs typeface="Calibri" pitchFamily="34" charset="-120"/>
                         </a:rPr>
-                        <a:t>7</a:t>
+                        <a:t>6</a:t>
                       </a:r>
                       <a:endParaRPr lang="en-US" sz="1300" dirty="0">
                         <a:latin typeface="Calibri" charset="0"/>
@@ -3379,7 +3443,7 @@
                     <a:p>
                       <a:r>
                         <a:rPr sz="1150"/>
-                        <a:t>ACM IMC, 2025</a:t>
+                        <a:t>Gundelach et al., 2025</a:t>
                       </a:r>
                     </a:p>
                   </a:txBody>
@@ -3429,7 +3493,7 @@
                     <a:p>
                       <a:r>
                         <a:rPr sz="1150"/>
-                        <a:t>Scrapers Selectively Respect robots.txt Directives — large-scale study</a:t>
+                        <a:t>Detecting Bot Detection: Prevalence, Techniques, Implications — arXiv</a:t>
                       </a:r>
                     </a:p>
                   </a:txBody>
@@ -3479,7 +3543,7 @@
                     <a:p>
                       <a:r>
                         <a:rPr sz="1150"/>
-                        <a:t>Internet-scale measurement of robots.txt compliance in the wild</a:t>
+                        <a:t>Systematic review (2020–25) of bot-detection at top security / web venues</a:t>
                       </a:r>
                     </a:p>
                   </a:txBody>
@@ -3529,7 +3593,7 @@
                     <a:p>
                       <a:r>
                         <a:rPr sz="1150"/>
-                        <a:t>Compliance observed after the fact, never designed into the technique</a:t>
+                        <a:t>Maps the detection landscape; authenticated / credentialed portal scraping under-studied</a:t>
                       </a:r>
                     </a:p>
                   </a:txBody>
@@ -3575,6 +3639,278 @@
                 <a:extLst>
                   <a:ext uri="{0D108BD9-81ED-4DB2-BD59-A6C34878D82A}">
                     <a16:rowId xmlns:a16="http://schemas.microsoft.com/office/drawing/2014/main" val="10001"/>
+                  </a:ext>
+                </a:extLst>
+              </a:tr>
+              <a:tr h="566928">
+                <a:tc>
+                  <a:txBody>
+                    <a:bodyPr/>
+                    <a:lstStyle/>
+                    <a:p>
+                      <a:pPr marL="0" indent="0">
+                        <a:buNone/>
+                      </a:pPr>
+                      <a:r>
+                        <a:rPr lang="en-US" sz="1150" dirty="0">
+                          <a:solidFill>
+                            <a:srgbClr val="000000"/>
+                          </a:solidFill>
+                          <a:latin typeface="Calibri" pitchFamily="34" charset="0"/>
+                          <a:ea typeface="Calibri" pitchFamily="34" charset="-122"/>
+                          <a:cs typeface="Calibri" pitchFamily="34" charset="-120"/>
+                        </a:rPr>
+                        <a:t>7</a:t>
+                      </a:r>
+                      <a:endParaRPr lang="en-US" sz="1300" dirty="0">
+                        <a:latin typeface="Calibri" charset="0"/>
+                        <a:ea typeface="Calibri" charset="0"/>
+                        <a:cs typeface="Calibri" charset="0"/>
+                      </a:endParaRPr>
+                    </a:p>
+                  </a:txBody>
+                  <a:tcPr marL="54864" marR="54864" marT="54864" marB="54864" anchor="ctr">
+                    <a:lnL w="9525" cap="flat" cmpd="sng" algn="ctr">
+                      <a:solidFill>
+                        <a:srgbClr val="BFBFBF"/>
+                      </a:solidFill>
+                      <a:prstDash val="solid"/>
+                      <a:round/>
+                      <a:headEnd type="none" w="med" len="med"/>
+                      <a:tailEnd type="none" w="med" len="med"/>
+                    </a:lnL>
+                    <a:lnR w="9525" cap="flat" cmpd="sng" algn="ctr">
+                      <a:solidFill>
+                        <a:srgbClr val="BFBFBF"/>
+                      </a:solidFill>
+                      <a:prstDash val="solid"/>
+                      <a:round/>
+                      <a:headEnd type="none" w="med" len="med"/>
+                      <a:tailEnd type="none" w="med" len="med"/>
+                    </a:lnR>
+                    <a:lnT w="9525" cap="flat" cmpd="sng" algn="ctr">
+                      <a:solidFill>
+                        <a:srgbClr val="BFBFBF"/>
+                      </a:solidFill>
+                      <a:prstDash val="solid"/>
+                      <a:round/>
+                      <a:headEnd type="none" w="med" len="med"/>
+                      <a:tailEnd type="none" w="med" len="med"/>
+                    </a:lnT>
+                    <a:lnB w="9525" cap="flat" cmpd="sng" algn="ctr">
+                      <a:solidFill>
+                        <a:srgbClr val="BFBFBF"/>
+                      </a:solidFill>
+                      <a:prstDash val="solid"/>
+                      <a:round/>
+                      <a:headEnd type="none" w="med" len="med"/>
+                      <a:tailEnd type="none" w="med" len="med"/>
+                    </a:lnB>
+                  </a:tcPr>
+                </a:tc>
+                <a:tc>
+                  <a:txBody>
+                    <a:bodyPr/>
+                    <a:lstStyle/>
+                    <a:p>
+                      <a:r>
+                        <a:rPr sz="1150"/>
+                        <a:t>ACM IMC, 2025</a:t>
+                      </a:r>
+                    </a:p>
+                  </a:txBody>
+                  <a:tcPr marL="54864" marR="54864" marT="54864" marB="54864" anchor="ctr">
+                    <a:lnL w="9525" cap="flat" cmpd="sng" algn="ctr">
+                      <a:solidFill>
+                        <a:srgbClr val="BFBFBF"/>
+                      </a:solidFill>
+                      <a:prstDash val="solid"/>
+                      <a:round/>
+                      <a:headEnd type="none" w="med" len="med"/>
+                      <a:tailEnd type="none" w="med" len="med"/>
+                    </a:lnL>
+                    <a:lnR w="9525" cap="flat" cmpd="sng" algn="ctr">
+                      <a:solidFill>
+                        <a:srgbClr val="BFBFBF"/>
+                      </a:solidFill>
+                      <a:prstDash val="solid"/>
+                      <a:round/>
+                      <a:headEnd type="none" w="med" len="med"/>
+                      <a:tailEnd type="none" w="med" len="med"/>
+                    </a:lnR>
+                    <a:lnT w="9525" cap="flat" cmpd="sng" algn="ctr">
+                      <a:solidFill>
+                        <a:srgbClr val="BFBFBF"/>
+                      </a:solidFill>
+                      <a:prstDash val="solid"/>
+                      <a:round/>
+                      <a:headEnd type="none" w="med" len="med"/>
+                      <a:tailEnd type="none" w="med" len="med"/>
+                    </a:lnT>
+                    <a:lnB w="9525" cap="flat" cmpd="sng" algn="ctr">
+                      <a:solidFill>
+                        <a:srgbClr val="BFBFBF"/>
+                      </a:solidFill>
+                      <a:prstDash val="solid"/>
+                      <a:round/>
+                      <a:headEnd type="none" w="med" len="med"/>
+                      <a:tailEnd type="none" w="med" len="med"/>
+                    </a:lnB>
+                  </a:tcPr>
+                </a:tc>
+                <a:tc>
+                  <a:txBody>
+                    <a:bodyPr/>
+                    <a:lstStyle/>
+                    <a:p>
+                      <a:r>
+                        <a:rPr sz="1150"/>
+                        <a:t>Scrapers Selectively Respect robots.txt Directives — large-scale study</a:t>
+                      </a:r>
+                    </a:p>
+                  </a:txBody>
+                  <a:tcPr marL="54864" marR="54864" marT="54864" marB="54864" anchor="ctr">
+                    <a:lnL w="9525" cap="flat" cmpd="sng" algn="ctr">
+                      <a:solidFill>
+                        <a:srgbClr val="BFBFBF"/>
+                      </a:solidFill>
+                      <a:prstDash val="solid"/>
+                      <a:round/>
+                      <a:headEnd type="none" w="med" len="med"/>
+                      <a:tailEnd type="none" w="med" len="med"/>
+                    </a:lnL>
+                    <a:lnR w="9525" cap="flat" cmpd="sng" algn="ctr">
+                      <a:solidFill>
+                        <a:srgbClr val="BFBFBF"/>
+                      </a:solidFill>
+                      <a:prstDash val="solid"/>
+                      <a:round/>
+                      <a:headEnd type="none" w="med" len="med"/>
+                      <a:tailEnd type="none" w="med" len="med"/>
+                    </a:lnR>
+                    <a:lnT w="9525" cap="flat" cmpd="sng" algn="ctr">
+                      <a:solidFill>
+                        <a:srgbClr val="BFBFBF"/>
+                      </a:solidFill>
+                      <a:prstDash val="solid"/>
+                      <a:round/>
+                      <a:headEnd type="none" w="med" len="med"/>
+                      <a:tailEnd type="none" w="med" len="med"/>
+                    </a:lnT>
+                    <a:lnB w="9525" cap="flat" cmpd="sng" algn="ctr">
+                      <a:solidFill>
+                        <a:srgbClr val="BFBFBF"/>
+                      </a:solidFill>
+                      <a:prstDash val="solid"/>
+                      <a:round/>
+                      <a:headEnd type="none" w="med" len="med"/>
+                      <a:tailEnd type="none" w="med" len="med"/>
+                    </a:lnB>
+                  </a:tcPr>
+                </a:tc>
+                <a:tc>
+                  <a:txBody>
+                    <a:bodyPr/>
+                    <a:lstStyle/>
+                    <a:p>
+                      <a:r>
+                        <a:rPr sz="1150"/>
+                        <a:t>Internet-scale measurement of robots.txt compliance in the wild</a:t>
+                      </a:r>
+                    </a:p>
+                  </a:txBody>
+                  <a:tcPr marL="54864" marR="54864" marT="54864" marB="54864" anchor="ctr">
+                    <a:lnL w="9525" cap="flat" cmpd="sng" algn="ctr">
+                      <a:solidFill>
+                        <a:srgbClr val="BFBFBF"/>
+                      </a:solidFill>
+                      <a:prstDash val="solid"/>
+                      <a:round/>
+                      <a:headEnd type="none" w="med" len="med"/>
+                      <a:tailEnd type="none" w="med" len="med"/>
+                    </a:lnL>
+                    <a:lnR w="9525" cap="flat" cmpd="sng" algn="ctr">
+                      <a:solidFill>
+                        <a:srgbClr val="BFBFBF"/>
+                      </a:solidFill>
+                      <a:prstDash val="solid"/>
+                      <a:round/>
+                      <a:headEnd type="none" w="med" len="med"/>
+                      <a:tailEnd type="none" w="med" len="med"/>
+                    </a:lnR>
+                    <a:lnT w="9525" cap="flat" cmpd="sng" algn="ctr">
+                      <a:solidFill>
+                        <a:srgbClr val="BFBFBF"/>
+                      </a:solidFill>
+                      <a:prstDash val="solid"/>
+                      <a:round/>
+                      <a:headEnd type="none" w="med" len="med"/>
+                      <a:tailEnd type="none" w="med" len="med"/>
+                    </a:lnT>
+                    <a:lnB w="9525" cap="flat" cmpd="sng" algn="ctr">
+                      <a:solidFill>
+                        <a:srgbClr val="BFBFBF"/>
+                      </a:solidFill>
+                      <a:prstDash val="solid"/>
+                      <a:round/>
+                      <a:headEnd type="none" w="med" len="med"/>
+                      <a:tailEnd type="none" w="med" len="med"/>
+                    </a:lnB>
+                  </a:tcPr>
+                </a:tc>
+                <a:tc>
+                  <a:txBody>
+                    <a:bodyPr/>
+                    <a:lstStyle/>
+                    <a:p>
+                      <a:r>
+                        <a:rPr sz="1150"/>
+                        <a:t>Compliance observed after the fact, never designed into the technique</a:t>
+                      </a:r>
+                    </a:p>
+                  </a:txBody>
+                  <a:tcPr marL="54864" marR="54864" marT="54864" marB="54864" anchor="ctr">
+                    <a:lnL w="9525" cap="flat" cmpd="sng" algn="ctr">
+                      <a:solidFill>
+                        <a:srgbClr val="BFBFBF"/>
+                      </a:solidFill>
+                      <a:prstDash val="solid"/>
+                      <a:round/>
+                      <a:headEnd type="none" w="med" len="med"/>
+                      <a:tailEnd type="none" w="med" len="med"/>
+                    </a:lnL>
+                    <a:lnR w="9525" cap="flat" cmpd="sng" algn="ctr">
+                      <a:solidFill>
+                        <a:srgbClr val="BFBFBF"/>
+                      </a:solidFill>
+                      <a:prstDash val="solid"/>
+                      <a:round/>
+                      <a:headEnd type="none" w="med" len="med"/>
+                      <a:tailEnd type="none" w="med" len="med"/>
+                    </a:lnR>
+                    <a:lnT w="9525" cap="flat" cmpd="sng" algn="ctr">
+                      <a:solidFill>
+                        <a:srgbClr val="BFBFBF"/>
+                      </a:solidFill>
+                      <a:prstDash val="solid"/>
+                      <a:round/>
+                      <a:headEnd type="none" w="med" len="med"/>
+                      <a:tailEnd type="none" w="med" len="med"/>
+                    </a:lnT>
+                    <a:lnB w="9525" cap="flat" cmpd="sng" algn="ctr">
+                      <a:solidFill>
+                        <a:srgbClr val="BFBFBF"/>
+                      </a:solidFill>
+                      <a:prstDash val="solid"/>
+                      <a:round/>
+                      <a:headEnd type="none" w="med" len="med"/>
+                      <a:tailEnd type="none" w="med" len="med"/>
+                    </a:lnB>
+                  </a:tcPr>
+                </a:tc>
+                <a:extLst>
+                  <a:ext uri="{0D108BD9-81ED-4DB2-BD59-A6C34878D82A}">
+                    <a16:rowId xmlns:a16="http://schemas.microsoft.com/office/drawing/2014/main" val="10002"/>
                   </a:ext>
                 </a:extLst>
               </a:tr>
@@ -3846,7 +4182,7 @@
                 </a:tc>
                 <a:extLst>
                   <a:ext uri="{0D108BD9-81ED-4DB2-BD59-A6C34878D82A}">
-                    <a16:rowId xmlns:a16="http://schemas.microsoft.com/office/drawing/2014/main" val="10002"/>
+                    <a16:rowId xmlns:a16="http://schemas.microsoft.com/office/drawing/2014/main" val="10003"/>
                   </a:ext>
                 </a:extLst>
               </a:tr>
@@ -4118,7 +4454,7 @@
                 </a:tc>
                 <a:extLst>
                   <a:ext uri="{0D108BD9-81ED-4DB2-BD59-A6C34878D82A}">
-                    <a16:rowId xmlns:a16="http://schemas.microsoft.com/office/drawing/2014/main" val="10003"/>
+                    <a16:rowId xmlns:a16="http://schemas.microsoft.com/office/drawing/2014/main" val="10004"/>
                   </a:ext>
                 </a:extLst>
               </a:tr>
@@ -4390,7 +4726,7 @@
                 </a:tc>
                 <a:extLst>
                   <a:ext uri="{0D108BD9-81ED-4DB2-BD59-A6C34878D82A}">
-                    <a16:rowId xmlns:a16="http://schemas.microsoft.com/office/drawing/2014/main" val="10004"/>
+                    <a16:rowId xmlns:a16="http://schemas.microsoft.com/office/drawing/2014/main" val="10005"/>
                   </a:ext>
                 </a:extLst>
               </a:tr>
@@ -4404,7 +4740,7 @@
                         <a:buNone/>
                       </a:pPr>
                       <a:r>
-                        <a:rPr lang="en-US" sz="1150" dirty="0">
+                        <a:rPr lang="en-US" sz="1300" dirty="0">
                           <a:solidFill>
                             <a:srgbClr val="000000"/>
                           </a:solidFill>
@@ -4412,7 +4748,7 @@
                           <a:ea typeface="Calibri" pitchFamily="34" charset="-122"/>
                           <a:cs typeface="Calibri" pitchFamily="34" charset="-120"/>
                         </a:rPr>
-                        <a:t>11</a:t>
+                        <a:t/>
                       </a:r>
                       <a:endParaRPr lang="en-US" sz="1300" dirty="0">
                         <a:latin typeface="Calibri" charset="0"/>
@@ -4464,12 +4800,7 @@
                   <a:txBody>
                     <a:bodyPr/>
                     <a:lstStyle/>
-                    <a:p>
-                      <a:r>
-                        <a:rPr sz="1150"/>
-                        <a:t>npj Digital Medicine, 2025</a:t>
-                      </a:r>
-                    </a:p>
+                    <a:p/>
                   </a:txBody>
                   <a:tcPr marL="54864" marR="54864" marT="54864" marB="54864" anchor="ctr">
                     <a:lnL w="9525" cap="flat" cmpd="sng" algn="ctr">
@@ -4514,12 +4845,7 @@
                   <a:txBody>
                     <a:bodyPr/>
                     <a:lstStyle/>
-                    <a:p>
-                      <a:r>
-                        <a:rPr sz="1150"/>
-                        <a:t>Digital Data Protection in Indian Medical Research and Healthcare</a:t>
-                      </a:r>
-                    </a:p>
+                    <a:p/>
                   </a:txBody>
                   <a:tcPr marL="54864" marR="54864" marT="54864" marB="54864" anchor="ctr">
                     <a:lnL w="9525" cap="flat" cmpd="sng" algn="ctr">
@@ -4564,12 +4890,7 @@
                   <a:txBody>
                     <a:bodyPr/>
                     <a:lstStyle/>
-                    <a:p>
-                      <a:r>
-                        <a:rPr sz="1150"/>
-                        <a:t>Synthesis of challenges and recommendations</a:t>
-                      </a:r>
-                    </a:p>
+                    <a:p/>
                   </a:txBody>
                   <a:tcPr marL="54864" marR="54864" marT="54864" marB="54864" anchor="ctr">
                     <a:lnL w="9525" cap="flat" cmpd="sng" algn="ctr">
@@ -4614,284 +4935,7 @@
                   <a:txBody>
                     <a:bodyPr/>
                     <a:lstStyle/>
-                    <a:p>
-                      <a:r>
-                        <a:rPr sz="1150"/>
-                        <a:t>Recommendations not translated into checkable controls on data-collection pipelines</a:t>
-                      </a:r>
-                    </a:p>
-                  </a:txBody>
-                  <a:tcPr marL="54864" marR="54864" marT="54864" marB="54864" anchor="ctr">
-                    <a:lnL w="9525" cap="flat" cmpd="sng" algn="ctr">
-                      <a:solidFill>
-                        <a:srgbClr val="BFBFBF"/>
-                      </a:solidFill>
-                      <a:prstDash val="solid"/>
-                      <a:round/>
-                      <a:headEnd type="none" w="med" len="med"/>
-                      <a:tailEnd type="none" w="med" len="med"/>
-                    </a:lnL>
-                    <a:lnR w="9525" cap="flat" cmpd="sng" algn="ctr">
-                      <a:solidFill>
-                        <a:srgbClr val="BFBFBF"/>
-                      </a:solidFill>
-                      <a:prstDash val="solid"/>
-                      <a:round/>
-                      <a:headEnd type="none" w="med" len="med"/>
-                      <a:tailEnd type="none" w="med" len="med"/>
-                    </a:lnR>
-                    <a:lnT w="9525" cap="flat" cmpd="sng" algn="ctr">
-                      <a:solidFill>
-                        <a:srgbClr val="BFBFBF"/>
-                      </a:solidFill>
-                      <a:prstDash val="solid"/>
-                      <a:round/>
-                      <a:headEnd type="none" w="med" len="med"/>
-                      <a:tailEnd type="none" w="med" len="med"/>
-                    </a:lnT>
-                    <a:lnB w="9525" cap="flat" cmpd="sng" algn="ctr">
-                      <a:solidFill>
-                        <a:srgbClr val="BFBFBF"/>
-                      </a:solidFill>
-                      <a:prstDash val="solid"/>
-                      <a:round/>
-                      <a:headEnd type="none" w="med" len="med"/>
-                      <a:tailEnd type="none" w="med" len="med"/>
-                    </a:lnB>
-                  </a:tcPr>
-                </a:tc>
-                <a:extLst>
-                  <a:ext uri="{0D108BD9-81ED-4DB2-BD59-A6C34878D82A}">
-                    <a16:rowId xmlns:a16="http://schemas.microsoft.com/office/drawing/2014/main" val="10005"/>
-                  </a:ext>
-                </a:extLst>
-              </a:tr>
-              <a:tr h="566928">
-                <a:tc>
-                  <a:txBody>
-                    <a:bodyPr/>
-                    <a:lstStyle/>
-                    <a:p>
-                      <a:pPr marL="0" indent="0">
-                        <a:buNone/>
-                      </a:pPr>
-                      <a:r>
-                        <a:rPr lang="en-US" sz="1150" dirty="0">
-                          <a:solidFill>
-                            <a:srgbClr val="000000"/>
-                          </a:solidFill>
-                          <a:latin typeface="Calibri" pitchFamily="34" charset="0"/>
-                          <a:ea typeface="Calibri" pitchFamily="34" charset="-122"/>
-                          <a:cs typeface="Calibri" pitchFamily="34" charset="-120"/>
-                        </a:rPr>
-                        <a:t>12</a:t>
-                      </a:r>
-                      <a:endParaRPr lang="en-US" sz="1300" dirty="0">
-                        <a:latin typeface="Calibri" charset="0"/>
-                        <a:ea typeface="Calibri" charset="0"/>
-                        <a:cs typeface="Calibri" charset="0"/>
-                      </a:endParaRPr>
-                    </a:p>
-                  </a:txBody>
-                  <a:tcPr marL="54864" marR="54864" marT="54864" marB="54864" anchor="ctr">
-                    <a:lnL w="9525" cap="flat" cmpd="sng" algn="ctr">
-                      <a:solidFill>
-                        <a:srgbClr val="BFBFBF"/>
-                      </a:solidFill>
-                      <a:prstDash val="solid"/>
-                      <a:round/>
-                      <a:headEnd type="none" w="med" len="med"/>
-                      <a:tailEnd type="none" w="med" len="med"/>
-                    </a:lnL>
-                    <a:lnR w="9525" cap="flat" cmpd="sng" algn="ctr">
-                      <a:solidFill>
-                        <a:srgbClr val="BFBFBF"/>
-                      </a:solidFill>
-                      <a:prstDash val="solid"/>
-                      <a:round/>
-                      <a:headEnd type="none" w="med" len="med"/>
-                      <a:tailEnd type="none" w="med" len="med"/>
-                    </a:lnR>
-                    <a:lnT w="9525" cap="flat" cmpd="sng" algn="ctr">
-                      <a:solidFill>
-                        <a:srgbClr val="BFBFBF"/>
-                      </a:solidFill>
-                      <a:prstDash val="solid"/>
-                      <a:round/>
-                      <a:headEnd type="none" w="med" len="med"/>
-                      <a:tailEnd type="none" w="med" len="med"/>
-                    </a:lnT>
-                    <a:lnB w="9525" cap="flat" cmpd="sng" algn="ctr">
-                      <a:solidFill>
-                        <a:srgbClr val="BFBFBF"/>
-                      </a:solidFill>
-                      <a:prstDash val="solid"/>
-                      <a:round/>
-                      <a:headEnd type="none" w="med" len="med"/>
-                      <a:tailEnd type="none" w="med" len="med"/>
-                    </a:lnB>
-                  </a:tcPr>
-                </a:tc>
-                <a:tc>
-                  <a:txBody>
-                    <a:bodyPr/>
-                    <a:lstStyle/>
-                    <a:p>
-                      <a:r>
-                        <a:rPr sz="1150"/>
-                        <a:t>Brown et al., 2025</a:t>
-                      </a:r>
-                    </a:p>
-                  </a:txBody>
-                  <a:tcPr marL="54864" marR="54864" marT="54864" marB="54864" anchor="ctr">
-                    <a:lnL w="9525" cap="flat" cmpd="sng" algn="ctr">
-                      <a:solidFill>
-                        <a:srgbClr val="BFBFBF"/>
-                      </a:solidFill>
-                      <a:prstDash val="solid"/>
-                      <a:round/>
-                      <a:headEnd type="none" w="med" len="med"/>
-                      <a:tailEnd type="none" w="med" len="med"/>
-                    </a:lnL>
-                    <a:lnR w="9525" cap="flat" cmpd="sng" algn="ctr">
-                      <a:solidFill>
-                        <a:srgbClr val="BFBFBF"/>
-                      </a:solidFill>
-                      <a:prstDash val="solid"/>
-                      <a:round/>
-                      <a:headEnd type="none" w="med" len="med"/>
-                      <a:tailEnd type="none" w="med" len="med"/>
-                    </a:lnR>
-                    <a:lnT w="9525" cap="flat" cmpd="sng" algn="ctr">
-                      <a:solidFill>
-                        <a:srgbClr val="BFBFBF"/>
-                      </a:solidFill>
-                      <a:prstDash val="solid"/>
-                      <a:round/>
-                      <a:headEnd type="none" w="med" len="med"/>
-                      <a:tailEnd type="none" w="med" len="med"/>
-                    </a:lnT>
-                    <a:lnB w="9525" cap="flat" cmpd="sng" algn="ctr">
-                      <a:solidFill>
-                        <a:srgbClr val="BFBFBF"/>
-                      </a:solidFill>
-                      <a:prstDash val="solid"/>
-                      <a:round/>
-                      <a:headEnd type="none" w="med" len="med"/>
-                      <a:tailEnd type="none" w="med" len="med"/>
-                    </a:lnB>
-                  </a:tcPr>
-                </a:tc>
-                <a:tc>
-                  <a:txBody>
-                    <a:bodyPr/>
-                    <a:lstStyle/>
-                    <a:p>
-                      <a:r>
-                        <a:rPr sz="1150"/>
-                        <a:t>Web Scraping for Research: Legal, Ethical, Institutional and Scientific Considerations — Big Data &amp; Society</a:t>
-                      </a:r>
-                    </a:p>
-                  </a:txBody>
-                  <a:tcPr marL="54864" marR="54864" marT="54864" marB="54864" anchor="ctr">
-                    <a:lnL w="9525" cap="flat" cmpd="sng" algn="ctr">
-                      <a:solidFill>
-                        <a:srgbClr val="BFBFBF"/>
-                      </a:solidFill>
-                      <a:prstDash val="solid"/>
-                      <a:round/>
-                      <a:headEnd type="none" w="med" len="med"/>
-                      <a:tailEnd type="none" w="med" len="med"/>
-                    </a:lnL>
-                    <a:lnR w="9525" cap="flat" cmpd="sng" algn="ctr">
-                      <a:solidFill>
-                        <a:srgbClr val="BFBFBF"/>
-                      </a:solidFill>
-                      <a:prstDash val="solid"/>
-                      <a:round/>
-                      <a:headEnd type="none" w="med" len="med"/>
-                      <a:tailEnd type="none" w="med" len="med"/>
-                    </a:lnR>
-                    <a:lnT w="9525" cap="flat" cmpd="sng" algn="ctr">
-                      <a:solidFill>
-                        <a:srgbClr val="BFBFBF"/>
-                      </a:solidFill>
-                      <a:prstDash val="solid"/>
-                      <a:round/>
-                      <a:headEnd type="none" w="med" len="med"/>
-                      <a:tailEnd type="none" w="med" len="med"/>
-                    </a:lnT>
-                    <a:lnB w="9525" cap="flat" cmpd="sng" algn="ctr">
-                      <a:solidFill>
-                        <a:srgbClr val="BFBFBF"/>
-                      </a:solidFill>
-                      <a:prstDash val="solid"/>
-                      <a:round/>
-                      <a:headEnd type="none" w="med" len="med"/>
-                      <a:tailEnd type="none" w="med" len="med"/>
-                    </a:lnB>
-                  </a:tcPr>
-                </a:tc>
-                <a:tc>
-                  <a:txBody>
-                    <a:bodyPr/>
-                    <a:lstStyle/>
-                    <a:p>
-                      <a:r>
-                        <a:rPr sz="1150"/>
-                        <a:t>Multi-dimensional qualitative framework (contract, CFAA, IP, privacy, IRB, validity)</a:t>
-                      </a:r>
-                    </a:p>
-                  </a:txBody>
-                  <a:tcPr marL="54864" marR="54864" marT="54864" marB="54864" anchor="ctr">
-                    <a:lnL w="9525" cap="flat" cmpd="sng" algn="ctr">
-                      <a:solidFill>
-                        <a:srgbClr val="BFBFBF"/>
-                      </a:solidFill>
-                      <a:prstDash val="solid"/>
-                      <a:round/>
-                      <a:headEnd type="none" w="med" len="med"/>
-                      <a:tailEnd type="none" w="med" len="med"/>
-                    </a:lnL>
-                    <a:lnR w="9525" cap="flat" cmpd="sng" algn="ctr">
-                      <a:solidFill>
-                        <a:srgbClr val="BFBFBF"/>
-                      </a:solidFill>
-                      <a:prstDash val="solid"/>
-                      <a:round/>
-                      <a:headEnd type="none" w="med" len="med"/>
-                      <a:tailEnd type="none" w="med" len="med"/>
-                    </a:lnR>
-                    <a:lnT w="9525" cap="flat" cmpd="sng" algn="ctr">
-                      <a:solidFill>
-                        <a:srgbClr val="BFBFBF"/>
-                      </a:solidFill>
-                      <a:prstDash val="solid"/>
-                      <a:round/>
-                      <a:headEnd type="none" w="med" len="med"/>
-                      <a:tailEnd type="none" w="med" len="med"/>
-                    </a:lnT>
-                    <a:lnB w="9525" cap="flat" cmpd="sng" algn="ctr">
-                      <a:solidFill>
-                        <a:srgbClr val="BFBFBF"/>
-                      </a:solidFill>
-                      <a:prstDash val="solid"/>
-                      <a:round/>
-                      <a:headEnd type="none" w="med" len="med"/>
-                      <a:tailEnd type="none" w="med" len="med"/>
-                    </a:lnB>
-                  </a:tcPr>
-                </a:tc>
-                <a:tc>
-                  <a:txBody>
-                    <a:bodyPr/>
-                    <a:lstStyle/>
-                    <a:p>
-                      <a:r>
-                        <a:rPr sz="1150"/>
-                        <a:t>A checklist, not a scored per-technique benchmark</a:t>
-                      </a:r>
-                    </a:p>
+                    <a:p/>
                   </a:txBody>
                   <a:tcPr marL="54864" marR="54864" marT="54864" marB="54864" anchor="ctr">
                     <a:lnL w="9525" cap="flat" cmpd="sng" algn="ctr">
@@ -4975,7 +5019,7 @@
                 <a:ea typeface="Calibri" pitchFamily="34" charset="-122"/>
                 <a:cs typeface="Calibri" pitchFamily="34" charset="-120"/>
               </a:rPr>
-              <a:t>Research gap: scraping is evaluated on coverage and cost; healthcare-data law is analysed doctrinally; nothing between them scores a technique on compliance. [13] is the Act itself.</a:t>
+              <a:t>[6]–[7]: the web-measurement view — compliance observed after the fact. [8]–[9]: HIS structure and interoperability standards, silent on lawful extraction. [10]: the Act read for healthcare, doctrinally.</a:t>
             </a:r>
             <a:endParaRPr lang="en-US" sz="1200" dirty="0"/>
           </a:p>
@@ -5032,7 +5076,2188 @@
                 <a:ea typeface="Calibri" pitchFamily="34" charset="-122"/>
                 <a:cs typeface="Calibri" pitchFamily="34" charset="-120"/>
               </a:rPr>
-              <a:t>11</a:t>
+              <a:t>7</a:t>
+            </a:r>
+            <a:endParaRPr lang="en-US" sz="1000" dirty="0"/>
+          </a:p>
+        </p:txBody>
+      </p:sp>
+      <p:sp>
+        <p:nvSpPr>
+          <p:cNvPr id="3" name="Text 1"/>
+          <p:cNvSpPr txBox="1"/>
+          <p:nvPr/>
+        </p:nvSpPr>
+        <p:spPr>
+          <a:xfrm>
+            <a:off x="548640" y="320040"/>
+            <a:ext cx="9601200" cy="685800"/>
+          </a:xfrm>
+          <a:prstGeom prst="rect">
+            <a:avLst/>
+          </a:prstGeom>
+          <a:noFill/>
+          <a:ln/>
+        </p:spPr>
+        <p:txBody>
+          <a:bodyPr wrap="square" lIns="0" tIns="0" rIns="0" bIns="0" rtlCol="0" anchor="ctr"/>
+          <a:lstStyle/>
+          <a:p>
+            <a:pPr marL="0" indent="0">
+              <a:buNone/>
+            </a:pPr>
+            <a:r>
+              <a:rPr lang="en-US" sz="2800" b="1" dirty="0">
+                <a:solidFill>
+                  <a:srgbClr val="1D2F82"/>
+                </a:solidFill>
+                <a:latin typeface="Calibri" pitchFamily="34" charset="0"/>
+                <a:ea typeface="Calibri" pitchFamily="34" charset="-122"/>
+                <a:cs typeface="Calibri" pitchFamily="34" charset="-120"/>
+              </a:rPr>
+              <a:t>Detailed Literature Review (contd.)</a:t>
+            </a:r>
+            <a:endParaRPr lang="en-US" sz="2800" dirty="0"/>
+          </a:p>
+        </p:txBody>
+      </p:sp>
+      <p:pic>
+        <p:nvPicPr>
+          <p:cNvPr id="4" name="Image 0" descr="logo.png"/>
+          <p:cNvPicPr>
+            <a:picLocks noChangeAspect="1"/>
+          </p:cNvPicPr>
+          <p:nvPr/>
+        </p:nvPicPr>
+        <p:blipFill>
+          <a:blip r:embed="rId2"/>
+          <a:stretch>
+            <a:fillRect/>
+          </a:stretch>
+        </p:blipFill>
+        <p:spPr>
+          <a:xfrm>
+            <a:off x="10362895" y="320040"/>
+            <a:ext cx="1371600" cy="518746"/>
+          </a:xfrm>
+          <a:prstGeom prst="rect">
+            <a:avLst/>
+          </a:prstGeom>
+        </p:spPr>
+      </p:pic>
+      <p:graphicFrame>
+        <p:nvGraphicFramePr>
+          <p:cNvPr id="6" name="Table 0"/>
+          <p:cNvGraphicFramePr>
+            <a:graphicFrameLocks noGrp="1"/>
+          </p:cNvGraphicFramePr>
+          <p:nvPr>
+            <p:extLst>
+              <p:ext uri="{D42A27DB-BD31-4B8C-83A1-F6EECF244321}">
+                <p14:modId xmlns:p14="http://schemas.microsoft.com/office/powerpoint/2010/main" val="1579011935"/>
+              </p:ext>
+            </p:extLst>
+          </p:nvPr>
+        </p:nvGraphicFramePr>
+        <p:xfrm>
+          <a:off x="548640" y="1371600"/>
+          <a:ext cx="11091672" cy="3968496"/>
+        </p:xfrm>
+        <a:graphic>
+          <a:graphicData uri="http://schemas.openxmlformats.org/drawingml/2006/table">
+            <a:tbl>
+              <a:tblPr/>
+              <a:tblGrid>
+                <a:gridCol w="548640">
+                  <a:extLst>
+                    <a:ext uri="{9D8B030D-6E8A-4147-A177-3AD203B41FA5}">
+                      <a16:colId xmlns:a16="http://schemas.microsoft.com/office/drawing/2014/main" val="20000"/>
+                    </a:ext>
+                  </a:extLst>
+                </a:gridCol>
+                <a:gridCol w="1920240">
+                  <a:extLst>
+                    <a:ext uri="{9D8B030D-6E8A-4147-A177-3AD203B41FA5}">
+                      <a16:colId xmlns:a16="http://schemas.microsoft.com/office/drawing/2014/main" val="20001"/>
+                    </a:ext>
+                  </a:extLst>
+                </a:gridCol>
+                <a:gridCol w="3108960">
+                  <a:extLst>
+                    <a:ext uri="{9D8B030D-6E8A-4147-A177-3AD203B41FA5}">
+                      <a16:colId xmlns:a16="http://schemas.microsoft.com/office/drawing/2014/main" val="20002"/>
+                    </a:ext>
+                  </a:extLst>
+                </a:gridCol>
+                <a:gridCol w="2377440">
+                  <a:extLst>
+                    <a:ext uri="{9D8B030D-6E8A-4147-A177-3AD203B41FA5}">
+                      <a16:colId xmlns:a16="http://schemas.microsoft.com/office/drawing/2014/main" val="20003"/>
+                    </a:ext>
+                  </a:extLst>
+                </a:gridCol>
+                <a:gridCol w="3136392">
+                  <a:extLst>
+                    <a:ext uri="{9D8B030D-6E8A-4147-A177-3AD203B41FA5}">
+                      <a16:colId xmlns:a16="http://schemas.microsoft.com/office/drawing/2014/main" val="20004"/>
+                    </a:ext>
+                  </a:extLst>
+                </a:gridCol>
+              </a:tblGrid>
+              <a:tr h="566928">
+                <a:tc>
+                  <a:txBody>
+                    <a:bodyPr/>
+                    <a:lstStyle/>
+                    <a:p>
+                      <a:pPr marL="0" indent="0">
+                        <a:buNone/>
+                      </a:pPr>
+                      <a:r>
+                        <a:rPr lang="en-US" sz="1150" b="1" dirty="0">
+                          <a:solidFill>
+                            <a:srgbClr val="FFFFFF"/>
+                          </a:solidFill>
+                          <a:latin typeface="Calibri" pitchFamily="34" charset="0"/>
+                          <a:ea typeface="Calibri" pitchFamily="34" charset="-122"/>
+                          <a:cs typeface="Calibri" pitchFamily="34" charset="-120"/>
+                        </a:rPr>
+                        <a:t>No.</a:t>
+                      </a:r>
+                      <a:endParaRPr lang="en-US" sz="1300" dirty="0">
+                        <a:latin typeface="Calibri" charset="0"/>
+                        <a:ea typeface="Calibri" charset="0"/>
+                        <a:cs typeface="Calibri" charset="0"/>
+                      </a:endParaRPr>
+                    </a:p>
+                  </a:txBody>
+                  <a:tcPr marL="54864" marR="54864" marT="54864" marB="54864" anchor="ctr">
+                    <a:lnL w="9525" cap="flat" cmpd="sng" algn="ctr">
+                      <a:solidFill>
+                        <a:srgbClr val="BFBFBF"/>
+                      </a:solidFill>
+                      <a:prstDash val="solid"/>
+                      <a:round/>
+                      <a:headEnd type="none" w="med" len="med"/>
+                      <a:tailEnd type="none" w="med" len="med"/>
+                    </a:lnL>
+                    <a:lnR w="9525" cap="flat" cmpd="sng" algn="ctr">
+                      <a:solidFill>
+                        <a:srgbClr val="BFBFBF"/>
+                      </a:solidFill>
+                      <a:prstDash val="solid"/>
+                      <a:round/>
+                      <a:headEnd type="none" w="med" len="med"/>
+                      <a:tailEnd type="none" w="med" len="med"/>
+                    </a:lnR>
+                    <a:lnT w="9525" cap="flat" cmpd="sng" algn="ctr">
+                      <a:solidFill>
+                        <a:srgbClr val="BFBFBF"/>
+                      </a:solidFill>
+                      <a:prstDash val="solid"/>
+                      <a:round/>
+                      <a:headEnd type="none" w="med" len="med"/>
+                      <a:tailEnd type="none" w="med" len="med"/>
+                    </a:lnT>
+                    <a:lnB w="9525" cap="flat" cmpd="sng" algn="ctr">
+                      <a:solidFill>
+                        <a:srgbClr val="BFBFBF"/>
+                      </a:solidFill>
+                      <a:prstDash val="solid"/>
+                      <a:round/>
+                      <a:headEnd type="none" w="med" len="med"/>
+                      <a:tailEnd type="none" w="med" len="med"/>
+                    </a:lnB>
+                    <a:solidFill>
+                      <a:srgbClr val="1D2F82"/>
+                    </a:solidFill>
+                  </a:tcPr>
+                </a:tc>
+                <a:tc>
+                  <a:txBody>
+                    <a:bodyPr/>
+                    <a:lstStyle/>
+                    <a:p>
+                      <a:pPr marL="0" indent="0">
+                        <a:buNone/>
+                      </a:pPr>
+                      <a:r>
+                        <a:rPr lang="en-US" sz="1150" b="1" dirty="0">
+                          <a:solidFill>
+                            <a:srgbClr val="FFFFFF"/>
+                          </a:solidFill>
+                          <a:latin typeface="Calibri" pitchFamily="34" charset="0"/>
+                          <a:ea typeface="Calibri" pitchFamily="34" charset="-122"/>
+                          <a:cs typeface="Calibri" pitchFamily="34" charset="-120"/>
+                        </a:rPr>
+                        <a:t>Author(s) &amp; Year</a:t>
+                      </a:r>
+                      <a:endParaRPr lang="en-US" sz="1300" dirty="0">
+                        <a:latin typeface="Calibri" charset="0"/>
+                        <a:ea typeface="Calibri" charset="0"/>
+                        <a:cs typeface="Calibri" charset="0"/>
+                      </a:endParaRPr>
+                    </a:p>
+                  </a:txBody>
+                  <a:tcPr marL="54864" marR="54864" marT="54864" marB="54864" anchor="ctr">
+                    <a:lnL w="9525" cap="flat" cmpd="sng" algn="ctr">
+                      <a:solidFill>
+                        <a:srgbClr val="BFBFBF"/>
+                      </a:solidFill>
+                      <a:prstDash val="solid"/>
+                      <a:round/>
+                      <a:headEnd type="none" w="med" len="med"/>
+                      <a:tailEnd type="none" w="med" len="med"/>
+                    </a:lnL>
+                    <a:lnR w="9525" cap="flat" cmpd="sng" algn="ctr">
+                      <a:solidFill>
+                        <a:srgbClr val="BFBFBF"/>
+                      </a:solidFill>
+                      <a:prstDash val="solid"/>
+                      <a:round/>
+                      <a:headEnd type="none" w="med" len="med"/>
+                      <a:tailEnd type="none" w="med" len="med"/>
+                    </a:lnR>
+                    <a:lnT w="9525" cap="flat" cmpd="sng" algn="ctr">
+                      <a:solidFill>
+                        <a:srgbClr val="BFBFBF"/>
+                      </a:solidFill>
+                      <a:prstDash val="solid"/>
+                      <a:round/>
+                      <a:headEnd type="none" w="med" len="med"/>
+                      <a:tailEnd type="none" w="med" len="med"/>
+                    </a:lnT>
+                    <a:lnB w="9525" cap="flat" cmpd="sng" algn="ctr">
+                      <a:solidFill>
+                        <a:srgbClr val="BFBFBF"/>
+                      </a:solidFill>
+                      <a:prstDash val="solid"/>
+                      <a:round/>
+                      <a:headEnd type="none" w="med" len="med"/>
+                      <a:tailEnd type="none" w="med" len="med"/>
+                    </a:lnB>
+                    <a:solidFill>
+                      <a:srgbClr val="1D2F82"/>
+                    </a:solidFill>
+                  </a:tcPr>
+                </a:tc>
+                <a:tc>
+                  <a:txBody>
+                    <a:bodyPr/>
+                    <a:lstStyle/>
+                    <a:p>
+                      <a:pPr marL="0" indent="0">
+                        <a:buNone/>
+                      </a:pPr>
+                      <a:r>
+                        <a:rPr lang="en-US" sz="1150" b="1" dirty="0">
+                          <a:solidFill>
+                            <a:srgbClr val="FFFFFF"/>
+                          </a:solidFill>
+                          <a:latin typeface="Calibri" pitchFamily="34" charset="0"/>
+                          <a:ea typeface="Calibri" pitchFamily="34" charset="-122"/>
+                          <a:cs typeface="Calibri" pitchFamily="34" charset="-120"/>
+                        </a:rPr>
+                        <a:t>Title / Source</a:t>
+                      </a:r>
+                      <a:endParaRPr lang="en-US" sz="1300" dirty="0">
+                        <a:latin typeface="Calibri" charset="0"/>
+                        <a:ea typeface="Calibri" charset="0"/>
+                        <a:cs typeface="Calibri" charset="0"/>
+                      </a:endParaRPr>
+                    </a:p>
+                  </a:txBody>
+                  <a:tcPr marL="54864" marR="54864" marT="54864" marB="54864" anchor="ctr">
+                    <a:lnL w="9525" cap="flat" cmpd="sng" algn="ctr">
+                      <a:solidFill>
+                        <a:srgbClr val="BFBFBF"/>
+                      </a:solidFill>
+                      <a:prstDash val="solid"/>
+                      <a:round/>
+                      <a:headEnd type="none" w="med" len="med"/>
+                      <a:tailEnd type="none" w="med" len="med"/>
+                    </a:lnL>
+                    <a:lnR w="9525" cap="flat" cmpd="sng" algn="ctr">
+                      <a:solidFill>
+                        <a:srgbClr val="BFBFBF"/>
+                      </a:solidFill>
+                      <a:prstDash val="solid"/>
+                      <a:round/>
+                      <a:headEnd type="none" w="med" len="med"/>
+                      <a:tailEnd type="none" w="med" len="med"/>
+                    </a:lnR>
+                    <a:lnT w="9525" cap="flat" cmpd="sng" algn="ctr">
+                      <a:solidFill>
+                        <a:srgbClr val="BFBFBF"/>
+                      </a:solidFill>
+                      <a:prstDash val="solid"/>
+                      <a:round/>
+                      <a:headEnd type="none" w="med" len="med"/>
+                      <a:tailEnd type="none" w="med" len="med"/>
+                    </a:lnT>
+                    <a:lnB w="9525" cap="flat" cmpd="sng" algn="ctr">
+                      <a:solidFill>
+                        <a:srgbClr val="BFBFBF"/>
+                      </a:solidFill>
+                      <a:prstDash val="solid"/>
+                      <a:round/>
+                      <a:headEnd type="none" w="med" len="med"/>
+                      <a:tailEnd type="none" w="med" len="med"/>
+                    </a:lnB>
+                    <a:solidFill>
+                      <a:srgbClr val="1D2F82"/>
+                    </a:solidFill>
+                  </a:tcPr>
+                </a:tc>
+                <a:tc>
+                  <a:txBody>
+                    <a:bodyPr/>
+                    <a:lstStyle/>
+                    <a:p>
+                      <a:pPr marL="0" indent="0">
+                        <a:buNone/>
+                      </a:pPr>
+                      <a:r>
+                        <a:rPr lang="en-US" sz="1150" b="1" dirty="0">
+                          <a:solidFill>
+                            <a:srgbClr val="FFFFFF"/>
+                          </a:solidFill>
+                          <a:latin typeface="Calibri" pitchFamily="34" charset="0"/>
+                          <a:ea typeface="Calibri" pitchFamily="34" charset="-122"/>
+                          <a:cs typeface="Calibri" pitchFamily="34" charset="-120"/>
+                        </a:rPr>
+                        <a:t>Method / Approach</a:t>
+                      </a:r>
+                      <a:endParaRPr lang="en-US" sz="1300" dirty="0">
+                        <a:latin typeface="Calibri" charset="0"/>
+                        <a:ea typeface="Calibri" charset="0"/>
+                        <a:cs typeface="Calibri" charset="0"/>
+                      </a:endParaRPr>
+                    </a:p>
+                  </a:txBody>
+                  <a:tcPr marL="54864" marR="54864" marT="54864" marB="54864" anchor="ctr">
+                    <a:lnL w="9525" cap="flat" cmpd="sng" algn="ctr">
+                      <a:solidFill>
+                        <a:srgbClr val="BFBFBF"/>
+                      </a:solidFill>
+                      <a:prstDash val="solid"/>
+                      <a:round/>
+                      <a:headEnd type="none" w="med" len="med"/>
+                      <a:tailEnd type="none" w="med" len="med"/>
+                    </a:lnL>
+                    <a:lnR w="9525" cap="flat" cmpd="sng" algn="ctr">
+                      <a:solidFill>
+                        <a:srgbClr val="BFBFBF"/>
+                      </a:solidFill>
+                      <a:prstDash val="solid"/>
+                      <a:round/>
+                      <a:headEnd type="none" w="med" len="med"/>
+                      <a:tailEnd type="none" w="med" len="med"/>
+                    </a:lnR>
+                    <a:lnT w="9525" cap="flat" cmpd="sng" algn="ctr">
+                      <a:solidFill>
+                        <a:srgbClr val="BFBFBF"/>
+                      </a:solidFill>
+                      <a:prstDash val="solid"/>
+                      <a:round/>
+                      <a:headEnd type="none" w="med" len="med"/>
+                      <a:tailEnd type="none" w="med" len="med"/>
+                    </a:lnT>
+                    <a:lnB w="9525" cap="flat" cmpd="sng" algn="ctr">
+                      <a:solidFill>
+                        <a:srgbClr val="BFBFBF"/>
+                      </a:solidFill>
+                      <a:prstDash val="solid"/>
+                      <a:round/>
+                      <a:headEnd type="none" w="med" len="med"/>
+                      <a:tailEnd type="none" w="med" len="med"/>
+                    </a:lnB>
+                    <a:solidFill>
+                      <a:srgbClr val="1D2F82"/>
+                    </a:solidFill>
+                  </a:tcPr>
+                </a:tc>
+                <a:tc>
+                  <a:txBody>
+                    <a:bodyPr/>
+                    <a:lstStyle/>
+                    <a:p>
+                      <a:pPr marL="0" indent="0">
+                        <a:buNone/>
+                      </a:pPr>
+                      <a:r>
+                        <a:rPr lang="en-US" sz="1150" b="1" dirty="0">
+                          <a:solidFill>
+                            <a:srgbClr val="FFFFFF"/>
+                          </a:solidFill>
+                          <a:latin typeface="Calibri" pitchFamily="34" charset="0"/>
+                          <a:ea typeface="Calibri" pitchFamily="34" charset="-122"/>
+                          <a:cs typeface="Calibri" pitchFamily="34" charset="-120"/>
+                        </a:rPr>
+                        <a:t>Findings &amp; Research Gap</a:t>
+                      </a:r>
+                      <a:endParaRPr lang="en-US" sz="1300" dirty="0">
+                        <a:latin typeface="Calibri" charset="0"/>
+                        <a:ea typeface="Calibri" charset="0"/>
+                        <a:cs typeface="Calibri" charset="0"/>
+                      </a:endParaRPr>
+                    </a:p>
+                  </a:txBody>
+                  <a:tcPr marL="54864" marR="54864" marT="54864" marB="54864" anchor="ctr">
+                    <a:lnL w="9525" cap="flat" cmpd="sng" algn="ctr">
+                      <a:solidFill>
+                        <a:srgbClr val="BFBFBF"/>
+                      </a:solidFill>
+                      <a:prstDash val="solid"/>
+                      <a:round/>
+                      <a:headEnd type="none" w="med" len="med"/>
+                      <a:tailEnd type="none" w="med" len="med"/>
+                    </a:lnL>
+                    <a:lnR w="9525" cap="flat" cmpd="sng" algn="ctr">
+                      <a:solidFill>
+                        <a:srgbClr val="BFBFBF"/>
+                      </a:solidFill>
+                      <a:prstDash val="solid"/>
+                      <a:round/>
+                      <a:headEnd type="none" w="med" len="med"/>
+                      <a:tailEnd type="none" w="med" len="med"/>
+                    </a:lnR>
+                    <a:lnT w="9525" cap="flat" cmpd="sng" algn="ctr">
+                      <a:solidFill>
+                        <a:srgbClr val="BFBFBF"/>
+                      </a:solidFill>
+                      <a:prstDash val="solid"/>
+                      <a:round/>
+                      <a:headEnd type="none" w="med" len="med"/>
+                      <a:tailEnd type="none" w="med" len="med"/>
+                    </a:lnT>
+                    <a:lnB w="9525" cap="flat" cmpd="sng" algn="ctr">
+                      <a:solidFill>
+                        <a:srgbClr val="BFBFBF"/>
+                      </a:solidFill>
+                      <a:prstDash val="solid"/>
+                      <a:round/>
+                      <a:headEnd type="none" w="med" len="med"/>
+                      <a:tailEnd type="none" w="med" len="med"/>
+                    </a:lnB>
+                    <a:solidFill>
+                      <a:srgbClr val="1D2F82"/>
+                    </a:solidFill>
+                  </a:tcPr>
+                </a:tc>
+                <a:extLst>
+                  <a:ext uri="{0D108BD9-81ED-4DB2-BD59-A6C34878D82A}">
+                    <a16:rowId xmlns:a16="http://schemas.microsoft.com/office/drawing/2014/main" val="10000"/>
+                  </a:ext>
+                </a:extLst>
+              </a:tr>
+              <a:tr h="566928">
+                <a:tc>
+                  <a:txBody>
+                    <a:bodyPr/>
+                    <a:lstStyle/>
+                    <a:p>
+                      <a:pPr marL="0" indent="0">
+                        <a:buNone/>
+                      </a:pPr>
+                      <a:r>
+                        <a:rPr lang="en-US" sz="1150" dirty="0">
+                          <a:solidFill>
+                            <a:srgbClr val="000000"/>
+                          </a:solidFill>
+                          <a:latin typeface="Calibri" pitchFamily="34" charset="0"/>
+                          <a:ea typeface="Calibri" pitchFamily="34" charset="-122"/>
+                          <a:cs typeface="Calibri" pitchFamily="34" charset="-120"/>
+                        </a:rPr>
+                        <a:t>11</a:t>
+                      </a:r>
+                      <a:endParaRPr lang="en-US" sz="1300" dirty="0">
+                        <a:latin typeface="Calibri" charset="0"/>
+                        <a:ea typeface="Calibri" charset="0"/>
+                        <a:cs typeface="Calibri" charset="0"/>
+                      </a:endParaRPr>
+                    </a:p>
+                  </a:txBody>
+                  <a:tcPr marL="54864" marR="54864" marT="54864" marB="54864" anchor="ctr">
+                    <a:lnL w="9525" cap="flat" cmpd="sng" algn="ctr">
+                      <a:solidFill>
+                        <a:srgbClr val="BFBFBF"/>
+                      </a:solidFill>
+                      <a:prstDash val="solid"/>
+                      <a:round/>
+                      <a:headEnd type="none" w="med" len="med"/>
+                      <a:tailEnd type="none" w="med" len="med"/>
+                    </a:lnL>
+                    <a:lnR w="9525" cap="flat" cmpd="sng" algn="ctr">
+                      <a:solidFill>
+                        <a:srgbClr val="BFBFBF"/>
+                      </a:solidFill>
+                      <a:prstDash val="solid"/>
+                      <a:round/>
+                      <a:headEnd type="none" w="med" len="med"/>
+                      <a:tailEnd type="none" w="med" len="med"/>
+                    </a:lnR>
+                    <a:lnT w="9525" cap="flat" cmpd="sng" algn="ctr">
+                      <a:solidFill>
+                        <a:srgbClr val="BFBFBF"/>
+                      </a:solidFill>
+                      <a:prstDash val="solid"/>
+                      <a:round/>
+                      <a:headEnd type="none" w="med" len="med"/>
+                      <a:tailEnd type="none" w="med" len="med"/>
+                    </a:lnT>
+                    <a:lnB w="9525" cap="flat" cmpd="sng" algn="ctr">
+                      <a:solidFill>
+                        <a:srgbClr val="BFBFBF"/>
+                      </a:solidFill>
+                      <a:prstDash val="solid"/>
+                      <a:round/>
+                      <a:headEnd type="none" w="med" len="med"/>
+                      <a:tailEnd type="none" w="med" len="med"/>
+                    </a:lnB>
+                  </a:tcPr>
+                </a:tc>
+                <a:tc>
+                  <a:txBody>
+                    <a:bodyPr/>
+                    <a:lstStyle/>
+                    <a:p>
+                      <a:r>
+                        <a:rPr sz="1150"/>
+                        <a:t>npj Digital Medicine, 2025</a:t>
+                      </a:r>
+                    </a:p>
+                  </a:txBody>
+                  <a:tcPr marL="54864" marR="54864" marT="54864" marB="54864" anchor="ctr">
+                    <a:lnL w="9525" cap="flat" cmpd="sng" algn="ctr">
+                      <a:solidFill>
+                        <a:srgbClr val="BFBFBF"/>
+                      </a:solidFill>
+                      <a:prstDash val="solid"/>
+                      <a:round/>
+                      <a:headEnd type="none" w="med" len="med"/>
+                      <a:tailEnd type="none" w="med" len="med"/>
+                    </a:lnL>
+                    <a:lnR w="9525" cap="flat" cmpd="sng" algn="ctr">
+                      <a:solidFill>
+                        <a:srgbClr val="BFBFBF"/>
+                      </a:solidFill>
+                      <a:prstDash val="solid"/>
+                      <a:round/>
+                      <a:headEnd type="none" w="med" len="med"/>
+                      <a:tailEnd type="none" w="med" len="med"/>
+                    </a:lnR>
+                    <a:lnT w="9525" cap="flat" cmpd="sng" algn="ctr">
+                      <a:solidFill>
+                        <a:srgbClr val="BFBFBF"/>
+                      </a:solidFill>
+                      <a:prstDash val="solid"/>
+                      <a:round/>
+                      <a:headEnd type="none" w="med" len="med"/>
+                      <a:tailEnd type="none" w="med" len="med"/>
+                    </a:lnT>
+                    <a:lnB w="9525" cap="flat" cmpd="sng" algn="ctr">
+                      <a:solidFill>
+                        <a:srgbClr val="BFBFBF"/>
+                      </a:solidFill>
+                      <a:prstDash val="solid"/>
+                      <a:round/>
+                      <a:headEnd type="none" w="med" len="med"/>
+                      <a:tailEnd type="none" w="med" len="med"/>
+                    </a:lnB>
+                  </a:tcPr>
+                </a:tc>
+                <a:tc>
+                  <a:txBody>
+                    <a:bodyPr/>
+                    <a:lstStyle/>
+                    <a:p>
+                      <a:r>
+                        <a:rPr sz="1150"/>
+                        <a:t>Digital Data Protection in Indian Medical Research and Healthcare</a:t>
+                      </a:r>
+                    </a:p>
+                  </a:txBody>
+                  <a:tcPr marL="54864" marR="54864" marT="54864" marB="54864" anchor="ctr">
+                    <a:lnL w="9525" cap="flat" cmpd="sng" algn="ctr">
+                      <a:solidFill>
+                        <a:srgbClr val="BFBFBF"/>
+                      </a:solidFill>
+                      <a:prstDash val="solid"/>
+                      <a:round/>
+                      <a:headEnd type="none" w="med" len="med"/>
+                      <a:tailEnd type="none" w="med" len="med"/>
+                    </a:lnL>
+                    <a:lnR w="9525" cap="flat" cmpd="sng" algn="ctr">
+                      <a:solidFill>
+                        <a:srgbClr val="BFBFBF"/>
+                      </a:solidFill>
+                      <a:prstDash val="solid"/>
+                      <a:round/>
+                      <a:headEnd type="none" w="med" len="med"/>
+                      <a:tailEnd type="none" w="med" len="med"/>
+                    </a:lnR>
+                    <a:lnT w="9525" cap="flat" cmpd="sng" algn="ctr">
+                      <a:solidFill>
+                        <a:srgbClr val="BFBFBF"/>
+                      </a:solidFill>
+                      <a:prstDash val="solid"/>
+                      <a:round/>
+                      <a:headEnd type="none" w="med" len="med"/>
+                      <a:tailEnd type="none" w="med" len="med"/>
+                    </a:lnT>
+                    <a:lnB w="9525" cap="flat" cmpd="sng" algn="ctr">
+                      <a:solidFill>
+                        <a:srgbClr val="BFBFBF"/>
+                      </a:solidFill>
+                      <a:prstDash val="solid"/>
+                      <a:round/>
+                      <a:headEnd type="none" w="med" len="med"/>
+                      <a:tailEnd type="none" w="med" len="med"/>
+                    </a:lnB>
+                  </a:tcPr>
+                </a:tc>
+                <a:tc>
+                  <a:txBody>
+                    <a:bodyPr/>
+                    <a:lstStyle/>
+                    <a:p>
+                      <a:r>
+                        <a:rPr sz="1150"/>
+                        <a:t>Synthesis of challenges and recommendations</a:t>
+                      </a:r>
+                    </a:p>
+                  </a:txBody>
+                  <a:tcPr marL="54864" marR="54864" marT="54864" marB="54864" anchor="ctr">
+                    <a:lnL w="9525" cap="flat" cmpd="sng" algn="ctr">
+                      <a:solidFill>
+                        <a:srgbClr val="BFBFBF"/>
+                      </a:solidFill>
+                      <a:prstDash val="solid"/>
+                      <a:round/>
+                      <a:headEnd type="none" w="med" len="med"/>
+                      <a:tailEnd type="none" w="med" len="med"/>
+                    </a:lnL>
+                    <a:lnR w="9525" cap="flat" cmpd="sng" algn="ctr">
+                      <a:solidFill>
+                        <a:srgbClr val="BFBFBF"/>
+                      </a:solidFill>
+                      <a:prstDash val="solid"/>
+                      <a:round/>
+                      <a:headEnd type="none" w="med" len="med"/>
+                      <a:tailEnd type="none" w="med" len="med"/>
+                    </a:lnR>
+                    <a:lnT w="9525" cap="flat" cmpd="sng" algn="ctr">
+                      <a:solidFill>
+                        <a:srgbClr val="BFBFBF"/>
+                      </a:solidFill>
+                      <a:prstDash val="solid"/>
+                      <a:round/>
+                      <a:headEnd type="none" w="med" len="med"/>
+                      <a:tailEnd type="none" w="med" len="med"/>
+                    </a:lnT>
+                    <a:lnB w="9525" cap="flat" cmpd="sng" algn="ctr">
+                      <a:solidFill>
+                        <a:srgbClr val="BFBFBF"/>
+                      </a:solidFill>
+                      <a:prstDash val="solid"/>
+                      <a:round/>
+                      <a:headEnd type="none" w="med" len="med"/>
+                      <a:tailEnd type="none" w="med" len="med"/>
+                    </a:lnB>
+                  </a:tcPr>
+                </a:tc>
+                <a:tc>
+                  <a:txBody>
+                    <a:bodyPr/>
+                    <a:lstStyle/>
+                    <a:p>
+                      <a:r>
+                        <a:rPr sz="1150"/>
+                        <a:t>Recommendations not translated into checkable controls on data-collection pipelines</a:t>
+                      </a:r>
+                    </a:p>
+                  </a:txBody>
+                  <a:tcPr marL="54864" marR="54864" marT="54864" marB="54864" anchor="ctr">
+                    <a:lnL w="9525" cap="flat" cmpd="sng" algn="ctr">
+                      <a:solidFill>
+                        <a:srgbClr val="BFBFBF"/>
+                      </a:solidFill>
+                      <a:prstDash val="solid"/>
+                      <a:round/>
+                      <a:headEnd type="none" w="med" len="med"/>
+                      <a:tailEnd type="none" w="med" len="med"/>
+                    </a:lnL>
+                    <a:lnR w="9525" cap="flat" cmpd="sng" algn="ctr">
+                      <a:solidFill>
+                        <a:srgbClr val="BFBFBF"/>
+                      </a:solidFill>
+                      <a:prstDash val="solid"/>
+                      <a:round/>
+                      <a:headEnd type="none" w="med" len="med"/>
+                      <a:tailEnd type="none" w="med" len="med"/>
+                    </a:lnR>
+                    <a:lnT w="9525" cap="flat" cmpd="sng" algn="ctr">
+                      <a:solidFill>
+                        <a:srgbClr val="BFBFBF"/>
+                      </a:solidFill>
+                      <a:prstDash val="solid"/>
+                      <a:round/>
+                      <a:headEnd type="none" w="med" len="med"/>
+                      <a:tailEnd type="none" w="med" len="med"/>
+                    </a:lnT>
+                    <a:lnB w="9525" cap="flat" cmpd="sng" algn="ctr">
+                      <a:solidFill>
+                        <a:srgbClr val="BFBFBF"/>
+                      </a:solidFill>
+                      <a:prstDash val="solid"/>
+                      <a:round/>
+                      <a:headEnd type="none" w="med" len="med"/>
+                      <a:tailEnd type="none" w="med" len="med"/>
+                    </a:lnB>
+                  </a:tcPr>
+                </a:tc>
+                <a:extLst>
+                  <a:ext uri="{0D108BD9-81ED-4DB2-BD59-A6C34878D82A}">
+                    <a16:rowId xmlns:a16="http://schemas.microsoft.com/office/drawing/2014/main" val="10001"/>
+                  </a:ext>
+                </a:extLst>
+              </a:tr>
+              <a:tr h="566928">
+                <a:tc>
+                  <a:txBody>
+                    <a:bodyPr/>
+                    <a:lstStyle/>
+                    <a:p>
+                      <a:pPr marL="0" indent="0">
+                        <a:buNone/>
+                      </a:pPr>
+                      <a:r>
+                        <a:rPr lang="en-US" sz="1150" dirty="0">
+                          <a:solidFill>
+                            <a:srgbClr val="000000"/>
+                          </a:solidFill>
+                          <a:latin typeface="Calibri" pitchFamily="34" charset="0"/>
+                          <a:ea typeface="Calibri" pitchFamily="34" charset="-122"/>
+                          <a:cs typeface="Calibri" pitchFamily="34" charset="-120"/>
+                        </a:rPr>
+                        <a:t>12</a:t>
+                      </a:r>
+                      <a:endParaRPr lang="en-US" sz="1300" dirty="0">
+                        <a:latin typeface="Calibri" charset="0"/>
+                        <a:ea typeface="Calibri" charset="0"/>
+                        <a:cs typeface="Calibri" charset="0"/>
+                      </a:endParaRPr>
+                    </a:p>
+                  </a:txBody>
+                  <a:tcPr marL="54864" marR="54864" marT="54864" marB="54864" anchor="ctr">
+                    <a:lnL w="9525" cap="flat" cmpd="sng" algn="ctr">
+                      <a:solidFill>
+                        <a:srgbClr val="BFBFBF"/>
+                      </a:solidFill>
+                      <a:prstDash val="solid"/>
+                      <a:round/>
+                      <a:headEnd type="none" w="med" len="med"/>
+                      <a:tailEnd type="none" w="med" len="med"/>
+                    </a:lnL>
+                    <a:lnR w="9525" cap="flat" cmpd="sng" algn="ctr">
+                      <a:solidFill>
+                        <a:srgbClr val="BFBFBF"/>
+                      </a:solidFill>
+                      <a:prstDash val="solid"/>
+                      <a:round/>
+                      <a:headEnd type="none" w="med" len="med"/>
+                      <a:tailEnd type="none" w="med" len="med"/>
+                    </a:lnR>
+                    <a:lnT w="9525" cap="flat" cmpd="sng" algn="ctr">
+                      <a:solidFill>
+                        <a:srgbClr val="BFBFBF"/>
+                      </a:solidFill>
+                      <a:prstDash val="solid"/>
+                      <a:round/>
+                      <a:headEnd type="none" w="med" len="med"/>
+                      <a:tailEnd type="none" w="med" len="med"/>
+                    </a:lnT>
+                    <a:lnB w="9525" cap="flat" cmpd="sng" algn="ctr">
+                      <a:solidFill>
+                        <a:srgbClr val="BFBFBF"/>
+                      </a:solidFill>
+                      <a:prstDash val="solid"/>
+                      <a:round/>
+                      <a:headEnd type="none" w="med" len="med"/>
+                      <a:tailEnd type="none" w="med" len="med"/>
+                    </a:lnB>
+                  </a:tcPr>
+                </a:tc>
+                <a:tc>
+                  <a:txBody>
+                    <a:bodyPr/>
+                    <a:lstStyle/>
+                    <a:p>
+                      <a:r>
+                        <a:rPr sz="1150"/>
+                        <a:t>Brown et al., 2025</a:t>
+                      </a:r>
+                    </a:p>
+                  </a:txBody>
+                  <a:tcPr marL="54864" marR="54864" marT="54864" marB="54864" anchor="ctr">
+                    <a:lnL w="9525" cap="flat" cmpd="sng" algn="ctr">
+                      <a:solidFill>
+                        <a:srgbClr val="BFBFBF"/>
+                      </a:solidFill>
+                      <a:prstDash val="solid"/>
+                      <a:round/>
+                      <a:headEnd type="none" w="med" len="med"/>
+                      <a:tailEnd type="none" w="med" len="med"/>
+                    </a:lnL>
+                    <a:lnR w="9525" cap="flat" cmpd="sng" algn="ctr">
+                      <a:solidFill>
+                        <a:srgbClr val="BFBFBF"/>
+                      </a:solidFill>
+                      <a:prstDash val="solid"/>
+                      <a:round/>
+                      <a:headEnd type="none" w="med" len="med"/>
+                      <a:tailEnd type="none" w="med" len="med"/>
+                    </a:lnR>
+                    <a:lnT w="9525" cap="flat" cmpd="sng" algn="ctr">
+                      <a:solidFill>
+                        <a:srgbClr val="BFBFBF"/>
+                      </a:solidFill>
+                      <a:prstDash val="solid"/>
+                      <a:round/>
+                      <a:headEnd type="none" w="med" len="med"/>
+                      <a:tailEnd type="none" w="med" len="med"/>
+                    </a:lnT>
+                    <a:lnB w="9525" cap="flat" cmpd="sng" algn="ctr">
+                      <a:solidFill>
+                        <a:srgbClr val="BFBFBF"/>
+                      </a:solidFill>
+                      <a:prstDash val="solid"/>
+                      <a:round/>
+                      <a:headEnd type="none" w="med" len="med"/>
+                      <a:tailEnd type="none" w="med" len="med"/>
+                    </a:lnB>
+                  </a:tcPr>
+                </a:tc>
+                <a:tc>
+                  <a:txBody>
+                    <a:bodyPr/>
+                    <a:lstStyle/>
+                    <a:p>
+                      <a:r>
+                        <a:rPr sz="1150"/>
+                        <a:t>Web Scraping for Research: Legal, Ethical, Institutional and Scientific Considerations — Big Data &amp; Society</a:t>
+                      </a:r>
+                    </a:p>
+                  </a:txBody>
+                  <a:tcPr marL="54864" marR="54864" marT="54864" marB="54864" anchor="ctr">
+                    <a:lnL w="9525" cap="flat" cmpd="sng" algn="ctr">
+                      <a:solidFill>
+                        <a:srgbClr val="BFBFBF"/>
+                      </a:solidFill>
+                      <a:prstDash val="solid"/>
+                      <a:round/>
+                      <a:headEnd type="none" w="med" len="med"/>
+                      <a:tailEnd type="none" w="med" len="med"/>
+                    </a:lnL>
+                    <a:lnR w="9525" cap="flat" cmpd="sng" algn="ctr">
+                      <a:solidFill>
+                        <a:srgbClr val="BFBFBF"/>
+                      </a:solidFill>
+                      <a:prstDash val="solid"/>
+                      <a:round/>
+                      <a:headEnd type="none" w="med" len="med"/>
+                      <a:tailEnd type="none" w="med" len="med"/>
+                    </a:lnR>
+                    <a:lnT w="9525" cap="flat" cmpd="sng" algn="ctr">
+                      <a:solidFill>
+                        <a:srgbClr val="BFBFBF"/>
+                      </a:solidFill>
+                      <a:prstDash val="solid"/>
+                      <a:round/>
+                      <a:headEnd type="none" w="med" len="med"/>
+                      <a:tailEnd type="none" w="med" len="med"/>
+                    </a:lnT>
+                    <a:lnB w="9525" cap="flat" cmpd="sng" algn="ctr">
+                      <a:solidFill>
+                        <a:srgbClr val="BFBFBF"/>
+                      </a:solidFill>
+                      <a:prstDash val="solid"/>
+                      <a:round/>
+                      <a:headEnd type="none" w="med" len="med"/>
+                      <a:tailEnd type="none" w="med" len="med"/>
+                    </a:lnB>
+                  </a:tcPr>
+                </a:tc>
+                <a:tc>
+                  <a:txBody>
+                    <a:bodyPr/>
+                    <a:lstStyle/>
+                    <a:p>
+                      <a:r>
+                        <a:rPr sz="1150"/>
+                        <a:t>Multi-dimensional qualitative framework (contract, CFAA, IP, privacy, IRB, validity)</a:t>
+                      </a:r>
+                    </a:p>
+                  </a:txBody>
+                  <a:tcPr marL="54864" marR="54864" marT="54864" marB="54864" anchor="ctr">
+                    <a:lnL w="9525" cap="flat" cmpd="sng" algn="ctr">
+                      <a:solidFill>
+                        <a:srgbClr val="BFBFBF"/>
+                      </a:solidFill>
+                      <a:prstDash val="solid"/>
+                      <a:round/>
+                      <a:headEnd type="none" w="med" len="med"/>
+                      <a:tailEnd type="none" w="med" len="med"/>
+                    </a:lnL>
+                    <a:lnR w="9525" cap="flat" cmpd="sng" algn="ctr">
+                      <a:solidFill>
+                        <a:srgbClr val="BFBFBF"/>
+                      </a:solidFill>
+                      <a:prstDash val="solid"/>
+                      <a:round/>
+                      <a:headEnd type="none" w="med" len="med"/>
+                      <a:tailEnd type="none" w="med" len="med"/>
+                    </a:lnR>
+                    <a:lnT w="9525" cap="flat" cmpd="sng" algn="ctr">
+                      <a:solidFill>
+                        <a:srgbClr val="BFBFBF"/>
+                      </a:solidFill>
+                      <a:prstDash val="solid"/>
+                      <a:round/>
+                      <a:headEnd type="none" w="med" len="med"/>
+                      <a:tailEnd type="none" w="med" len="med"/>
+                    </a:lnT>
+                    <a:lnB w="9525" cap="flat" cmpd="sng" algn="ctr">
+                      <a:solidFill>
+                        <a:srgbClr val="BFBFBF"/>
+                      </a:solidFill>
+                      <a:prstDash val="solid"/>
+                      <a:round/>
+                      <a:headEnd type="none" w="med" len="med"/>
+                      <a:tailEnd type="none" w="med" len="med"/>
+                    </a:lnB>
+                  </a:tcPr>
+                </a:tc>
+                <a:tc>
+                  <a:txBody>
+                    <a:bodyPr/>
+                    <a:lstStyle/>
+                    <a:p>
+                      <a:r>
+                        <a:rPr sz="1150"/>
+                        <a:t>A checklist, not a scored per-technique benchmark</a:t>
+                      </a:r>
+                    </a:p>
+                  </a:txBody>
+                  <a:tcPr marL="54864" marR="54864" marT="54864" marB="54864" anchor="ctr">
+                    <a:lnL w="9525" cap="flat" cmpd="sng" algn="ctr">
+                      <a:solidFill>
+                        <a:srgbClr val="BFBFBF"/>
+                      </a:solidFill>
+                      <a:prstDash val="solid"/>
+                      <a:round/>
+                      <a:headEnd type="none" w="med" len="med"/>
+                      <a:tailEnd type="none" w="med" len="med"/>
+                    </a:lnL>
+                    <a:lnR w="9525" cap="flat" cmpd="sng" algn="ctr">
+                      <a:solidFill>
+                        <a:srgbClr val="BFBFBF"/>
+                      </a:solidFill>
+                      <a:prstDash val="solid"/>
+                      <a:round/>
+                      <a:headEnd type="none" w="med" len="med"/>
+                      <a:tailEnd type="none" w="med" len="med"/>
+                    </a:lnR>
+                    <a:lnT w="9525" cap="flat" cmpd="sng" algn="ctr">
+                      <a:solidFill>
+                        <a:srgbClr val="BFBFBF"/>
+                      </a:solidFill>
+                      <a:prstDash val="solid"/>
+                      <a:round/>
+                      <a:headEnd type="none" w="med" len="med"/>
+                      <a:tailEnd type="none" w="med" len="med"/>
+                    </a:lnT>
+                    <a:lnB w="9525" cap="flat" cmpd="sng" algn="ctr">
+                      <a:solidFill>
+                        <a:srgbClr val="BFBFBF"/>
+                      </a:solidFill>
+                      <a:prstDash val="solid"/>
+                      <a:round/>
+                      <a:headEnd type="none" w="med" len="med"/>
+                      <a:tailEnd type="none" w="med" len="med"/>
+                    </a:lnB>
+                  </a:tcPr>
+                </a:tc>
+                <a:extLst>
+                  <a:ext uri="{0D108BD9-81ED-4DB2-BD59-A6C34878D82A}">
+                    <a16:rowId xmlns:a16="http://schemas.microsoft.com/office/drawing/2014/main" val="10002"/>
+                  </a:ext>
+                </a:extLst>
+              </a:tr>
+              <a:tr h="566928">
+                <a:tc>
+                  <a:txBody>
+                    <a:bodyPr/>
+                    <a:lstStyle/>
+                    <a:p>
+                      <a:pPr marL="0" indent="0">
+                        <a:buNone/>
+                      </a:pPr>
+                      <a:r>
+                        <a:rPr lang="en-US" sz="1150" dirty="0">
+                          <a:solidFill>
+                            <a:srgbClr val="000000"/>
+                          </a:solidFill>
+                          <a:latin typeface="Calibri" pitchFamily="34" charset="0"/>
+                          <a:ea typeface="Calibri" pitchFamily="34" charset="-122"/>
+                          <a:cs typeface="Calibri" pitchFamily="34" charset="-120"/>
+                        </a:rPr>
+                        <a:t>14</a:t>
+                      </a:r>
+                      <a:endParaRPr lang="en-US" sz="1300" dirty="0">
+                        <a:latin typeface="Calibri" charset="0"/>
+                        <a:ea typeface="Calibri" charset="0"/>
+                        <a:cs typeface="Calibri" charset="0"/>
+                      </a:endParaRPr>
+                    </a:p>
+                  </a:txBody>
+                  <a:tcPr marL="54864" marR="54864" marT="54864" marB="54864" anchor="ctr">
+                    <a:lnL w="9525" cap="flat" cmpd="sng" algn="ctr">
+                      <a:solidFill>
+                        <a:srgbClr val="BFBFBF"/>
+                      </a:solidFill>
+                      <a:prstDash val="solid"/>
+                      <a:round/>
+                      <a:headEnd type="none" w="med" len="med"/>
+                      <a:tailEnd type="none" w="med" len="med"/>
+                    </a:lnL>
+                    <a:lnR w="9525" cap="flat" cmpd="sng" algn="ctr">
+                      <a:solidFill>
+                        <a:srgbClr val="BFBFBF"/>
+                      </a:solidFill>
+                      <a:prstDash val="solid"/>
+                      <a:round/>
+                      <a:headEnd type="none" w="med" len="med"/>
+                      <a:tailEnd type="none" w="med" len="med"/>
+                    </a:lnR>
+                    <a:lnT w="9525" cap="flat" cmpd="sng" algn="ctr">
+                      <a:solidFill>
+                        <a:srgbClr val="BFBFBF"/>
+                      </a:solidFill>
+                      <a:prstDash val="solid"/>
+                      <a:round/>
+                      <a:headEnd type="none" w="med" len="med"/>
+                      <a:tailEnd type="none" w="med" len="med"/>
+                    </a:lnT>
+                    <a:lnB w="9525" cap="flat" cmpd="sng" algn="ctr">
+                      <a:solidFill>
+                        <a:srgbClr val="BFBFBF"/>
+                      </a:solidFill>
+                      <a:prstDash val="solid"/>
+                      <a:round/>
+                      <a:headEnd type="none" w="med" len="med"/>
+                      <a:tailEnd type="none" w="med" len="med"/>
+                    </a:lnB>
+                  </a:tcPr>
+                </a:tc>
+                <a:tc>
+                  <a:txBody>
+                    <a:bodyPr/>
+                    <a:lstStyle/>
+                    <a:p>
+                      <a:r>
+                        <a:rPr sz="1150"/>
+                        <a:t>Cook, 2025</a:t>
+                      </a:r>
+                    </a:p>
+                  </a:txBody>
+                  <a:tcPr marL="54864" marR="54864" marT="54864" marB="54864" anchor="ctr">
+                    <a:lnL w="9525" cap="flat" cmpd="sng" algn="ctr">
+                      <a:solidFill>
+                        <a:srgbClr val="BFBFBF"/>
+                      </a:solidFill>
+                      <a:prstDash val="solid"/>
+                      <a:round/>
+                      <a:headEnd type="none" w="med" len="med"/>
+                      <a:tailEnd type="none" w="med" len="med"/>
+                    </a:lnL>
+                    <a:lnR w="9525" cap="flat" cmpd="sng" algn="ctr">
+                      <a:solidFill>
+                        <a:srgbClr val="BFBFBF"/>
+                      </a:solidFill>
+                      <a:prstDash val="solid"/>
+                      <a:round/>
+                      <a:headEnd type="none" w="med" len="med"/>
+                      <a:tailEnd type="none" w="med" len="med"/>
+                    </a:lnR>
+                    <a:lnT w="9525" cap="flat" cmpd="sng" algn="ctr">
+                      <a:solidFill>
+                        <a:srgbClr val="BFBFBF"/>
+                      </a:solidFill>
+                      <a:prstDash val="solid"/>
+                      <a:round/>
+                      <a:headEnd type="none" w="med" len="med"/>
+                      <a:tailEnd type="none" w="med" len="med"/>
+                    </a:lnT>
+                    <a:lnB w="9525" cap="flat" cmpd="sng" algn="ctr">
+                      <a:solidFill>
+                        <a:srgbClr val="BFBFBF"/>
+                      </a:solidFill>
+                      <a:prstDash val="solid"/>
+                      <a:round/>
+                      <a:headEnd type="none" w="med" len="med"/>
+                      <a:tailEnd type="none" w="med" len="med"/>
+                    </a:lnB>
+                  </a:tcPr>
+                </a:tc>
+                <a:tc>
+                  <a:txBody>
+                    <a:bodyPr/>
+                    <a:lstStyle/>
+                    <a:p>
+                      <a:r>
+                        <a:rPr sz="1150"/>
+                        <a:t>Tokenization Techniques for Privacy-Preserving Healthcare Data — Frontiers in Drug Safety and Regulation</a:t>
+                      </a:r>
+                    </a:p>
+                  </a:txBody>
+                  <a:tcPr marL="54864" marR="54864" marT="54864" marB="54864" anchor="ctr">
+                    <a:lnL w="9525" cap="flat" cmpd="sng" algn="ctr">
+                      <a:solidFill>
+                        <a:srgbClr val="BFBFBF"/>
+                      </a:solidFill>
+                      <a:prstDash val="solid"/>
+                      <a:round/>
+                      <a:headEnd type="none" w="med" len="med"/>
+                      <a:tailEnd type="none" w="med" len="med"/>
+                    </a:lnL>
+                    <a:lnR w="9525" cap="flat" cmpd="sng" algn="ctr">
+                      <a:solidFill>
+                        <a:srgbClr val="BFBFBF"/>
+                      </a:solidFill>
+                      <a:prstDash val="solid"/>
+                      <a:round/>
+                      <a:headEnd type="none" w="med" len="med"/>
+                      <a:tailEnd type="none" w="med" len="med"/>
+                    </a:lnR>
+                    <a:lnT w="9525" cap="flat" cmpd="sng" algn="ctr">
+                      <a:solidFill>
+                        <a:srgbClr val="BFBFBF"/>
+                      </a:solidFill>
+                      <a:prstDash val="solid"/>
+                      <a:round/>
+                      <a:headEnd type="none" w="med" len="med"/>
+                      <a:tailEnd type="none" w="med" len="med"/>
+                    </a:lnT>
+                    <a:lnB w="9525" cap="flat" cmpd="sng" algn="ctr">
+                      <a:solidFill>
+                        <a:srgbClr val="BFBFBF"/>
+                      </a:solidFill>
+                      <a:prstDash val="solid"/>
+                      <a:round/>
+                      <a:headEnd type="none" w="med" len="med"/>
+                      <a:tailEnd type="none" w="med" len="med"/>
+                    </a:lnB>
+                  </a:tcPr>
+                </a:tc>
+                <a:tc>
+                  <a:txBody>
+                    <a:bodyPr/>
+                    <a:lstStyle/>
+                    <a:p>
+                      <a:r>
+                        <a:rPr sz="1150"/>
+                        <a:t>Deterministic vs referential (keyed, salted) tokenisation of health identifiers; linkage vs re-identification risk</a:t>
+                      </a:r>
+                    </a:p>
+                  </a:txBody>
+                  <a:tcPr marL="54864" marR="54864" marT="54864" marB="54864" anchor="ctr">
+                    <a:lnL w="9525" cap="flat" cmpd="sng" algn="ctr">
+                      <a:solidFill>
+                        <a:srgbClr val="BFBFBF"/>
+                      </a:solidFill>
+                      <a:prstDash val="solid"/>
+                      <a:round/>
+                      <a:headEnd type="none" w="med" len="med"/>
+                      <a:tailEnd type="none" w="med" len="med"/>
+                    </a:lnL>
+                    <a:lnR w="9525" cap="flat" cmpd="sng" algn="ctr">
+                      <a:solidFill>
+                        <a:srgbClr val="BFBFBF"/>
+                      </a:solidFill>
+                      <a:prstDash val="solid"/>
+                      <a:round/>
+                      <a:headEnd type="none" w="med" len="med"/>
+                      <a:tailEnd type="none" w="med" len="med"/>
+                    </a:lnR>
+                    <a:lnT w="9525" cap="flat" cmpd="sng" algn="ctr">
+                      <a:solidFill>
+                        <a:srgbClr val="BFBFBF"/>
+                      </a:solidFill>
+                      <a:prstDash val="solid"/>
+                      <a:round/>
+                      <a:headEnd type="none" w="med" len="med"/>
+                      <a:tailEnd type="none" w="med" len="med"/>
+                    </a:lnT>
+                    <a:lnB w="9525" cap="flat" cmpd="sng" algn="ctr">
+                      <a:solidFill>
+                        <a:srgbClr val="BFBFBF"/>
+                      </a:solidFill>
+                      <a:prstDash val="solid"/>
+                      <a:round/>
+                      <a:headEnd type="none" w="med" len="med"/>
+                      <a:tailEnd type="none" w="med" len="med"/>
+                    </a:lnB>
+                  </a:tcPr>
+                </a:tc>
+                <a:tc>
+                  <a:txBody>
+                    <a:bodyPr/>
+                    <a:lstStyle/>
+                    <a:p>
+                      <a:r>
+                        <a:rPr sz="1150"/>
+                        <a:t>Mechanism only; no check that an export actually carries tokens — our audit verifies it</a:t>
+                      </a:r>
+                    </a:p>
+                  </a:txBody>
+                  <a:tcPr marL="54864" marR="54864" marT="54864" marB="54864" anchor="ctr">
+                    <a:lnL w="9525" cap="flat" cmpd="sng" algn="ctr">
+                      <a:solidFill>
+                        <a:srgbClr val="BFBFBF"/>
+                      </a:solidFill>
+                      <a:prstDash val="solid"/>
+                      <a:round/>
+                      <a:headEnd type="none" w="med" len="med"/>
+                      <a:tailEnd type="none" w="med" len="med"/>
+                    </a:lnL>
+                    <a:lnR w="9525" cap="flat" cmpd="sng" algn="ctr">
+                      <a:solidFill>
+                        <a:srgbClr val="BFBFBF"/>
+                      </a:solidFill>
+                      <a:prstDash val="solid"/>
+                      <a:round/>
+                      <a:headEnd type="none" w="med" len="med"/>
+                      <a:tailEnd type="none" w="med" len="med"/>
+                    </a:lnR>
+                    <a:lnT w="9525" cap="flat" cmpd="sng" algn="ctr">
+                      <a:solidFill>
+                        <a:srgbClr val="BFBFBF"/>
+                      </a:solidFill>
+                      <a:prstDash val="solid"/>
+                      <a:round/>
+                      <a:headEnd type="none" w="med" len="med"/>
+                      <a:tailEnd type="none" w="med" len="med"/>
+                    </a:lnT>
+                    <a:lnB w="9525" cap="flat" cmpd="sng" algn="ctr">
+                      <a:solidFill>
+                        <a:srgbClr val="BFBFBF"/>
+                      </a:solidFill>
+                      <a:prstDash val="solid"/>
+                      <a:round/>
+                      <a:headEnd type="none" w="med" len="med"/>
+                      <a:tailEnd type="none" w="med" len="med"/>
+                    </a:lnB>
+                  </a:tcPr>
+                </a:tc>
+                <a:extLst>
+                  <a:ext uri="{0D108BD9-81ED-4DB2-BD59-A6C34878D82A}">
+                    <a16:rowId xmlns:a16="http://schemas.microsoft.com/office/drawing/2014/main" val="10003"/>
+                  </a:ext>
+                </a:extLst>
+              </a:tr>
+              <a:tr h="566928">
+                <a:tc>
+                  <a:txBody>
+                    <a:bodyPr/>
+                    <a:lstStyle/>
+                    <a:p>
+                      <a:pPr marL="0" indent="0">
+                        <a:buNone/>
+                      </a:pPr>
+                      <a:r>
+                        <a:rPr lang="en-US" sz="1150" dirty="0">
+                          <a:solidFill>
+                            <a:srgbClr val="000000"/>
+                          </a:solidFill>
+                          <a:latin typeface="Calibri" pitchFamily="34" charset="0"/>
+                          <a:ea typeface="Calibri" pitchFamily="34" charset="-122"/>
+                          <a:cs typeface="Calibri" pitchFamily="34" charset="-120"/>
+                        </a:rPr>
+                        <a:t>15</a:t>
+                      </a:r>
+                      <a:endParaRPr lang="en-US" sz="1300" dirty="0">
+                        <a:latin typeface="Calibri" charset="0"/>
+                        <a:ea typeface="Calibri" charset="0"/>
+                        <a:cs typeface="Calibri" charset="0"/>
+                      </a:endParaRPr>
+                    </a:p>
+                  </a:txBody>
+                  <a:tcPr marL="54864" marR="54864" marT="54864" marB="54864" anchor="ctr">
+                    <a:lnL w="9525" cap="flat" cmpd="sng" algn="ctr">
+                      <a:solidFill>
+                        <a:srgbClr val="BFBFBF"/>
+                      </a:solidFill>
+                      <a:prstDash val="solid"/>
+                      <a:round/>
+                      <a:headEnd type="none" w="med" len="med"/>
+                      <a:tailEnd type="none" w="med" len="med"/>
+                    </a:lnL>
+                    <a:lnR w="9525" cap="flat" cmpd="sng" algn="ctr">
+                      <a:solidFill>
+                        <a:srgbClr val="BFBFBF"/>
+                      </a:solidFill>
+                      <a:prstDash val="solid"/>
+                      <a:round/>
+                      <a:headEnd type="none" w="med" len="med"/>
+                      <a:tailEnd type="none" w="med" len="med"/>
+                    </a:lnR>
+                    <a:lnT w="9525" cap="flat" cmpd="sng" algn="ctr">
+                      <a:solidFill>
+                        <a:srgbClr val="BFBFBF"/>
+                      </a:solidFill>
+                      <a:prstDash val="solid"/>
+                      <a:round/>
+                      <a:headEnd type="none" w="med" len="med"/>
+                      <a:tailEnd type="none" w="med" len="med"/>
+                    </a:lnT>
+                    <a:lnB w="9525" cap="flat" cmpd="sng" algn="ctr">
+                      <a:solidFill>
+                        <a:srgbClr val="BFBFBF"/>
+                      </a:solidFill>
+                      <a:prstDash val="solid"/>
+                      <a:round/>
+                      <a:headEnd type="none" w="med" len="med"/>
+                      <a:tailEnd type="none" w="med" len="med"/>
+                    </a:lnB>
+                  </a:tcPr>
+                </a:tc>
+                <a:tc>
+                  <a:txBody>
+                    <a:bodyPr/>
+                    <a:lstStyle/>
+                    <a:p>
+                      <a:r>
+                        <a:rPr sz="1150"/>
+                        <a:t>de Carvalho Jr. &amp; Bandiera-Paiva, 2018</a:t>
+                      </a:r>
+                    </a:p>
+                  </a:txBody>
+                  <a:tcPr marL="54864" marR="54864" marT="54864" marB="54864" anchor="ctr">
+                    <a:lnL w="9525" cap="flat" cmpd="sng" algn="ctr">
+                      <a:solidFill>
+                        <a:srgbClr val="BFBFBF"/>
+                      </a:solidFill>
+                      <a:prstDash val="solid"/>
+                      <a:round/>
+                      <a:headEnd type="none" w="med" len="med"/>
+                      <a:tailEnd type="none" w="med" len="med"/>
+                    </a:lnL>
+                    <a:lnR w="9525" cap="flat" cmpd="sng" algn="ctr">
+                      <a:solidFill>
+                        <a:srgbClr val="BFBFBF"/>
+                      </a:solidFill>
+                      <a:prstDash val="solid"/>
+                      <a:round/>
+                      <a:headEnd type="none" w="med" len="med"/>
+                      <a:tailEnd type="none" w="med" len="med"/>
+                    </a:lnR>
+                    <a:lnT w="9525" cap="flat" cmpd="sng" algn="ctr">
+                      <a:solidFill>
+                        <a:srgbClr val="BFBFBF"/>
+                      </a:solidFill>
+                      <a:prstDash val="solid"/>
+                      <a:round/>
+                      <a:headEnd type="none" w="med" len="med"/>
+                      <a:tailEnd type="none" w="med" len="med"/>
+                    </a:lnT>
+                    <a:lnB w="9525" cap="flat" cmpd="sng" algn="ctr">
+                      <a:solidFill>
+                        <a:srgbClr val="BFBFBF"/>
+                      </a:solidFill>
+                      <a:prstDash val="solid"/>
+                      <a:round/>
+                      <a:headEnd type="none" w="med" len="med"/>
+                      <a:tailEnd type="none" w="med" len="med"/>
+                    </a:lnB>
+                  </a:tcPr>
+                </a:tc>
+                <a:tc>
+                  <a:txBody>
+                    <a:bodyPr/>
+                    <a:lstStyle/>
+                    <a:p>
+                      <a:r>
+                        <a:rPr sz="1150"/>
+                        <a:t>HIS Role-Based Access Control: Current Security Trends and Challenges — J. Healthcare Engineering</a:t>
+                      </a:r>
+                    </a:p>
+                  </a:txBody>
+                  <a:tcPr marL="54864" marR="54864" marT="54864" marB="54864" anchor="ctr">
+                    <a:lnL w="9525" cap="flat" cmpd="sng" algn="ctr">
+                      <a:solidFill>
+                        <a:srgbClr val="BFBFBF"/>
+                      </a:solidFill>
+                      <a:prstDash val="solid"/>
+                      <a:round/>
+                      <a:headEnd type="none" w="med" len="med"/>
+                      <a:tailEnd type="none" w="med" len="med"/>
+                    </a:lnL>
+                    <a:lnR w="9525" cap="flat" cmpd="sng" algn="ctr">
+                      <a:solidFill>
+                        <a:srgbClr val="BFBFBF"/>
+                      </a:solidFill>
+                      <a:prstDash val="solid"/>
+                      <a:round/>
+                      <a:headEnd type="none" w="med" len="med"/>
+                      <a:tailEnd type="none" w="med" len="med"/>
+                    </a:lnR>
+                    <a:lnT w="9525" cap="flat" cmpd="sng" algn="ctr">
+                      <a:solidFill>
+                        <a:srgbClr val="BFBFBF"/>
+                      </a:solidFill>
+                      <a:prstDash val="solid"/>
+                      <a:round/>
+                      <a:headEnd type="none" w="med" len="med"/>
+                      <a:tailEnd type="none" w="med" len="med"/>
+                    </a:lnT>
+                    <a:lnB w="9525" cap="flat" cmpd="sng" algn="ctr">
+                      <a:solidFill>
+                        <a:srgbClr val="BFBFBF"/>
+                      </a:solidFill>
+                      <a:prstDash val="solid"/>
+                      <a:round/>
+                      <a:headEnd type="none" w="med" len="med"/>
+                      <a:tailEnd type="none" w="med" len="med"/>
+                    </a:lnB>
+                  </a:tcPr>
+                </a:tc>
+                <a:tc>
+                  <a:txBody>
+                    <a:bodyPr/>
+                    <a:lstStyle/>
+                    <a:p>
+                      <a:r>
+                        <a:rPr sz="1150"/>
+                        <a:t>Industry-focused review of RBAC in health information systems</a:t>
+                      </a:r>
+                    </a:p>
+                  </a:txBody>
+                  <a:tcPr marL="54864" marR="54864" marT="54864" marB="54864" anchor="ctr">
+                    <a:lnL w="9525" cap="flat" cmpd="sng" algn="ctr">
+                      <a:solidFill>
+                        <a:srgbClr val="BFBFBF"/>
+                      </a:solidFill>
+                      <a:prstDash val="solid"/>
+                      <a:round/>
+                      <a:headEnd type="none" w="med" len="med"/>
+                      <a:tailEnd type="none" w="med" len="med"/>
+                    </a:lnL>
+                    <a:lnR w="9525" cap="flat" cmpd="sng" algn="ctr">
+                      <a:solidFill>
+                        <a:srgbClr val="BFBFBF"/>
+                      </a:solidFill>
+                      <a:prstDash val="solid"/>
+                      <a:round/>
+                      <a:headEnd type="none" w="med" len="med"/>
+                      <a:tailEnd type="none" w="med" len="med"/>
+                    </a:lnR>
+                    <a:lnT w="9525" cap="flat" cmpd="sng" algn="ctr">
+                      <a:solidFill>
+                        <a:srgbClr val="BFBFBF"/>
+                      </a:solidFill>
+                      <a:prstDash val="solid"/>
+                      <a:round/>
+                      <a:headEnd type="none" w="med" len="med"/>
+                      <a:tailEnd type="none" w="med" len="med"/>
+                    </a:lnT>
+                    <a:lnB w="9525" cap="flat" cmpd="sng" algn="ctr">
+                      <a:solidFill>
+                        <a:srgbClr val="BFBFBF"/>
+                      </a:solidFill>
+                      <a:prstDash val="solid"/>
+                      <a:round/>
+                      <a:headEnd type="none" w="med" len="med"/>
+                      <a:tailEnd type="none" w="med" len="med"/>
+                    </a:lnB>
+                  </a:tcPr>
+                </a:tc>
+                <a:tc>
+                  <a:txBody>
+                    <a:bodyPr/>
+                    <a:lstStyle/>
+                    <a:p>
+                      <a:r>
+                        <a:rPr sz="1150"/>
+                        <a:t>Static role lists both over- and under-grant; no derivation of scope from purpose — ours derives it</a:t>
+                      </a:r>
+                    </a:p>
+                  </a:txBody>
+                  <a:tcPr marL="54864" marR="54864" marT="54864" marB="54864" anchor="ctr">
+                    <a:lnL w="9525" cap="flat" cmpd="sng" algn="ctr">
+                      <a:solidFill>
+                        <a:srgbClr val="BFBFBF"/>
+                      </a:solidFill>
+                      <a:prstDash val="solid"/>
+                      <a:round/>
+                      <a:headEnd type="none" w="med" len="med"/>
+                      <a:tailEnd type="none" w="med" len="med"/>
+                    </a:lnL>
+                    <a:lnR w="9525" cap="flat" cmpd="sng" algn="ctr">
+                      <a:solidFill>
+                        <a:srgbClr val="BFBFBF"/>
+                      </a:solidFill>
+                      <a:prstDash val="solid"/>
+                      <a:round/>
+                      <a:headEnd type="none" w="med" len="med"/>
+                      <a:tailEnd type="none" w="med" len="med"/>
+                    </a:lnR>
+                    <a:lnT w="9525" cap="flat" cmpd="sng" algn="ctr">
+                      <a:solidFill>
+                        <a:srgbClr val="BFBFBF"/>
+                      </a:solidFill>
+                      <a:prstDash val="solid"/>
+                      <a:round/>
+                      <a:headEnd type="none" w="med" len="med"/>
+                      <a:tailEnd type="none" w="med" len="med"/>
+                    </a:lnT>
+                    <a:lnB w="9525" cap="flat" cmpd="sng" algn="ctr">
+                      <a:solidFill>
+                        <a:srgbClr val="BFBFBF"/>
+                      </a:solidFill>
+                      <a:prstDash val="solid"/>
+                      <a:round/>
+                      <a:headEnd type="none" w="med" len="med"/>
+                      <a:tailEnd type="none" w="med" len="med"/>
+                    </a:lnB>
+                  </a:tcPr>
+                </a:tc>
+                <a:extLst>
+                  <a:ext uri="{0D108BD9-81ED-4DB2-BD59-A6C34878D82A}">
+                    <a16:rowId xmlns:a16="http://schemas.microsoft.com/office/drawing/2014/main" val="10004"/>
+                  </a:ext>
+                </a:extLst>
+              </a:tr>
+              <a:tr h="566928">
+                <a:tc>
+                  <a:txBody>
+                    <a:bodyPr/>
+                    <a:lstStyle/>
+                    <a:p>
+                      <a:pPr marL="0" indent="0">
+                        <a:buNone/>
+                      </a:pPr>
+                      <a:r>
+                        <a:rPr lang="en-US" sz="1150" dirty="0">
+                          <a:solidFill>
+                            <a:srgbClr val="000000"/>
+                          </a:solidFill>
+                          <a:latin typeface="Calibri" pitchFamily="34" charset="0"/>
+                          <a:ea typeface="Calibri" pitchFamily="34" charset="-122"/>
+                          <a:cs typeface="Calibri" pitchFamily="34" charset="-120"/>
+                        </a:rPr>
+                        <a:t>16</a:t>
+                      </a:r>
+                      <a:endParaRPr lang="en-US" sz="1300" dirty="0">
+                        <a:latin typeface="Calibri" charset="0"/>
+                        <a:ea typeface="Calibri" charset="0"/>
+                        <a:cs typeface="Calibri" charset="0"/>
+                      </a:endParaRPr>
+                    </a:p>
+                  </a:txBody>
+                  <a:tcPr marL="54864" marR="54864" marT="54864" marB="54864" anchor="ctr">
+                    <a:lnL w="9525" cap="flat" cmpd="sng" algn="ctr">
+                      <a:solidFill>
+                        <a:srgbClr val="BFBFBF"/>
+                      </a:solidFill>
+                      <a:prstDash val="solid"/>
+                      <a:round/>
+                      <a:headEnd type="none" w="med" len="med"/>
+                      <a:tailEnd type="none" w="med" len="med"/>
+                    </a:lnL>
+                    <a:lnR w="9525" cap="flat" cmpd="sng" algn="ctr">
+                      <a:solidFill>
+                        <a:srgbClr val="BFBFBF"/>
+                      </a:solidFill>
+                      <a:prstDash val="solid"/>
+                      <a:round/>
+                      <a:headEnd type="none" w="med" len="med"/>
+                      <a:tailEnd type="none" w="med" len="med"/>
+                    </a:lnR>
+                    <a:lnT w="9525" cap="flat" cmpd="sng" algn="ctr">
+                      <a:solidFill>
+                        <a:srgbClr val="BFBFBF"/>
+                      </a:solidFill>
+                      <a:prstDash val="solid"/>
+                      <a:round/>
+                      <a:headEnd type="none" w="med" len="med"/>
+                      <a:tailEnd type="none" w="med" len="med"/>
+                    </a:lnT>
+                    <a:lnB w="9525" cap="flat" cmpd="sng" algn="ctr">
+                      <a:solidFill>
+                        <a:srgbClr val="BFBFBF"/>
+                      </a:solidFill>
+                      <a:prstDash val="solid"/>
+                      <a:round/>
+                      <a:headEnd type="none" w="med" len="med"/>
+                      <a:tailEnd type="none" w="med" len="med"/>
+                    </a:lnB>
+                  </a:tcPr>
+                </a:tc>
+                <a:tc>
+                  <a:txBody>
+                    <a:bodyPr/>
+                    <a:lstStyle/>
+                    <a:p>
+                      <a:r>
+                        <a:rPr sz="1150"/>
+                        <a:t>Rule, Chiang &amp; Hribar, 2020</a:t>
+                      </a:r>
+                    </a:p>
+                  </a:txBody>
+                  <a:tcPr marL="54864" marR="54864" marT="54864" marB="54864" anchor="ctr">
+                    <a:lnL w="9525" cap="flat" cmpd="sng" algn="ctr">
+                      <a:solidFill>
+                        <a:srgbClr val="BFBFBF"/>
+                      </a:solidFill>
+                      <a:prstDash val="solid"/>
+                      <a:round/>
+                      <a:headEnd type="none" w="med" len="med"/>
+                      <a:tailEnd type="none" w="med" len="med"/>
+                    </a:lnL>
+                    <a:lnR w="9525" cap="flat" cmpd="sng" algn="ctr">
+                      <a:solidFill>
+                        <a:srgbClr val="BFBFBF"/>
+                      </a:solidFill>
+                      <a:prstDash val="solid"/>
+                      <a:round/>
+                      <a:headEnd type="none" w="med" len="med"/>
+                      <a:tailEnd type="none" w="med" len="med"/>
+                    </a:lnR>
+                    <a:lnT w="9525" cap="flat" cmpd="sng" algn="ctr">
+                      <a:solidFill>
+                        <a:srgbClr val="BFBFBF"/>
+                      </a:solidFill>
+                      <a:prstDash val="solid"/>
+                      <a:round/>
+                      <a:headEnd type="none" w="med" len="med"/>
+                      <a:tailEnd type="none" w="med" len="med"/>
+                    </a:lnT>
+                    <a:lnB w="9525" cap="flat" cmpd="sng" algn="ctr">
+                      <a:solidFill>
+                        <a:srgbClr val="BFBFBF"/>
+                      </a:solidFill>
+                      <a:prstDash val="solid"/>
+                      <a:round/>
+                      <a:headEnd type="none" w="med" len="med"/>
+                      <a:tailEnd type="none" w="med" len="med"/>
+                    </a:lnB>
+                  </a:tcPr>
+                </a:tc>
+                <a:tc>
+                  <a:txBody>
+                    <a:bodyPr/>
+                    <a:lstStyle/>
+                    <a:p>
+                      <a:r>
+                        <a:rPr sz="1150"/>
+                        <a:t>Using EHR Audit Logs to Study Clinical Activity: A Systematic Review — JAMIA</a:t>
+                      </a:r>
+                    </a:p>
+                  </a:txBody>
+                  <a:tcPr marL="54864" marR="54864" marT="54864" marB="54864" anchor="ctr">
+                    <a:lnL w="9525" cap="flat" cmpd="sng" algn="ctr">
+                      <a:solidFill>
+                        <a:srgbClr val="BFBFBF"/>
+                      </a:solidFill>
+                      <a:prstDash val="solid"/>
+                      <a:round/>
+                      <a:headEnd type="none" w="med" len="med"/>
+                      <a:tailEnd type="none" w="med" len="med"/>
+                    </a:lnL>
+                    <a:lnR w="9525" cap="flat" cmpd="sng" algn="ctr">
+                      <a:solidFill>
+                        <a:srgbClr val="BFBFBF"/>
+                      </a:solidFill>
+                      <a:prstDash val="solid"/>
+                      <a:round/>
+                      <a:headEnd type="none" w="med" len="med"/>
+                      <a:tailEnd type="none" w="med" len="med"/>
+                    </a:lnR>
+                    <a:lnT w="9525" cap="flat" cmpd="sng" algn="ctr">
+                      <a:solidFill>
+                        <a:srgbClr val="BFBFBF"/>
+                      </a:solidFill>
+                      <a:prstDash val="solid"/>
+                      <a:round/>
+                      <a:headEnd type="none" w="med" len="med"/>
+                      <a:tailEnd type="none" w="med" len="med"/>
+                    </a:lnT>
+                    <a:lnB w="9525" cap="flat" cmpd="sng" algn="ctr">
+                      <a:solidFill>
+                        <a:srgbClr val="BFBFBF"/>
+                      </a:solidFill>
+                      <a:prstDash val="solid"/>
+                      <a:round/>
+                      <a:headEnd type="none" w="med" len="med"/>
+                      <a:tailEnd type="none" w="med" len="med"/>
+                    </a:lnB>
+                  </a:tcPr>
+                </a:tc>
+                <a:tc>
+                  <a:txBody>
+                    <a:bodyPr/>
+                    <a:lstStyle/>
+                    <a:p>
+                      <a:r>
+                        <a:rPr sz="1150"/>
+                        <a:t>85 studies using audit logs as the record of who did what in the EHR</a:t>
+                      </a:r>
+                    </a:p>
+                  </a:txBody>
+                  <a:tcPr marL="54864" marR="54864" marT="54864" marB="54864" anchor="ctr">
+                    <a:lnL w="9525" cap="flat" cmpd="sng" algn="ctr">
+                      <a:solidFill>
+                        <a:srgbClr val="BFBFBF"/>
+                      </a:solidFill>
+                      <a:prstDash val="solid"/>
+                      <a:round/>
+                      <a:headEnd type="none" w="med" len="med"/>
+                      <a:tailEnd type="none" w="med" len="med"/>
+                    </a:lnL>
+                    <a:lnR w="9525" cap="flat" cmpd="sng" algn="ctr">
+                      <a:solidFill>
+                        <a:srgbClr val="BFBFBF"/>
+                      </a:solidFill>
+                      <a:prstDash val="solid"/>
+                      <a:round/>
+                      <a:headEnd type="none" w="med" len="med"/>
+                      <a:tailEnd type="none" w="med" len="med"/>
+                    </a:lnR>
+                    <a:lnT w="9525" cap="flat" cmpd="sng" algn="ctr">
+                      <a:solidFill>
+                        <a:srgbClr val="BFBFBF"/>
+                      </a:solidFill>
+                      <a:prstDash val="solid"/>
+                      <a:round/>
+                      <a:headEnd type="none" w="med" len="med"/>
+                      <a:tailEnd type="none" w="med" len="med"/>
+                    </a:lnT>
+                    <a:lnB w="9525" cap="flat" cmpd="sng" algn="ctr">
+                      <a:solidFill>
+                        <a:srgbClr val="BFBFBF"/>
+                      </a:solidFill>
+                      <a:prstDash val="solid"/>
+                      <a:round/>
+                      <a:headEnd type="none" w="med" len="med"/>
+                      <a:tailEnd type="none" w="med" len="med"/>
+                    </a:lnB>
+                  </a:tcPr>
+                </a:tc>
+                <a:tc>
+                  <a:txBody>
+                    <a:bodyPr/>
+                    <a:lstStyle/>
+                    <a:p>
+                      <a:r>
+                        <a:rPr sz="1150"/>
+                        <a:t>Logs used for workflow research, never to demonstrate compliance; our fifth layer models them for that</a:t>
+                      </a:r>
+                    </a:p>
+                  </a:txBody>
+                  <a:tcPr marL="54864" marR="54864" marT="54864" marB="54864" anchor="ctr">
+                    <a:lnL w="9525" cap="flat" cmpd="sng" algn="ctr">
+                      <a:solidFill>
+                        <a:srgbClr val="BFBFBF"/>
+                      </a:solidFill>
+                      <a:prstDash val="solid"/>
+                      <a:round/>
+                      <a:headEnd type="none" w="med" len="med"/>
+                      <a:tailEnd type="none" w="med" len="med"/>
+                    </a:lnL>
+                    <a:lnR w="9525" cap="flat" cmpd="sng" algn="ctr">
+                      <a:solidFill>
+                        <a:srgbClr val="BFBFBF"/>
+                      </a:solidFill>
+                      <a:prstDash val="solid"/>
+                      <a:round/>
+                      <a:headEnd type="none" w="med" len="med"/>
+                      <a:tailEnd type="none" w="med" len="med"/>
+                    </a:lnR>
+                    <a:lnT w="9525" cap="flat" cmpd="sng" algn="ctr">
+                      <a:solidFill>
+                        <a:srgbClr val="BFBFBF"/>
+                      </a:solidFill>
+                      <a:prstDash val="solid"/>
+                      <a:round/>
+                      <a:headEnd type="none" w="med" len="med"/>
+                      <a:tailEnd type="none" w="med" len="med"/>
+                    </a:lnT>
+                    <a:lnB w="9525" cap="flat" cmpd="sng" algn="ctr">
+                      <a:solidFill>
+                        <a:srgbClr val="BFBFBF"/>
+                      </a:solidFill>
+                      <a:prstDash val="solid"/>
+                      <a:round/>
+                      <a:headEnd type="none" w="med" len="med"/>
+                      <a:tailEnd type="none" w="med" len="med"/>
+                    </a:lnB>
+                  </a:tcPr>
+                </a:tc>
+                <a:extLst>
+                  <a:ext uri="{0D108BD9-81ED-4DB2-BD59-A6C34878D82A}">
+                    <a16:rowId xmlns:a16="http://schemas.microsoft.com/office/drawing/2014/main" val="10005"/>
+                  </a:ext>
+                </a:extLst>
+              </a:tr>
+              <a:tr h="566928">
+                <a:tc>
+                  <a:txBody>
+                    <a:bodyPr/>
+                    <a:lstStyle/>
+                    <a:p>
+                      <a:pPr marL="0" indent="0">
+                        <a:buNone/>
+                      </a:pPr>
+                      <a:r>
+                        <a:rPr lang="en-US" sz="1300" dirty="0">
+                          <a:solidFill>
+                            <a:srgbClr val="000000"/>
+                          </a:solidFill>
+                          <a:latin typeface="Calibri" pitchFamily="34" charset="0"/>
+                          <a:ea typeface="Calibri" pitchFamily="34" charset="-122"/>
+                          <a:cs typeface="Calibri" pitchFamily="34" charset="-120"/>
+                        </a:rPr>
+                        <a:t/>
+                      </a:r>
+                      <a:endParaRPr lang="en-US" sz="1300" dirty="0">
+                        <a:latin typeface="Calibri" charset="0"/>
+                        <a:ea typeface="Calibri" charset="0"/>
+                        <a:cs typeface="Calibri" charset="0"/>
+                      </a:endParaRPr>
+                    </a:p>
+                  </a:txBody>
+                  <a:tcPr marL="54864" marR="54864" marT="54864" marB="54864" anchor="ctr">
+                    <a:lnL w="9525" cap="flat" cmpd="sng" algn="ctr">
+                      <a:solidFill>
+                        <a:srgbClr val="BFBFBF"/>
+                      </a:solidFill>
+                      <a:prstDash val="solid"/>
+                      <a:round/>
+                      <a:headEnd type="none" w="med" len="med"/>
+                      <a:tailEnd type="none" w="med" len="med"/>
+                    </a:lnL>
+                    <a:lnR w="9525" cap="flat" cmpd="sng" algn="ctr">
+                      <a:solidFill>
+                        <a:srgbClr val="BFBFBF"/>
+                      </a:solidFill>
+                      <a:prstDash val="solid"/>
+                      <a:round/>
+                      <a:headEnd type="none" w="med" len="med"/>
+                      <a:tailEnd type="none" w="med" len="med"/>
+                    </a:lnR>
+                    <a:lnT w="9525" cap="flat" cmpd="sng" algn="ctr">
+                      <a:solidFill>
+                        <a:srgbClr val="BFBFBF"/>
+                      </a:solidFill>
+                      <a:prstDash val="solid"/>
+                      <a:round/>
+                      <a:headEnd type="none" w="med" len="med"/>
+                      <a:tailEnd type="none" w="med" len="med"/>
+                    </a:lnT>
+                    <a:lnB w="9525" cap="flat" cmpd="sng" algn="ctr">
+                      <a:solidFill>
+                        <a:srgbClr val="BFBFBF"/>
+                      </a:solidFill>
+                      <a:prstDash val="solid"/>
+                      <a:round/>
+                      <a:headEnd type="none" w="med" len="med"/>
+                      <a:tailEnd type="none" w="med" len="med"/>
+                    </a:lnB>
+                  </a:tcPr>
+                </a:tc>
+                <a:tc>
+                  <a:txBody>
+                    <a:bodyPr/>
+                    <a:lstStyle/>
+                    <a:p/>
+                  </a:txBody>
+                  <a:tcPr marL="54864" marR="54864" marT="54864" marB="54864" anchor="ctr">
+                    <a:lnL w="9525" cap="flat" cmpd="sng" algn="ctr">
+                      <a:solidFill>
+                        <a:srgbClr val="BFBFBF"/>
+                      </a:solidFill>
+                      <a:prstDash val="solid"/>
+                      <a:round/>
+                      <a:headEnd type="none" w="med" len="med"/>
+                      <a:tailEnd type="none" w="med" len="med"/>
+                    </a:lnL>
+                    <a:lnR w="9525" cap="flat" cmpd="sng" algn="ctr">
+                      <a:solidFill>
+                        <a:srgbClr val="BFBFBF"/>
+                      </a:solidFill>
+                      <a:prstDash val="solid"/>
+                      <a:round/>
+                      <a:headEnd type="none" w="med" len="med"/>
+                      <a:tailEnd type="none" w="med" len="med"/>
+                    </a:lnR>
+                    <a:lnT w="9525" cap="flat" cmpd="sng" algn="ctr">
+                      <a:solidFill>
+                        <a:srgbClr val="BFBFBF"/>
+                      </a:solidFill>
+                      <a:prstDash val="solid"/>
+                      <a:round/>
+                      <a:headEnd type="none" w="med" len="med"/>
+                      <a:tailEnd type="none" w="med" len="med"/>
+                    </a:lnT>
+                    <a:lnB w="9525" cap="flat" cmpd="sng" algn="ctr">
+                      <a:solidFill>
+                        <a:srgbClr val="BFBFBF"/>
+                      </a:solidFill>
+                      <a:prstDash val="solid"/>
+                      <a:round/>
+                      <a:headEnd type="none" w="med" len="med"/>
+                      <a:tailEnd type="none" w="med" len="med"/>
+                    </a:lnB>
+                  </a:tcPr>
+                </a:tc>
+                <a:tc>
+                  <a:txBody>
+                    <a:bodyPr/>
+                    <a:lstStyle/>
+                    <a:p/>
+                  </a:txBody>
+                  <a:tcPr marL="54864" marR="54864" marT="54864" marB="54864" anchor="ctr">
+                    <a:lnL w="9525" cap="flat" cmpd="sng" algn="ctr">
+                      <a:solidFill>
+                        <a:srgbClr val="BFBFBF"/>
+                      </a:solidFill>
+                      <a:prstDash val="solid"/>
+                      <a:round/>
+                      <a:headEnd type="none" w="med" len="med"/>
+                      <a:tailEnd type="none" w="med" len="med"/>
+                    </a:lnL>
+                    <a:lnR w="9525" cap="flat" cmpd="sng" algn="ctr">
+                      <a:solidFill>
+                        <a:srgbClr val="BFBFBF"/>
+                      </a:solidFill>
+                      <a:prstDash val="solid"/>
+                      <a:round/>
+                      <a:headEnd type="none" w="med" len="med"/>
+                      <a:tailEnd type="none" w="med" len="med"/>
+                    </a:lnR>
+                    <a:lnT w="9525" cap="flat" cmpd="sng" algn="ctr">
+                      <a:solidFill>
+                        <a:srgbClr val="BFBFBF"/>
+                      </a:solidFill>
+                      <a:prstDash val="solid"/>
+                      <a:round/>
+                      <a:headEnd type="none" w="med" len="med"/>
+                      <a:tailEnd type="none" w="med" len="med"/>
+                    </a:lnT>
+                    <a:lnB w="9525" cap="flat" cmpd="sng" algn="ctr">
+                      <a:solidFill>
+                        <a:srgbClr val="BFBFBF"/>
+                      </a:solidFill>
+                      <a:prstDash val="solid"/>
+                      <a:round/>
+                      <a:headEnd type="none" w="med" len="med"/>
+                      <a:tailEnd type="none" w="med" len="med"/>
+                    </a:lnB>
+                  </a:tcPr>
+                </a:tc>
+                <a:tc>
+                  <a:txBody>
+                    <a:bodyPr/>
+                    <a:lstStyle/>
+                    <a:p/>
+                  </a:txBody>
+                  <a:tcPr marL="54864" marR="54864" marT="54864" marB="54864" anchor="ctr">
+                    <a:lnL w="9525" cap="flat" cmpd="sng" algn="ctr">
+                      <a:solidFill>
+                        <a:srgbClr val="BFBFBF"/>
+                      </a:solidFill>
+                      <a:prstDash val="solid"/>
+                      <a:round/>
+                      <a:headEnd type="none" w="med" len="med"/>
+                      <a:tailEnd type="none" w="med" len="med"/>
+                    </a:lnL>
+                    <a:lnR w="9525" cap="flat" cmpd="sng" algn="ctr">
+                      <a:solidFill>
+                        <a:srgbClr val="BFBFBF"/>
+                      </a:solidFill>
+                      <a:prstDash val="solid"/>
+                      <a:round/>
+                      <a:headEnd type="none" w="med" len="med"/>
+                      <a:tailEnd type="none" w="med" len="med"/>
+                    </a:lnR>
+                    <a:lnT w="9525" cap="flat" cmpd="sng" algn="ctr">
+                      <a:solidFill>
+                        <a:srgbClr val="BFBFBF"/>
+                      </a:solidFill>
+                      <a:prstDash val="solid"/>
+                      <a:round/>
+                      <a:headEnd type="none" w="med" len="med"/>
+                      <a:tailEnd type="none" w="med" len="med"/>
+                    </a:lnT>
+                    <a:lnB w="9525" cap="flat" cmpd="sng" algn="ctr">
+                      <a:solidFill>
+                        <a:srgbClr val="BFBFBF"/>
+                      </a:solidFill>
+                      <a:prstDash val="solid"/>
+                      <a:round/>
+                      <a:headEnd type="none" w="med" len="med"/>
+                      <a:tailEnd type="none" w="med" len="med"/>
+                    </a:lnB>
+                  </a:tcPr>
+                </a:tc>
+                <a:tc>
+                  <a:txBody>
+                    <a:bodyPr/>
+                    <a:lstStyle/>
+                    <a:p/>
+                  </a:txBody>
+                  <a:tcPr marL="54864" marR="54864" marT="54864" marB="54864" anchor="ctr">
+                    <a:lnL w="9525" cap="flat" cmpd="sng" algn="ctr">
+                      <a:solidFill>
+                        <a:srgbClr val="BFBFBF"/>
+                      </a:solidFill>
+                      <a:prstDash val="solid"/>
+                      <a:round/>
+                      <a:headEnd type="none" w="med" len="med"/>
+                      <a:tailEnd type="none" w="med" len="med"/>
+                    </a:lnL>
+                    <a:lnR w="9525" cap="flat" cmpd="sng" algn="ctr">
+                      <a:solidFill>
+                        <a:srgbClr val="BFBFBF"/>
+                      </a:solidFill>
+                      <a:prstDash val="solid"/>
+                      <a:round/>
+                      <a:headEnd type="none" w="med" len="med"/>
+                      <a:tailEnd type="none" w="med" len="med"/>
+                    </a:lnR>
+                    <a:lnT w="9525" cap="flat" cmpd="sng" algn="ctr">
+                      <a:solidFill>
+                        <a:srgbClr val="BFBFBF"/>
+                      </a:solidFill>
+                      <a:prstDash val="solid"/>
+                      <a:round/>
+                      <a:headEnd type="none" w="med" len="med"/>
+                      <a:tailEnd type="none" w="med" len="med"/>
+                    </a:lnT>
+                    <a:lnB w="9525" cap="flat" cmpd="sng" algn="ctr">
+                      <a:solidFill>
+                        <a:srgbClr val="BFBFBF"/>
+                      </a:solidFill>
+                      <a:prstDash val="solid"/>
+                      <a:round/>
+                      <a:headEnd type="none" w="med" len="med"/>
+                      <a:tailEnd type="none" w="med" len="med"/>
+                    </a:lnB>
+                  </a:tcPr>
+                </a:tc>
+                <a:extLst>
+                  <a:ext uri="{0D108BD9-81ED-4DB2-BD59-A6C34878D82A}">
+                    <a16:rowId xmlns:a16="http://schemas.microsoft.com/office/drawing/2014/main" val="10006"/>
+                  </a:ext>
+                </a:extLst>
+              </a:tr>
+            </a:tbl>
+          </a:graphicData>
+        </a:graphic>
+      </p:graphicFrame>
+      <p:sp>
+        <p:nvSpPr>
+          <p:cNvPr id="5" name="Text 2"/>
+          <p:cNvSpPr txBox="1"/>
+          <p:nvPr/>
+        </p:nvSpPr>
+        <p:spPr>
+          <a:xfrm>
+            <a:off x="548640" y="5577840"/>
+            <a:ext cx="11064240" cy="365760"/>
+          </a:xfrm>
+          <a:prstGeom prst="rect">
+            <a:avLst/>
+          </a:prstGeom>
+          <a:noFill/>
+          <a:ln/>
+        </p:spPr>
+        <p:txBody>
+          <a:bodyPr wrap="square" lIns="0" tIns="0" rIns="0" bIns="0" rtlCol="0" anchor="ctr"/>
+          <a:lstStyle/>
+          <a:p>
+            <a:pPr marL="0" indent="0">
+              <a:buNone/>
+            </a:pPr>
+            <a:r>
+              <a:rPr lang="en-US" sz="1100" i="1" dirty="0">
+                <a:solidFill>
+                  <a:srgbClr val="000000"/>
+                </a:solidFill>
+                <a:latin typeface="Calibri" pitchFamily="34" charset="0"/>
+                <a:ea typeface="Calibri" pitchFamily="34" charset="-122"/>
+                <a:cs typeface="Calibri" pitchFamily="34" charset="-120"/>
+              </a:rPr>
+              <a:t>[11]–[12]: recommendations and checklists, not checkable controls. [14]–[16]: the three mechanisms we build on — tokenisation, RBAC, audit logs — each described, none used to score a technique. [13] is the Act.</a:t>
+            </a:r>
+            <a:endParaRPr lang="en-US" sz="1200" dirty="0"/>
+          </a:p>
+        </p:txBody>
+      </p:sp>
+    </p:spTree>
+  </p:cSld>
+  <p:clrMapOvr>
+    <a:masterClrMapping/>
+  </p:clrMapOvr>
+</p:sld>
+</file>
+
+<file path=ppt/slides/slide15.xml><?xml version="1.0" encoding="utf-8"?>
+<p:sld xmlns:a="http://schemas.openxmlformats.org/drawingml/2006/main" xmlns:p="http://schemas.openxmlformats.org/presentationml/2006/main" xmlns:r="http://schemas.openxmlformats.org/officeDocument/2006/relationships">
+  <p:cSld>
+    <p:spTree>
+      <p:nvGrpSpPr>
+        <p:cNvPr id="1" name=""/>
+        <p:cNvGrpSpPr/>
+        <p:nvPr/>
+      </p:nvGrpSpPr>
+      <p:grpSpPr/>
+      <p:sp>
+        <p:nvSpPr>
+          <p:cNvPr id="2" name="Text 0"/>
+          <p:cNvSpPr txBox="1"/>
+          <p:nvPr/>
+        </p:nvSpPr>
+        <p:spPr>
+          <a:xfrm>
+            <a:off x="11460175" y="6446520"/>
+            <a:ext cx="457200" cy="274320"/>
+          </a:xfrm>
+          <a:prstGeom prst="rect">
+            <a:avLst/>
+          </a:prstGeom>
+          <a:noFill/>
+          <a:ln/>
+        </p:spPr>
+        <p:txBody>
+          <a:bodyPr wrap="square" lIns="0" tIns="0" rIns="0" bIns="0" rtlCol="0" anchor="ctr"/>
+          <a:lstStyle/>
+          <a:p>
+            <a:pPr marL="0" indent="0" algn="r">
+              <a:buNone/>
+            </a:pPr>
+            <a:r>
+              <a:rPr lang="en-US" sz="1000" dirty="0">
+                <a:solidFill>
+                  <a:srgbClr val="808080"/>
+                </a:solidFill>
+                <a:latin typeface="Calibri" pitchFamily="34" charset="0"/>
+                <a:ea typeface="Calibri" pitchFamily="34" charset="-122"/>
+                <a:cs typeface="Calibri" pitchFamily="34" charset="-120"/>
+              </a:rPr>
+              <a:t>12</a:t>
             </a:r>
             <a:endParaRPr lang="en-US" sz="1000" dirty="0"/>
           </a:p>
@@ -9371,7 +11596,7 @@
                         <a:buNone/>
                       </a:pPr>
                       <a:r>
-                        <a:rPr lang="en-US" sz="1150" dirty="0">
+                        <a:rPr lang="en-US" sz="1300" dirty="0">
                           <a:solidFill>
                             <a:srgbClr val="000000"/>
                           </a:solidFill>
@@ -9379,7 +11604,7 @@
                           <a:ea typeface="Calibri" pitchFamily="34" charset="-122"/>
                           <a:cs typeface="Calibri" pitchFamily="34" charset="-120"/>
                         </a:rPr>
-                        <a:t>6</a:t>
+                        <a:t/>
                       </a:r>
                       <a:endParaRPr lang="en-US" sz="1300" dirty="0">
                         <a:latin typeface="Calibri" charset="0"/>
@@ -9431,12 +11656,7 @@
                   <a:txBody>
                     <a:bodyPr/>
                     <a:lstStyle/>
-                    <a:p>
-                      <a:r>
-                        <a:rPr sz="1150"/>
-                        <a:t>Gundelach et al., 2025</a:t>
-                      </a:r>
-                    </a:p>
+                    <a:p/>
                   </a:txBody>
                   <a:tcPr marL="54864" marR="54864" marT="54864" marB="54864" anchor="ctr">
                     <a:lnL w="9525" cap="flat" cmpd="sng" algn="ctr">
@@ -9481,12 +11701,7 @@
                   <a:txBody>
                     <a:bodyPr/>
                     <a:lstStyle/>
-                    <a:p>
-                      <a:r>
-                        <a:rPr sz="1150"/>
-                        <a:t>Detecting Bot Detection: Prevalence, Techniques, Implications — arXiv</a:t>
-                      </a:r>
-                    </a:p>
+                    <a:p/>
                   </a:txBody>
                   <a:tcPr marL="54864" marR="54864" marT="54864" marB="54864" anchor="ctr">
                     <a:lnL w="9525" cap="flat" cmpd="sng" algn="ctr">
@@ -9531,12 +11746,7 @@
                   <a:txBody>
                     <a:bodyPr/>
                     <a:lstStyle/>
-                    <a:p>
-                      <a:r>
-                        <a:rPr sz="1150"/>
-                        <a:t>Systematic review (2020–25) of bot-detection at top security / web venues</a:t>
-                      </a:r>
-                    </a:p>
+                    <a:p/>
                   </a:txBody>
                   <a:tcPr marL="54864" marR="54864" marT="54864" marB="54864" anchor="ctr">
                     <a:lnL w="9525" cap="flat" cmpd="sng" algn="ctr">
@@ -9581,12 +11791,7 @@
                   <a:txBody>
                     <a:bodyPr/>
                     <a:lstStyle/>
-                    <a:p>
-                      <a:r>
-                        <a:rPr sz="1150"/>
-                        <a:t>Maps the detection landscape; authenticated / credentialed portal scraping under-studied</a:t>
-                      </a:r>
-                    </a:p>
+                    <a:p/>
                   </a:txBody>
                   <a:tcPr marL="54864" marR="54864" marT="54864" marB="54864" anchor="ctr">
                     <a:lnL w="9525" cap="flat" cmpd="sng" algn="ctr">
@@ -9670,7 +11875,7 @@
                 <a:ea typeface="Calibri" pitchFamily="34" charset="-122"/>
                 <a:cs typeface="Calibri" pitchFamily="34" charset="-120"/>
               </a:rPr>
-              <a:t>References [1]–[6] on this slide, [7]–[12] on the next; full IEEE list on the References slide. The gap across all twelve: no technique reports a per-technique compliance score.</a:t>
+              <a:t>Fifteen references over three slides; full IEEE list on the References slide. [1]–[5]: scraping techniques — evaluated on executability, coverage and cost, never on what they should have taken.</a:t>
             </a:r>
             <a:endParaRPr lang="en-US" sz="1200" dirty="0"/>
           </a:p>
@@ -9742,7 +11947,7 @@
                 <a:ea typeface="Calibri" pitchFamily="34" charset="-122"/>
                 <a:cs typeface="Calibri" pitchFamily="34" charset="-120"/>
               </a:rPr>
-              <a:t>7</a:t>
+              <a:t>8</a:t>
             </a:r>
             <a:endParaRPr lang="en-US" sz="1000" dirty="0"/>
           </a:p>
@@ -10856,7 +13061,7 @@
                 </a:solidFill>
                 <a:latin typeface="Calibri"/>
               </a:rPr>
-              <a:t>Runs as one command: scripts/run_pipeline.py — portal → discover → benchmark → normalise + audit → purpose → assistant (30–40 s).</a:t>
+              <a:t>Runs as one command: scripts/run_pipeline.py — portal → discover → benchmark → normalise + audit → purpose → assistant (~1½ min).</a:t>
             </a:r>
           </a:p>
         </p:txBody>
@@ -10927,7 +13132,7 @@
                 <a:ea typeface="Calibri" pitchFamily="34" charset="-122"/>
                 <a:cs typeface="Calibri" pitchFamily="34" charset="-120"/>
               </a:rPr>
-              <a:t>8</a:t>
+              <a:t>9</a:t>
             </a:r>
             <a:endParaRPr lang="en-US" sz="1000" dirty="0"/>
           </a:p>
@@ -11309,7 +13514,7 @@
                 <a:ea typeface="Calibri" pitchFamily="34" charset="-122"/>
                 <a:cs typeface="Calibri" pitchFamily="34" charset="-120"/>
               </a:rPr>
-              <a:t>9</a:t>
+              <a:t>10</a:t>
             </a:r>
             <a:endParaRPr lang="en-US" sz="1000" dirty="0"/>
           </a:p>
@@ -11911,7 +14116,7 @@
                 <a:ea typeface="Calibri" pitchFamily="34" charset="-122"/>
                 <a:cs typeface="Calibri" pitchFamily="34" charset="-120"/>
               </a:rPr>
-              <a:t>10</a:t>
+              <a:t>11</a:t>
             </a:r>
             <a:endParaRPr lang="en-US" sz="1000" dirty="0"/>
           </a:p>

--- a/Review-II.pptx
+++ b/Review-II.pptx
@@ -2436,7 +2436,7 @@
                 <a:ea typeface="Calibri" pitchFamily="34" charset="-122"/>
                 <a:cs typeface="Calibri" pitchFamily="34" charset="-120"/>
               </a:rPr>
-              <a:t>[7] "Scrapers Selectively Respect robots.txt Directives: Evidence From a Large-Scale Empirical Study," in Proc. 2025 ACM Internet Measurement Conf. (IMC), 2025.</a:t>
+              <a:t>[7] T. Kim, K. Bock, C. Luo, A. Liswood, C. Poroslay, and E. Wenger, "Scrapers Selectively Respect robots.txt Directives: Evidence From a Large-Scale Empirical Study," in Proc. 2025 ACM Internet Measurement Conf. (IMC), Madison, WI, USA, 2025, pp. 541–557, doi:10.1145/3730567.3764471.</a:t>
             </a:r>
             <a:endParaRPr lang="en-US" sz="1600" dirty="0"/>
           </a:p>
@@ -2478,7 +2478,7 @@
                 <a:ea typeface="Calibri" pitchFamily="34" charset="-122"/>
                 <a:cs typeface="Calibri" pitchFamily="34" charset="-120"/>
               </a:rPr>
-              <a:t>[9] "A Critical Review of Health Data Interoperability Standards: FHIR, HL7, and Beyond," 2025.</a:t>
+              <a:t>[9] C. N. Vorisek, M. Lehne, S. A. I. Klopfenstein, P. J. Mayer, A. Bartschke, T. Haese, and S. Thun, "Fast Healthcare Interoperability Resources (FHIR) for Interoperability in Health Research: Systematic Review," JMIR Medical Informatics, vol. 10, no. 7, art. e35724, 2022, doi:10.2196/35724.</a:t>
             </a:r>
             <a:endParaRPr lang="en-US" sz="1600" dirty="0"/>
           </a:p>
@@ -2499,7 +2499,7 @@
                 <a:ea typeface="Calibri" pitchFamily="34" charset="-122"/>
                 <a:cs typeface="Calibri" pitchFamily="34" charset="-120"/>
               </a:rPr>
-              <a:t>[10] "Examining the Significance of the Digital Personal Data Protection Act, 2023 in the Context of the Healthcare Industry: A Comprehensive Analysis," Discover Public Health, 2025.</a:t>
+              <a:t>[10] V. Khanna and A. Kotwal, "Examining the Significance of the Digital Personal Data Protection Act, 2023 in the Context of the Healthcare Industry: A Comprehensive Analysis," Discover Public Health, vol. 22, art. 381, 2025, doi:10.1186/s12982-025-00757-6.</a:t>
             </a:r>
             <a:endParaRPr lang="en-US" sz="1600" dirty="0"/>
           </a:p>
@@ -2520,7 +2520,7 @@
                 <a:ea typeface="Calibri" pitchFamily="34" charset="-122"/>
                 <a:cs typeface="Calibri" pitchFamily="34" charset="-120"/>
               </a:rPr>
-              <a:t>[11] "Challenges and Recommendations for Enhancing Digital Data Protection in the Indian Medical Research and Healthcare Sector," npj Digital Medicine, 2025.</a:t>
+              <a:t>[11] A. Sood, D. Mishra, V. Surya, H. Singh, R. Sundaresan, D. Pal, R. Dharmaraju, R. Satish, S. Mishra, N. A. Chavan, S. Mondal, P. Duggal, and V. K. Iyer, "Challenges and Recommendations for Enhancing Digital Data Protection in the Indian Medical Research and Healthcare Sector," npj Digital Medicine, vol. 8, art. 48, 2025, doi:10.1038/s41746-025-01448-x.</a:t>
             </a:r>
             <a:endParaRPr lang="en-US" sz="1600" dirty="0"/>
           </a:p>
@@ -3715,7 +3715,7 @@
                     <a:p>
                       <a:r>
                         <a:rPr sz="1150"/>
-                        <a:t>ACM IMC, 2025</a:t>
+                        <a:t>Kim et al., 2025</a:t>
                       </a:r>
                     </a:p>
                   </a:txBody>
@@ -3765,7 +3765,7 @@
                     <a:p>
                       <a:r>
                         <a:rPr sz="1150"/>
-                        <a:t>Scrapers Selectively Respect robots.txt Directives — large-scale study</a:t>
+                        <a:t>Scrapers Selectively Respect robots.txt Directives — ACM IMC</a:t>
                       </a:r>
                     </a:p>
                   </a:txBody>
@@ -4259,7 +4259,7 @@
                     <a:p>
                       <a:r>
                         <a:rPr sz="1150"/>
-                        <a:t>Interoperability review, 2025</a:t>
+                        <a:t>Vorisek et al., 2022</a:t>
                       </a:r>
                     </a:p>
                   </a:txBody>
@@ -4309,7 +4309,7 @@
                     <a:p>
                       <a:r>
                         <a:rPr sz="1150"/>
-                        <a:t>A Critical Review of Health Data Interoperability Standards: FHIR, HL7 and Beyond</a:t>
+                        <a:t>FHIR for Interoperability in Health Research: Systematic Review — JMIR Med. Inform.</a:t>
                       </a:r>
                     </a:p>
                   </a:txBody>
@@ -4359,7 +4359,7 @@
                     <a:p>
                       <a:r>
                         <a:rPr sz="1150"/>
-                        <a:t>Critical review of HL7 / FHIR and related standards</a:t>
+                        <a:t>49 studies on FHIR use cases, implementation, goals and limitations in research</a:t>
                       </a:r>
                     </a:p>
                   </a:txBody>
@@ -4531,7 +4531,7 @@
                     <a:p>
                       <a:r>
                         <a:rPr sz="1150"/>
-                        <a:t>Discover Public Health, 2025</a:t>
+                        <a:t>Khanna &amp; Kotwal, 2025</a:t>
                       </a:r>
                     </a:p>
                   </a:txBody>
@@ -4581,7 +4581,7 @@
                     <a:p>
                       <a:r>
                         <a:rPr sz="1150"/>
-                        <a:t>Significance of the DPDP Act 2023 for the Healthcare Industry</a:t>
+                        <a:t>Significance of the DPDP Act 2023 for the Healthcare Industry — Discover Public Health</a:t>
                       </a:r>
                     </a:p>
                   </a:txBody>
@@ -5624,7 +5624,7 @@
                     <a:p>
                       <a:r>
                         <a:rPr sz="1150"/>
-                        <a:t>npj Digital Medicine, 2025</a:t>
+                        <a:t>Sood et al., 2025</a:t>
                       </a:r>
                     </a:p>
                   </a:txBody>
@@ -5674,7 +5674,7 @@
                     <a:p>
                       <a:r>
                         <a:rPr sz="1150"/>
-                        <a:t>Digital Data Protection in Indian Medical Research and Healthcare</a:t>
+                        <a:t>Digital Data Protection in Indian Medical Research and Healthcare — npj Digital Medicine</a:t>
                       </a:r>
                     </a:p>
                   </a:txBody>

--- a/Review-II.pptx
+++ b/Review-II.pptx
@@ -13612,7 +13612,7 @@
                 </a:solidFill>
                 <a:latin typeface="Calibri"/>
               </a:rPr>
-              <a:t>Three techniques, three extraction tasks, the same login-gated portal scraped by a real browser (30 records per module); every run scored on the identical seven rules; cost measured as real page loads. The techniques differ only in how they treat personal data.</a:t>
+              <a:t>Three techniques, three extraction tasks, the same login-gated portal scraped by a real browser (20 records per module, 10 per page); every run scored on the identical seven rules; cost measured as real page loads. The techniques differ only in how they treat personal data.</a:t>
             </a:r>
           </a:p>
         </p:txBody>
@@ -13788,7 +13788,7 @@
                           </a:solidFill>
                           <a:latin typeface="Calibri"/>
                         </a:rPr>
-                        <a:t>1.00 · 1.00 · ~100</a:t>
+                        <a:t>1.00 · 1.00 · 70</a:t>
                       </a:r>
                     </a:p>
                   </a:txBody>
@@ -13878,7 +13878,7 @@
                           </a:solidFill>
                           <a:latin typeface="Calibri"/>
                         </a:rPr>
-                        <a:t>0.85 · 0.85 · ~100</a:t>
+                        <a:t>0.85 · 0.85 · 70</a:t>
                       </a:r>
                     </a:p>
                   </a:txBody>
@@ -13968,7 +13968,7 @@
                           </a:solidFill>
                           <a:latin typeface="Calibri"/>
                         </a:rPr>
-                        <a:t>7.15 · 1.00 · ~480</a:t>
+                        <a:t>7.15 · 1.00 · 330</a:t>
                       </a:r>
                     </a:p>
                   </a:txBody>

--- a/Review-II.pptx
+++ b/Review-II.pptx
@@ -9658,7 +9658,7 @@
                 <a:ea typeface="Calibri" pitchFamily="34" charset="-122"/>
                 <a:cs typeface="Calibri" pitchFamily="34" charset="-120"/>
               </a:rPr>
-              <a:t>The middle technique is now the morality model — privacy judged by instinct from a field's name, no concept of purpose — deliberately not DPDP-compliant; the hand-written baseline stands, as the panel agreed most deployed systems sit there.</a:t>
+              <a:t>The comparison is now ours against publicly available AI agents (Claude, GPT, Gemini), each briefed with the job, the purpose and the field names — never a value — unaided and told the Act; decisions recorded, replayed, and repeated so determinism is a measured column. The hand-written baseline stands, as the panel agreed most deployed systems sit there.</a:t>
             </a:r>
             <a:endParaRPr lang="en-US" sz="1500" dirty="0"/>
           </a:p>
@@ -13280,7 +13280,7 @@
                 <a:ea typeface="Calibri" pitchFamily="34" charset="-122"/>
                 <a:cs typeface="Calibri" pitchFamily="34" charset="-120"/>
               </a:rPr>
-              <a:t>extraction/ — HISDataSource interface; adapters mock / portal (Playwright) / dataset (pandas, column map); techniques compliant / morality / unconstrained; metering; tier2 browser + navigation discovery.</a:t>
+              <a:t>extraction/ — HISDataSource interface; adapters mock / portal (Playwright) / dataset (pandas, column map); techniques compliant / ai_agent (Claude, OpenAI, Gemini; record + replay) / unconstrained; metering incl. determinism; tier2 browser + navigation discovery.</a:t>
             </a:r>
             <a:endParaRPr lang="en-US" sz="1500" dirty="0"/>
           </a:p>
@@ -13612,7 +13612,7 @@
                 </a:solidFill>
                 <a:latin typeface="Calibri"/>
               </a:rPr>
-              <a:t>Three techniques, three extraction tasks, the same login-gated portal scraped by a real browser (20 records per module, 10 per page); every run scored on the identical seven rules; cost measured as real page loads. The techniques differ only in how they treat personal data.</a:t>
+              <a:t>2 techniques, 3 extraction tasks, the same login-gated portal scraped by a real browser (20 records per module, 10 per page); every run scored on the identical seven rules; cost measured as real page loads. The techniques differ only in how they treat personal data.</a:t>
             </a:r>
           </a:p>
         </p:txBody>
@@ -13641,7 +13641,7 @@
                 <a:gridCol w="2377440"/>
                 <a:gridCol w="4142232"/>
               </a:tblGrid>
-              <a:tr h="582930">
+              <a:tr h="777240">
                 <a:tc>
                   <a:txBody>
                     <a:bodyPr/>
@@ -13731,7 +13731,7 @@
                   </a:tcPr>
                 </a:tc>
               </a:tr>
-              <a:tr h="582930">
+              <a:tr h="777240">
                 <a:tc>
                   <a:txBody>
                     <a:bodyPr/>
@@ -13766,7 +13766,7 @@
                           </a:solidFill>
                           <a:latin typeface="Calibri"/>
                         </a:rPr>
-                        <a:t>1.000  ·  7 / 7 rules</a:t>
+                        <a:t>1.000  ·  7/7 rules</a:t>
                       </a:r>
                     </a:p>
                   </a:txBody>
@@ -13821,97 +13821,7 @@
                   </a:tcPr>
                 </a:tc>
               </a:tr>
-              <a:tr h="582930">
-                <a:tc>
-                  <a:txBody>
-                    <a:bodyPr/>
-                    <a:lstStyle/>
-                    <a:p>
-                      <a:r>
-                        <a:rPr sz="1150" b="0">
-                          <a:solidFill>
-                            <a:srgbClr val="000000"/>
-                          </a:solidFill>
-                          <a:latin typeface="Calibri"/>
-                        </a:rPr>
-                        <a:t>morality (privacy by instinct)</a:t>
-                      </a:r>
-                    </a:p>
-                  </a:txBody>
-                  <a:tcPr>
-                    <a:solidFill>
-                      <a:srgbClr val="FFFFFF"/>
-                    </a:solidFill>
-                  </a:tcPr>
-                </a:tc>
-                <a:tc>
-                  <a:txBody>
-                    <a:bodyPr/>
-                    <a:lstStyle/>
-                    <a:p>
-                      <a:r>
-                        <a:rPr sz="1150" b="0">
-                          <a:solidFill>
-                            <a:srgbClr val="000000"/>
-                          </a:solidFill>
-                          <a:latin typeface="Calibri"/>
-                        </a:rPr>
-                        <a:t>0.484  ·  2 / 7 rules</a:t>
-                      </a:r>
-                    </a:p>
-                  </a:txBody>
-                  <a:tcPr>
-                    <a:solidFill>
-                      <a:srgbClr val="FFFFFF"/>
-                    </a:solidFill>
-                  </a:tcPr>
-                </a:tc>
-                <a:tc>
-                  <a:txBody>
-                    <a:bodyPr/>
-                    <a:lstStyle/>
-                    <a:p>
-                      <a:r>
-                        <a:rPr sz="1150" b="0">
-                          <a:solidFill>
-                            <a:srgbClr val="000000"/>
-                          </a:solidFill>
-                          <a:latin typeface="Calibri"/>
-                        </a:rPr>
-                        <a:t>0.85 · 0.85 · 70</a:t>
-                      </a:r>
-                    </a:p>
-                  </a:txBody>
-                  <a:tcPr>
-                    <a:solidFill>
-                      <a:srgbClr val="FFFFFF"/>
-                    </a:solidFill>
-                  </a:tcPr>
-                </a:tc>
-                <a:tc>
-                  <a:txBody>
-                    <a:bodyPr/>
-                    <a:lstStyle/>
-                    <a:p>
-                      <a:r>
-                        <a:rPr sz="1150" b="0">
-                          <a:solidFill>
-                            <a:srgbClr val="000000"/>
-                          </a:solidFill>
-                          <a:latin typeface="Calibri"/>
-                        </a:rPr>
-                        <a:t>Refuses what feels private (names, contact, money) whatever the purpose; takes MRN and DOB freely; consent assumed, no notice, no retention.</a:t>
-                      </a:r>
-                    </a:p>
-                  </a:txBody>
-                  <a:tcPr>
-                    <a:solidFill>
-                      <a:srgbClr val="FFFFFF"/>
-                    </a:solidFill>
-                  </a:tcPr>
-                </a:tc>
-              </a:tr>
-              <a:tr h="582930">
+              <a:tr h="777240">
                 <a:tc>
                   <a:txBody>
                     <a:bodyPr/>
@@ -13946,7 +13856,7 @@
                           </a:solidFill>
                           <a:latin typeface="Calibri"/>
                         </a:rPr>
-                        <a:t>0.135  ·  0 / 7 rules</a:t>
+                        <a:t>0.135  ·  0/7 rules</a:t>
                       </a:r>
                     </a:p>
                   </a:txBody>
@@ -14045,7 +13955,7 @@
                 </a:solidFill>
                 <a:latin typeface="Calibri"/>
               </a:rPr>
-              <a:t>The morality model is the cheapest — and the cheapness is its failure: coverage 0.85 because it refused a name and a phone number an appointment reminder lawfully needs under the registration purpose. Privacy by instinct fails in both directions; only a purpose-bound technique gets both right. Per-rule columns (DM, LB, SL, SS, PL, NT, AC) are in docs/benchmark_results/benchmark-portal.md.</a:t>
+              <a:t>The AI agents are real public models briefed with field names, never values, once unaided and once told the Act; coverage catches any that left out data the job lawfully needs. Repeated runs give a stable column: ours reproduces its decision every time — rules, not sampling; an agent's compliance is a sample. Per-rule columns are in docs/benchmark_results/benchmark-portal.md.</a:t>
             </a:r>
           </a:p>
         </p:txBody>

--- a/Review-II.pptx
+++ b/Review-II.pptx
@@ -13612,7 +13612,7 @@
                 </a:solidFill>
                 <a:latin typeface="Calibri"/>
               </a:rPr>
-              <a:t>2 techniques, 3 extraction tasks, the same login-gated portal scraped by a real browser (20 records per module, 10 per page); every run scored on the identical seven rules; cost measured as real page loads. The techniques differ only in how they treat personal data.</a:t>
+              <a:t>4 techniques, 3 extraction tasks, the same login-gated portal scraped by a real browser (20 records per module, 10 per page); every run scored on the identical seven rules; cost measured as real page loads. The techniques differ only in how they treat personal data.</a:t>
             </a:r>
           </a:p>
         </p:txBody>
@@ -13641,7 +13641,7 @@
                 <a:gridCol w="2377440"/>
                 <a:gridCol w="4142232"/>
               </a:tblGrid>
-              <a:tr h="777240">
+              <a:tr h="466344">
                 <a:tc>
                   <a:txBody>
                     <a:bodyPr/>
@@ -13731,14 +13731,14 @@
                   </a:tcPr>
                 </a:tc>
               </a:tr>
-              <a:tr h="777240">
-                <a:tc>
-                  <a:txBody>
-                    <a:bodyPr/>
-                    <a:lstStyle/>
-                    <a:p>
-                      <a:r>
-                        <a:rPr sz="1150" b="0">
+              <a:tr h="466344">
+                <a:tc>
+                  <a:txBody>
+                    <a:bodyPr/>
+                    <a:lstStyle/>
+                    <a:p>
+                      <a:r>
+                        <a:rPr sz="1000" b="0">
                           <a:solidFill>
                             <a:srgbClr val="000000"/>
                           </a:solidFill>
@@ -13760,7 +13760,7 @@
                     <a:lstStyle/>
                     <a:p>
                       <a:r>
-                        <a:rPr sz="1150" b="0">
+                        <a:rPr sz="1000" b="0">
                           <a:solidFill>
                             <a:srgbClr val="000000"/>
                           </a:solidFill>
@@ -13782,7 +13782,7 @@
                     <a:lstStyle/>
                     <a:p>
                       <a:r>
-                        <a:rPr sz="1150" b="0">
+                        <a:rPr sz="1000" b="0">
                           <a:solidFill>
                             <a:srgbClr val="000000"/>
                           </a:solidFill>
@@ -13804,7 +13804,7 @@
                     <a:lstStyle/>
                     <a:p>
                       <a:r>
-                        <a:rPr sz="1150" b="0">
+                        <a:rPr sz="1000" b="0">
                           <a:solidFill>
                             <a:srgbClr val="000000"/>
                           </a:solidFill>
@@ -13821,14 +13821,194 @@
                   </a:tcPr>
                 </a:tc>
               </a:tr>
-              <a:tr h="777240">
-                <a:tc>
-                  <a:txBody>
-                    <a:bodyPr/>
-                    <a:lstStyle/>
-                    <a:p>
-                      <a:r>
-                        <a:rPr sz="1150" b="0">
+              <a:tr h="466344">
+                <a:tc>
+                  <a:txBody>
+                    <a:bodyPr/>
+                    <a:lstStyle/>
+                    <a:p>
+                      <a:r>
+                        <a:rPr sz="1000" b="0">
+                          <a:solidFill>
+                            <a:srgbClr val="000000"/>
+                          </a:solidFill>
+                          <a:latin typeface="Calibri"/>
+                        </a:rPr>
+                        <a:t>ai agent: gemini (told the Act)</a:t>
+                      </a:r>
+                    </a:p>
+                  </a:txBody>
+                  <a:tcPr>
+                    <a:solidFill>
+                      <a:srgbClr val="FFFFFF"/>
+                    </a:solidFill>
+                  </a:tcPr>
+                </a:tc>
+                <a:tc>
+                  <a:txBody>
+                    <a:bodyPr/>
+                    <a:lstStyle/>
+                    <a:p>
+                      <a:r>
+                        <a:rPr sz="1000" b="0">
+                          <a:solidFill>
+                            <a:srgbClr val="000000"/>
+                          </a:solidFill>
+                          <a:latin typeface="Calibri"/>
+                        </a:rPr>
+                        <a:t>0.988  ·  6/7 rules</a:t>
+                      </a:r>
+                    </a:p>
+                  </a:txBody>
+                  <a:tcPr>
+                    <a:solidFill>
+                      <a:srgbClr val="FFFFFF"/>
+                    </a:solidFill>
+                  </a:tcPr>
+                </a:tc>
+                <a:tc>
+                  <a:txBody>
+                    <a:bodyPr/>
+                    <a:lstStyle/>
+                    <a:p>
+                      <a:r>
+                        <a:rPr sz="1000" b="0">
+                          <a:solidFill>
+                            <a:srgbClr val="000000"/>
+                          </a:solidFill>
+                          <a:latin typeface="Calibri"/>
+                        </a:rPr>
+                        <a:t>1.31 · 0.77 · 72</a:t>
+                      </a:r>
+                    </a:p>
+                  </a:txBody>
+                  <a:tcPr>
+                    <a:solidFill>
+                      <a:srgbClr val="FFFFFF"/>
+                    </a:solidFill>
+                  </a:tcPr>
+                </a:tc>
+                <a:tc>
+                  <a:txBody>
+                    <a:bodyPr/>
+                    <a:lstStyle/>
+                    <a:p>
+                      <a:r>
+                        <a:rPr sz="1000" b="0">
+                          <a:solidFill>
+                            <a:srgbClr val="000000"/>
+                          </a:solidFill>
+                          <a:latin typeface="Calibri"/>
+                        </a:rPr>
+                        <a:t>A public model decides the pull and the manifest from the job, purpose and field names; recorded and replayed.</a:t>
+                      </a:r>
+                    </a:p>
+                  </a:txBody>
+                  <a:tcPr>
+                    <a:solidFill>
+                      <a:srgbClr val="FFFFFF"/>
+                    </a:solidFill>
+                  </a:tcPr>
+                </a:tc>
+              </a:tr>
+              <a:tr h="466344">
+                <a:tc>
+                  <a:txBody>
+                    <a:bodyPr/>
+                    <a:lstStyle/>
+                    <a:p>
+                      <a:r>
+                        <a:rPr sz="1000" b="0">
+                          <a:solidFill>
+                            <a:srgbClr val="000000"/>
+                          </a:solidFill>
+                          <a:latin typeface="Calibri"/>
+                        </a:rPr>
+                        <a:t>ai agent: gemini (unaided)</a:t>
+                      </a:r>
+                    </a:p>
+                  </a:txBody>
+                  <a:tcPr>
+                    <a:solidFill>
+                      <a:srgbClr val="FFFFFF"/>
+                    </a:solidFill>
+                  </a:tcPr>
+                </a:tc>
+                <a:tc>
+                  <a:txBody>
+                    <a:bodyPr/>
+                    <a:lstStyle/>
+                    <a:p>
+                      <a:r>
+                        <a:rPr sz="1000" b="0">
+                          <a:solidFill>
+                            <a:srgbClr val="000000"/>
+                          </a:solidFill>
+                          <a:latin typeface="Calibri"/>
+                        </a:rPr>
+                        <a:t>0.976  ·  6/7 rules</a:t>
+                      </a:r>
+                    </a:p>
+                  </a:txBody>
+                  <a:tcPr>
+                    <a:solidFill>
+                      <a:srgbClr val="FFFFFF"/>
+                    </a:solidFill>
+                  </a:tcPr>
+                </a:tc>
+                <a:tc>
+                  <a:txBody>
+                    <a:bodyPr/>
+                    <a:lstStyle/>
+                    <a:p>
+                      <a:r>
+                        <a:rPr sz="1000" b="0">
+                          <a:solidFill>
+                            <a:srgbClr val="000000"/>
+                          </a:solidFill>
+                          <a:latin typeface="Calibri"/>
+                        </a:rPr>
+                        <a:t>1.31 · 0.85 · 70</a:t>
+                      </a:r>
+                    </a:p>
+                  </a:txBody>
+                  <a:tcPr>
+                    <a:solidFill>
+                      <a:srgbClr val="FFFFFF"/>
+                    </a:solidFill>
+                  </a:tcPr>
+                </a:tc>
+                <a:tc>
+                  <a:txBody>
+                    <a:bodyPr/>
+                    <a:lstStyle/>
+                    <a:p>
+                      <a:r>
+                        <a:rPr sz="1000" b="0">
+                          <a:solidFill>
+                            <a:srgbClr val="000000"/>
+                          </a:solidFill>
+                          <a:latin typeface="Calibri"/>
+                        </a:rPr>
+                        <a:t>A public model decides the pull and the manifest from the job, purpose and field names; recorded and replayed.</a:t>
+                      </a:r>
+                    </a:p>
+                  </a:txBody>
+                  <a:tcPr>
+                    <a:solidFill>
+                      <a:srgbClr val="FFFFFF"/>
+                    </a:solidFill>
+                  </a:tcPr>
+                </a:tc>
+              </a:tr>
+              <a:tr h="466344">
+                <a:tc>
+                  <a:txBody>
+                    <a:bodyPr/>
+                    <a:lstStyle/>
+                    <a:p>
+                      <a:r>
+                        <a:rPr sz="1000" b="0">
                           <a:solidFill>
                             <a:srgbClr val="000000"/>
                           </a:solidFill>
@@ -13850,7 +14030,7 @@
                     <a:lstStyle/>
                     <a:p>
                       <a:r>
-                        <a:rPr sz="1150" b="0">
+                        <a:rPr sz="1000" b="0">
                           <a:solidFill>
                             <a:srgbClr val="000000"/>
                           </a:solidFill>
@@ -13872,7 +14052,7 @@
                     <a:lstStyle/>
                     <a:p>
                       <a:r>
-                        <a:rPr sz="1150" b="0">
+                        <a:rPr sz="1000" b="0">
                           <a:solidFill>
                             <a:srgbClr val="000000"/>
                           </a:solidFill>
@@ -13894,7 +14074,7 @@
                     <a:lstStyle/>
                     <a:p>
                       <a:r>
-                        <a:rPr sz="1150" b="0">
+                        <a:rPr sz="1000" b="0">
                           <a:solidFill>
                             <a:srgbClr val="000000"/>
                           </a:solidFill>

--- a/Review-II.pptx
+++ b/Review-II.pptx
@@ -13612,7 +13612,7 @@
                 </a:solidFill>
                 <a:latin typeface="Calibri"/>
               </a:rPr>
-              <a:t>4 techniques, 3 extraction tasks, the same login-gated portal scraped by a real browser (20 records per module, 10 per page); every run scored on the identical seven rules; cost measured as real page loads. The techniques differ only in how they treat personal data.</a:t>
+              <a:t>4 techniques, 4 extraction tasks, the same login-gated portal scraped by a real browser (20 records per module, 10 per page); every run scored on the identical seven rules; cost measured as real page loads. The techniques differ only in how they treat personal data.</a:t>
             </a:r>
           </a:p>
         </p:txBody>
@@ -13698,7 +13698,7 @@
                           </a:solidFill>
                           <a:latin typeface="Calibri"/>
                         </a:rPr>
-                        <a:t>Cost (excess · coverage · pages)</a:t>
+                        <a:t>Cost (excess · coverage · pages · traps)</a:t>
                       </a:r>
                     </a:p>
                   </a:txBody>
@@ -13788,7 +13788,7 @@
                           </a:solidFill>
                           <a:latin typeface="Calibri"/>
                         </a:rPr>
-                        <a:t>1.00 · 1.00 · 70</a:t>
+                        <a:t>1.00 · 1.00 · 74  ·  traps held 1/1</a:t>
                       </a:r>
                     </a:p>
                   </a:txBody>
@@ -13834,7 +13834,7 @@
                           </a:solidFill>
                           <a:latin typeface="Calibri"/>
                         </a:rPr>
-                        <a:t>ai agent: gemini (told the Act)</a:t>
+                        <a:t>ai agent: gemini (unaided)</a:t>
                       </a:r>
                     </a:p>
                   </a:txBody>
@@ -13878,7 +13878,7 @@
                           </a:solidFill>
                           <a:latin typeface="Calibri"/>
                         </a:rPr>
-                        <a:t>1.31 · 0.77 · 72</a:t>
+                        <a:t>1.17 · 0.83 · 76  ·  traps held 0/1</a:t>
                       </a:r>
                     </a:p>
                   </a:txBody>
@@ -13924,7 +13924,7 @@
                           </a:solidFill>
                           <a:latin typeface="Calibri"/>
                         </a:rPr>
-                        <a:t>ai agent: gemini (unaided)</a:t>
+                        <a:t>ai agent: gemini (told the Act)</a:t>
                       </a:r>
                     </a:p>
                   </a:txBody>
@@ -13946,7 +13946,7 @@
                           </a:solidFill>
                           <a:latin typeface="Calibri"/>
                         </a:rPr>
-                        <a:t>0.976  ·  6/7 rules</a:t>
+                        <a:t>0.988  ·  6/7 rules</a:t>
                       </a:r>
                     </a:p>
                   </a:txBody>
@@ -13968,7 +13968,7 @@
                           </a:solidFill>
                           <a:latin typeface="Calibri"/>
                         </a:rPr>
-                        <a:t>1.31 · 0.85 · 70</a:t>
+                        <a:t>1.17 · 0.83 · 76  ·  traps held 0/1</a:t>
                       </a:r>
                     </a:p>
                   </a:txBody>
@@ -14036,7 +14036,7 @@
                           </a:solidFill>
                           <a:latin typeface="Calibri"/>
                         </a:rPr>
-                        <a:t>0.135  ·  0/7 rules</a:t>
+                        <a:t>0.137  ·  0/7 rules</a:t>
                       </a:r>
                     </a:p>
                   </a:txBody>
@@ -14058,7 +14058,7 @@
                           </a:solidFill>
                           <a:latin typeface="Calibri"/>
                         </a:rPr>
-                        <a:t>7.15 · 1.00 · 330</a:t>
+                        <a:t>6.89 · 1.00 · 440  ·  traps held 0/1</a:t>
                       </a:r>
                     </a:p>
                   </a:txBody>

--- a/Review-II.pptx
+++ b/Review-II.pptx
@@ -9658,7 +9658,7 @@
                 <a:ea typeface="Calibri" pitchFamily="34" charset="-122"/>
                 <a:cs typeface="Calibri" pitchFamily="34" charset="-120"/>
               </a:rPr>
-              <a:t>The comparison is now ours against publicly available AI agents (Claude, GPT, Gemini), each briefed with the job, the purpose and the field names — never a value — unaided and told the Act; decisions recorded, replayed, and repeated so determinism is a measured column. The hand-written baseline stands, as the panel agreed most deployed systems sit there.</a:t>
+              <a:t>The comparison is now ours against a publicly available AI agent (Gemini), briefed with the job, the purpose, the field names — never a value — and what the deployment provides; unaided and told the Act; decisions recorded, replayed, and repeated so determinism is a measured column. Two harder measures added: manifest veracity (declared vs demonstrable) and trap tasks whose wording invites a violation. The hand-written baseline stands, as the panel agreed most deployed systems sit there.</a:t>
             </a:r>
             <a:endParaRPr lang="en-US" sz="1500" dirty="0"/>
           </a:p>
@@ -14135,7 +14135,7 @@
                 </a:solidFill>
                 <a:latin typeface="Calibri"/>
               </a:rPr>
-              <a:t>The AI agents are real public models briefed with field names, never values, once unaided and once told the Act; coverage catches any that left out data the job lawfully needs. Repeated runs give a stable column: ours reproduces its decision every time — rules, not sampling; an agent's compliance is a sample. Per-rule columns are in docs/benchmark_results/benchmark-portal.md.</a:t>
+              <a:t>The AI agent is a real public model, briefed with field names — never values — and told what the deployment provides; it cites it correctly, so the gap is not paperwork. Told to reconcile an invoice against the diagnosis, it takes the diagnosis in every run, even with the Act in its prompt: traps held 0 of 4 against our 4 of 4. It does 74% of the job and reproduces its own decision in 3 of 5 runs; ours reads the policy, not the prose, and repeats itself. Per-rule columns: docs/benchmark_results/.</a:t>
             </a:r>
           </a:p>
         </p:txBody>

--- a/Review-II.pptx
+++ b/Review-II.pptx
@@ -14080,7 +14080,7 @@
                           </a:solidFill>
                           <a:latin typeface="Calibri"/>
                         </a:rPr>
-                        <a:t>Every field of every module; no purpose, no manifest, TLS only.</a:t>
+                        <a:t>Every field of every module; no purpose, no manifest; declares only the transport it was observed on.</a:t>
                       </a:r>
                     </a:p>
                   </a:txBody>
@@ -14135,7 +14135,7 @@
                 </a:solidFill>
                 <a:latin typeface="Calibri"/>
               </a:rPr>
-              <a:t>The AI agent is a real public model, briefed with field names — never values — and told what the deployment provides; it cites it correctly, so the gap is not paperwork. Told to reconcile an invoice against the diagnosis, it takes the diagnosis in every run, even with the Act in its prompt: traps held 0 of 4 against our 4 of 4. It does 74% of the job and reproduces its own decision in 3 of 5 runs; ours reads the policy, not the prose, and repeats itself. Per-rule columns: docs/benchmark_results/.</a:t>
+              <a:t>The AI agent is a real public model, briefed with field names — never values — and told what the deployment provides; it cites it correctly, so the gap is not paperwork. Told to reconcile an invoice against the diagnosis, it takes the diagnosis in every run, even with the Act in its prompt: traps held 0 of 20 runs against our 20 of 20. It does 74-78% of the job and reproduces its first decision in about half its repeats; ours reads the policy, not the prose, and repeats itself. Per-rule columns: docs/benchmark_results/.</a:t>
             </a:r>
           </a:p>
         </p:txBody>

--- a/Review-II.pptx
+++ b/Review-II.pptx
@@ -9658,7 +9658,7 @@
                 <a:ea typeface="Calibri" pitchFamily="34" charset="-122"/>
                 <a:cs typeface="Calibri" pitchFamily="34" charset="-120"/>
               </a:rPr>
-              <a:t>The comparison is now ours against a publicly available AI agent (Gemini), briefed with the job, the purpose, the field names — never a value — and what the deployment provides; unaided and told the Act; decisions recorded, replayed, and repeated so determinism is a measured column. Two harder measures added: manifest veracity (declared vs demonstrable) and trap tasks whose wording invites a violation. The hand-written baseline stands, as the panel agreed most deployed systems sit there.</a:t>
+              <a:t>The comparison is now ours against a publicly available AI agent (Gemini), briefed with the job, the purpose, the field names — never a value — and what the deployment provides; unaided, told the Act, and handed the purpose policy itself; decisions recorded, replayed, and repeated so determinism is a measured column. Two harder measures added: manifest veracity (declared vs demonstrable) and trap tasks whose wording invites a violation. The hand-written baseline stands, as the panel agreed most deployed systems sit there.</a:t>
             </a:r>
             <a:endParaRPr lang="en-US" sz="1500" dirty="0"/>
           </a:p>
@@ -13612,7 +13612,7 @@
                 </a:solidFill>
                 <a:latin typeface="Calibri"/>
               </a:rPr>
-              <a:t>4 techniques, 4 extraction tasks, the same login-gated portal scraped by a real browser (20 records per module, 10 per page); every run scored on the identical seven rules; cost measured as real page loads. The techniques differ only in how they treat personal data.</a:t>
+              <a:t>5 techniques, 4 extraction tasks, the same login-gated portal scraped by a real browser (20 records per module, 10 per page); every run scored on the identical seven rules; cost measured as real page loads. The techniques differ only in how they treat personal data.</a:t>
             </a:r>
           </a:p>
         </p:txBody>
@@ -13641,7 +13641,7 @@
                 <a:gridCol w="2377440"/>
                 <a:gridCol w="4142232"/>
               </a:tblGrid>
-              <a:tr h="466344">
+              <a:tr h="388620">
                 <a:tc>
                   <a:txBody>
                     <a:bodyPr/>
@@ -13731,7 +13731,7 @@
                   </a:tcPr>
                 </a:tc>
               </a:tr>
-              <a:tr h="466344">
+              <a:tr h="388620">
                 <a:tc>
                   <a:txBody>
                     <a:bodyPr/>
@@ -13788,7 +13788,7 @@
                           </a:solidFill>
                           <a:latin typeface="Calibri"/>
                         </a:rPr>
-                        <a:t>1.00 · 1.00 · 74  ·  traps held 1/1</a:t>
+                        <a:t>1.00 · 1.00 · 32  ·  traps held 1/1</a:t>
                       </a:r>
                     </a:p>
                   </a:txBody>
@@ -13821,7 +13821,7 @@
                   </a:tcPr>
                 </a:tc>
               </a:tr>
-              <a:tr h="466344">
+              <a:tr h="388620">
                 <a:tc>
                   <a:txBody>
                     <a:bodyPr/>
@@ -13834,7 +13834,97 @@
                           </a:solidFill>
                           <a:latin typeface="Calibri"/>
                         </a:rPr>
-                        <a:t>ai agent: gemini (unaided)</a:t>
+                        <a:t>ai agent: gemini-3.1-flash-lite (told the policy)</a:t>
+                      </a:r>
+                    </a:p>
+                  </a:txBody>
+                  <a:tcPr>
+                    <a:solidFill>
+                      <a:srgbClr val="FFFFFF"/>
+                    </a:solidFill>
+                  </a:tcPr>
+                </a:tc>
+                <a:tc>
+                  <a:txBody>
+                    <a:bodyPr/>
+                    <a:lstStyle/>
+                    <a:p>
+                      <a:r>
+                        <a:rPr sz="1000" b="0">
+                          <a:solidFill>
+                            <a:srgbClr val="000000"/>
+                          </a:solidFill>
+                          <a:latin typeface="Calibri"/>
+                        </a:rPr>
+                        <a:t>0.990  ·  6/7 rules</a:t>
+                      </a:r>
+                    </a:p>
+                  </a:txBody>
+                  <a:tcPr>
+                    <a:solidFill>
+                      <a:srgbClr val="FFFFFF"/>
+                    </a:solidFill>
+                  </a:tcPr>
+                </a:tc>
+                <a:tc>
+                  <a:txBody>
+                    <a:bodyPr/>
+                    <a:lstStyle/>
+                    <a:p>
+                      <a:r>
+                        <a:rPr sz="1000" b="0">
+                          <a:solidFill>
+                            <a:srgbClr val="000000"/>
+                          </a:solidFill>
+                          <a:latin typeface="Calibri"/>
+                        </a:rPr>
+                        <a:t>1.83 · 0.83 · 35  ·  traps held 0/1</a:t>
+                      </a:r>
+                    </a:p>
+                  </a:txBody>
+                  <a:tcPr>
+                    <a:solidFill>
+                      <a:srgbClr val="FFFFFF"/>
+                    </a:solidFill>
+                  </a:tcPr>
+                </a:tc>
+                <a:tc>
+                  <a:txBody>
+                    <a:bodyPr/>
+                    <a:lstStyle/>
+                    <a:p>
+                      <a:r>
+                        <a:rPr sz="1000" b="0">
+                          <a:solidFill>
+                            <a:srgbClr val="000000"/>
+                          </a:solidFill>
+                          <a:latin typeface="Calibri"/>
+                        </a:rPr>
+                        <a:t>A public model decides the pull and the manifest from the job, purpose and field names; recorded and replayed.</a:t>
+                      </a:r>
+                    </a:p>
+                  </a:txBody>
+                  <a:tcPr>
+                    <a:solidFill>
+                      <a:srgbClr val="FFFFFF"/>
+                    </a:solidFill>
+                  </a:tcPr>
+                </a:tc>
+              </a:tr>
+              <a:tr h="388620">
+                <a:tc>
+                  <a:txBody>
+                    <a:bodyPr/>
+                    <a:lstStyle/>
+                    <a:p>
+                      <a:r>
+                        <a:rPr sz="1000" b="0">
+                          <a:solidFill>
+                            <a:srgbClr val="000000"/>
+                          </a:solidFill>
+                          <a:latin typeface="Calibri"/>
+                        </a:rPr>
+                        <a:t>ai agent: gemini-3.1-flash-lite (unaided)</a:t>
                       </a:r>
                     </a:p>
                   </a:txBody>
@@ -13878,7 +13968,7 @@
                           </a:solidFill>
                           <a:latin typeface="Calibri"/>
                         </a:rPr>
-                        <a:t>1.17 · 0.83 · 76  ·  traps held 0/1</a:t>
+                        <a:t>1.39 · 0.72 · 34  ·  traps held 0/1</a:t>
                       </a:r>
                     </a:p>
                   </a:txBody>
@@ -13911,7 +14001,7 @@
                   </a:tcPr>
                 </a:tc>
               </a:tr>
-              <a:tr h="466344">
+              <a:tr h="388620">
                 <a:tc>
                   <a:txBody>
                     <a:bodyPr/>
@@ -13924,7 +14014,7 @@
                           </a:solidFill>
                           <a:latin typeface="Calibri"/>
                         </a:rPr>
-                        <a:t>ai agent: gemini (told the Act)</a:t>
+                        <a:t>ai agent: gemini-3.1-flash-lite (told the Act)</a:t>
                       </a:r>
                     </a:p>
                   </a:txBody>
@@ -13968,7 +14058,7 @@
                           </a:solidFill>
                           <a:latin typeface="Calibri"/>
                         </a:rPr>
-                        <a:t>1.17 · 0.83 · 76  ·  traps held 0/1</a:t>
+                        <a:t>1.28 · 0.72 · 33  ·  traps held 0/1</a:t>
                       </a:r>
                     </a:p>
                   </a:txBody>
@@ -14001,7 +14091,7 @@
                   </a:tcPr>
                 </a:tc>
               </a:tr>
-              <a:tr h="466344">
+              <a:tr h="388620">
                 <a:tc>
                   <a:txBody>
                     <a:bodyPr/>
@@ -14036,7 +14126,7 @@
                           </a:solidFill>
                           <a:latin typeface="Calibri"/>
                         </a:rPr>
-                        <a:t>0.137  ·  0/7 rules</a:t>
+                        <a:t>0.114  ·  0/7 rules</a:t>
                       </a:r>
                     </a:p>
                   </a:txBody>
@@ -14058,7 +14148,7 @@
                           </a:solidFill>
                           <a:latin typeface="Calibri"/>
                         </a:rPr>
-                        <a:t>6.89 · 1.00 · 440  ·  traps held 0/1</a:t>
+                        <a:t>7.56 · 1.00 · 440  ·  traps held 0/1</a:t>
                       </a:r>
                     </a:p>
                   </a:txBody>
@@ -14135,7 +14225,7 @@
                 </a:solidFill>
                 <a:latin typeface="Calibri"/>
               </a:rPr>
-              <a:t>The AI agent is a real public model, briefed with field names — never values — and told what the deployment provides; it cites it correctly, so the gap is not paperwork. Told to reconcile an invoice against the diagnosis, it takes the diagnosis in every run, even with the Act in its prompt: traps held 0 of 20 runs against our 20 of 20. It does 74-78% of the job and reproduces its first decision in about half its repeats; ours reads the policy, not the prose, and repeats itself. Per-rule columns: docs/benchmark_results/.</a:t>
+              <a:t>The AI agent is a real public model, briefed with field names — never values — and told what the deployment provides; it cites it correctly, so the gap is not paperwork. Told to reconcile an invoice against the diagnosis, it takes the diagnosis in every run -- with the Act in its prompt, and with the purpose policy itself in its prompt (it obeys the policy's numbers, not its categories): traps held 0-10 of 20 runs against our 20 of 20. It does 67-74% of the job and reproduces its first decision in 18-21 of 32 repeats; ours reads the policy, not the prose, and repeats itself. Per-rule columns: docs/benchmark_results/.</a:t>
             </a:r>
           </a:p>
         </p:txBody>

--- a/Review-II.pptx
+++ b/Review-II.pptx
@@ -13892,17 +13892,7 @@
                   <a:txBody>
                     <a:bodyPr/>
                     <a:lstStyle/>
-                    <a:p>
-                      <a:r>
-                        <a:rPr sz="1000" b="0">
-                          <a:solidFill>
-                            <a:srgbClr val="000000"/>
-                          </a:solidFill>
-                          <a:latin typeface="Calibri"/>
-                        </a:rPr>
-                        <a:t>A public model decides the pull and the manifest from the job, purpose and field names; recorded and replayed.</a:t>
-                      </a:r>
-                    </a:p>
+                    <a:p/>
                   </a:txBody>
                   <a:tcPr>
                     <a:solidFill>
@@ -13982,17 +13972,7 @@
                   <a:txBody>
                     <a:bodyPr/>
                     <a:lstStyle/>
-                    <a:p>
-                      <a:r>
-                        <a:rPr sz="1000" b="0">
-                          <a:solidFill>
-                            <a:srgbClr val="000000"/>
-                          </a:solidFill>
-                          <a:latin typeface="Calibri"/>
-                        </a:rPr>
-                        <a:t>A public model decides the pull and the manifest from the job, purpose and field names; recorded and replayed.</a:t>
-                      </a:r>
-                    </a:p>
+                    <a:p/>
                   </a:txBody>
                   <a:tcPr>
                     <a:solidFill>
@@ -14072,17 +14052,7 @@
                   <a:txBody>
                     <a:bodyPr/>
                     <a:lstStyle/>
-                    <a:p>
-                      <a:r>
-                        <a:rPr sz="1000" b="0">
-                          <a:solidFill>
-                            <a:srgbClr val="000000"/>
-                          </a:solidFill>
-                          <a:latin typeface="Calibri"/>
-                        </a:rPr>
-                        <a:t>A public model decides the pull and the manifest from the job, purpose and field names; recorded and replayed.</a:t>
-                      </a:r>
-                    </a:p>
+                    <a:p/>
                   </a:txBody>
                   <a:tcPr>
                     <a:solidFill>

--- a/Review-II.pptx
+++ b/Review-II.pptx
@@ -20,6 +20,7 @@
     <p:sldId id="263" r:id="rId9"/>
     <p:sldId id="264" r:id="rId10"/>
     <p:sldId id="270" r:id="rId21"/>
+    <p:sldId id="271" r:id="rId22"/>
     <p:sldId id="265" r:id="rId11"/>
     <p:sldId id="266" r:id="rId12"/>
     <p:sldId id="267" r:id="rId13"/>
@@ -1879,7 +1880,7 @@
                 <a:ea typeface="Calibri" pitchFamily="34" charset="-122"/>
                 <a:cs typeface="Calibri" pitchFamily="34" charset="-120"/>
               </a:rPr>
-              <a:t>13</a:t>
+              <a:t>14</a:t>
             </a:r>
             <a:endParaRPr lang="en-US" sz="1000" dirty="0"/>
           </a:p>
@@ -1998,7 +1999,7 @@
               <a:buChar char="•"/>
             </a:pPr>
             <a:r>
-              <a:rPr lang="en-US" sz="1250" dirty="0" b="0">
+              <a:rPr lang="en-US" sz="1200" dirty="0" b="0">
                 <a:solidFill>
                   <a:srgbClr val="000000"/>
                 </a:solidFill>
@@ -2019,7 +2020,7 @@
               <a:buChar char="•"/>
             </a:pPr>
             <a:r>
-              <a:rPr lang="en-US" sz="1250" dirty="0" b="0">
+              <a:rPr lang="en-US" sz="1200" dirty="0" b="0">
                 <a:solidFill>
                   <a:srgbClr val="000000"/>
                 </a:solidFill>
@@ -2040,7 +2041,7 @@
               <a:buChar char="•"/>
             </a:pPr>
             <a:r>
-              <a:rPr lang="en-US" sz="1250" dirty="0" b="0">
+              <a:rPr lang="en-US" sz="1200" dirty="0" b="0">
                 <a:solidFill>
                   <a:srgbClr val="000000"/>
                 </a:solidFill>
@@ -2048,7 +2049,28 @@
                 <a:ea typeface="Calibri" pitchFamily="34" charset="-122"/>
                 <a:cs typeface="Calibri" pitchFamily="34" charset="-120"/>
               </a:rPr>
-              <a:t>Trusting the manifest — pseudonymisation is now applied at export and audited against the emitted artefacts rather than taken from the declaration. Real data handling — the PLAN §4 checklist is enforced in code: a non-synthetic export is refused without provenance, de-identification statement and ignore rule.</a:t>
+              <a:t>Trusting our own claims — the manifest is scored against what the run produced (export audit, observed transport, harness-written audit log, retention sidecar), not against the declaration; and the real-data procedure was rehearsed on a hospital-shaped export before any real data existed, which found four defects.</a:t>
+            </a:r>
+            <a:endParaRPr lang="en-US" sz="1500" dirty="0"/>
+          </a:p>
+          <a:p>
+            <a:pPr marL="355600" lvl="1" indent="-177800">
+              <a:spcAft>
+                <a:spcPts val="400"/>
+              </a:spcAft>
+              <a:buSzPct val="100000"/>
+              <a:buChar char="•"/>
+            </a:pPr>
+            <a:r>
+              <a:rPr lang="en-US" sz="1200" dirty="0" b="0">
+                <a:solidFill>
+                  <a:srgbClr val="000000"/>
+                </a:solidFill>
+                <a:latin typeface="Calibri" pitchFamily="34" charset="0"/>
+                <a:ea typeface="Calibri" pitchFamily="34" charset="-122"/>
+                <a:cs typeface="Calibri" pitchFamily="34" charset="-120"/>
+              </a:rPr>
+              <a:t>Public models on free tiers — the flagship allows 20 requests a day, so the recorder is paced, budgeted per day and breadth-first; a model enters the tables after one pass and its stability denominator grows with its samples. The model never sees a patient value, so the same recordings replay on the real data.</a:t>
             </a:r>
             <a:endParaRPr lang="en-US" sz="1500" dirty="0"/>
           </a:p>
@@ -2069,7 +2091,7 @@
                 <a:ea typeface="Calibri" pitchFamily="34" charset="-122"/>
                 <a:cs typeface="Calibri" pitchFamily="34" charset="-120"/>
               </a:rPr>
-              <a:t>Remaining work (25%):</a:t>
+              <a:t>Remaining work (ledger at 98%, PLAN.md §5):</a:t>
             </a:r>
             <a:endParaRPr lang="en-US" sz="1500" dirty="0"/>
           </a:p>
@@ -2082,7 +2104,7 @@
               <a:buChar char="•"/>
             </a:pPr>
             <a:r>
-              <a:rPr lang="en-US" sz="1250" dirty="0" b="0">
+              <a:rPr lang="en-US" sz="1200" dirty="0" b="0">
                 <a:solidFill>
                   <a:srgbClr val="000000"/>
                 </a:solidFill>
@@ -2090,7 +2112,7 @@
                 <a:ea typeface="Calibri" pitchFamily="34" charset="-122"/>
                 <a:cs typeface="Calibri" pitchFamily="34" charset="-120"/>
               </a:rPr>
-              <a:t>Project report: all eight chapters drafted; second pass for length, and the section mapping to be verified against the Gazette text before citations enter it. Manuscript compressed from chapters 3–7. Real hospital dataset → one column map, then the same pipeline; results reported beside the synthetic ones.</a:t>
+              <a:t>The hospital dataset, expected before this review: one column map, the same pipeline; its results slide is rebuilt from that run. The second model's recording completes over its daily allowance. Project report: eight chapters drafted on the real numbers (section references verified against the Gazette text); second pass for length. Manuscript compressed from chapters 3–7.</a:t>
             </a:r>
             <a:endParaRPr lang="en-US" sz="1500" dirty="0"/>
           </a:p>
@@ -2124,7 +2146,7 @@
               <a:buChar char="•"/>
             </a:pPr>
             <a:r>
-              <a:rPr lang="en-US" sz="1250" dirty="0" b="0">
+              <a:rPr lang="en-US" sz="1200" dirty="0" b="0">
                 <a:solidFill>
                   <a:srgbClr val="000000"/>
                 </a:solidFill>
@@ -2132,7 +2154,7 @@
                 <a:ea typeface="Calibri" pitchFamily="34" charset="-122"/>
                 <a:cs typeface="Calibri" pitchFamily="34" charset="-120"/>
               </a:rPr>
-              <a:t>Weeks 1–2: report chapters 3–4 (framework, techniques and cost) and 7 on synthetic data. Weeks 2–3: chapters 5–6, appendices; real-data integration the day the export lands. Week 4: manuscript compression, final results tables, rehearsal.</a:t>
+              <a:t>Week 1: real-data results beside the synthetic ones; second model complete. Weeks 2–3: report second pass, appendices, weight-sensitivity and per-model discussion. Week 4: manuscript, final tables, rehearsal.</a:t>
             </a:r>
             <a:endParaRPr lang="en-US" sz="1500" dirty="0"/>
           </a:p>
@@ -2204,7 +2226,7 @@
                 <a:ea typeface="Calibri" pitchFamily="34" charset="-122"/>
                 <a:cs typeface="Calibri" pitchFamily="34" charset="-120"/>
               </a:rPr>
-              <a:t>14</a:t>
+              <a:t>15</a:t>
             </a:r>
             <a:endParaRPr lang="en-US" sz="1000" dirty="0"/>
           </a:p>
@@ -2736,7 +2758,7 @@
                 <a:ea typeface="Calibri" pitchFamily="34" charset="-122"/>
                 <a:cs typeface="Calibri" pitchFamily="34" charset="-120"/>
               </a:rPr>
-              <a:t>15</a:t>
+              <a:t>16</a:t>
             </a:r>
             <a:endParaRPr lang="en-US" sz="1000" dirty="0"/>
           </a:p>
@@ -8147,6 +8169,794 @@
 </p:sld>
 </file>
 
+<file path=ppt/slides/slide16.xml><?xml version="1.0" encoding="utf-8"?>
+<p:sld xmlns:a="http://schemas.openxmlformats.org/drawingml/2006/main" xmlns:p="http://schemas.openxmlformats.org/presentationml/2006/main" xmlns:r="http://schemas.openxmlformats.org/officeDocument/2006/relationships">
+  <p:cSld>
+    <p:spTree>
+      <p:nvGrpSpPr>
+        <p:cNvPr id="1" name=""/>
+        <p:cNvGrpSpPr/>
+        <p:nvPr/>
+      </p:nvGrpSpPr>
+      <p:grpSpPr/>
+      <p:sp>
+        <p:nvSpPr>
+          <p:cNvPr id="2" name="Text 0"/>
+          <p:cNvSpPr txBox="1"/>
+          <p:nvPr/>
+        </p:nvSpPr>
+        <p:spPr>
+          <a:xfrm>
+            <a:off x="11460175" y="6446520"/>
+            <a:ext cx="457200" cy="274320"/>
+          </a:xfrm>
+          <a:prstGeom prst="rect">
+            <a:avLst/>
+          </a:prstGeom>
+          <a:noFill/>
+          <a:ln/>
+        </p:spPr>
+        <p:txBody>
+          <a:bodyPr wrap="square" lIns="0" tIns="0" rIns="0" bIns="0" rtlCol="0" anchor="ctr"/>
+          <a:lstStyle/>
+          <a:p>
+            <a:pPr marL="0" indent="0" algn="r">
+              <a:buNone/>
+            </a:pPr>
+            <a:r>
+              <a:rPr lang="en-US" sz="1000" dirty="0">
+                <a:solidFill>
+                  <a:srgbClr val="808080"/>
+                </a:solidFill>
+                <a:latin typeface="Calibri" pitchFamily="34" charset="0"/>
+                <a:ea typeface="Calibri" pitchFamily="34" charset="-122"/>
+                <a:cs typeface="Calibri" pitchFamily="34" charset="-120"/>
+              </a:rPr>
+              <a:t>13</a:t>
+            </a:r>
+            <a:endParaRPr lang="en-US" sz="1000" dirty="0"/>
+          </a:p>
+        </p:txBody>
+      </p:sp>
+      <p:sp>
+        <p:nvSpPr>
+          <p:cNvPr id="3" name="Text 1"/>
+          <p:cNvSpPr txBox="1"/>
+          <p:nvPr/>
+        </p:nvSpPr>
+        <p:spPr>
+          <a:xfrm>
+            <a:off x="548640" y="320040"/>
+            <a:ext cx="9601200" cy="685800"/>
+          </a:xfrm>
+          <a:prstGeom prst="rect">
+            <a:avLst/>
+          </a:prstGeom>
+          <a:noFill/>
+          <a:ln/>
+        </p:spPr>
+        <p:txBody>
+          <a:bodyPr wrap="square" lIns="0" tIns="0" rIns="0" bIns="0" rtlCol="0" anchor="ctr"/>
+          <a:lstStyle/>
+          <a:p>
+            <a:pPr marL="0" indent="0">
+              <a:buNone/>
+            </a:pPr>
+            <a:r>
+              <a:rPr lang="en-US" sz="2800" b="1" dirty="0">
+                <a:solidFill>
+                  <a:srgbClr val="1D2F82"/>
+                </a:solidFill>
+                <a:latin typeface="Calibri" pitchFamily="34" charset="0"/>
+                <a:ea typeface="Calibri" pitchFamily="34" charset="-122"/>
+                <a:cs typeface="Calibri" pitchFamily="34" charset="-120"/>
+              </a:rPr>
+              <a:t>Results &amp; Analysis (contd.) — Real Data, Rehearsed</a:t>
+            </a:r>
+            <a:endParaRPr lang="en-US" sz="2800" dirty="0"/>
+          </a:p>
+        </p:txBody>
+      </p:sp>
+      <p:pic>
+        <p:nvPicPr>
+          <p:cNvPr id="4" name="Image 0" descr="logo.png"/>
+          <p:cNvPicPr>
+            <a:picLocks noChangeAspect="1"/>
+          </p:cNvPicPr>
+          <p:nvPr/>
+        </p:nvPicPr>
+        <p:blipFill>
+          <a:blip r:embed="rId2"/>
+          <a:stretch>
+            <a:fillRect/>
+          </a:stretch>
+        </p:blipFill>
+        <p:spPr>
+          <a:xfrm>
+            <a:off x="10362895" y="320040"/>
+            <a:ext cx="1371600" cy="518746"/>
+          </a:xfrm>
+          <a:prstGeom prst="rect">
+            <a:avLst/>
+          </a:prstGeom>
+        </p:spPr>
+      </p:pic>
+      <p:sp>
+        <p:nvSpPr>
+          <p:cNvPr id="5" name="TextBox 4"/>
+          <p:cNvSpPr txBox="1"/>
+          <p:nvPr/>
+        </p:nvSpPr>
+        <p:spPr>
+          <a:xfrm>
+            <a:off x="640080" y="1234440"/>
+            <a:ext cx="10881360" cy="1188720"/>
+          </a:xfrm>
+          <a:prstGeom prst="rect">
+            <a:avLst/>
+          </a:prstGeom>
+          <a:noFill/>
+        </p:spPr>
+        <p:txBody>
+          <a:bodyPr wrap="square">
+            <a:spAutoFit/>
+          </a:bodyPr>
+          <a:lstStyle/>
+          <a:p>
+            <a:r>
+              <a:rPr sz="1150" b="0">
+                <a:solidFill>
+                  <a:srgbClr val="000000"/>
+                </a:solidFill>
+                <a:latin typeface="Calibri"/>
+              </a:rPr>
+              <a:t>The hospital's export was not in when this deck was built, so the day-one procedure was run on an export shaped like one: the hospital's own column names, a column we do not model, an Excel file among the CSVs, dd/mm/yyyy dates, one table split across two files — and no synthetic manifest, so the handling gate treats it as real (refused without provenance under data/, git-ignored). check_source.py wrote the mapping template, a person filled it, run_pipeline.py --dataset ran the same techniques and recordings unchanged.</a:t>
+            </a:r>
+          </a:p>
+        </p:txBody>
+      </p:sp>
+      <p:graphicFrame>
+        <p:nvGraphicFramePr>
+          <p:cNvPr id="6" name="Table 5"/>
+          <p:cNvGraphicFramePr>
+            <a:graphicFrameLocks noGrp="1"/>
+          </p:cNvGraphicFramePr>
+          <p:nvPr/>
+        </p:nvGraphicFramePr>
+        <p:xfrm>
+          <a:off x="548640" y="2514600"/>
+          <a:ext cx="11091672" cy="1517904"/>
+        </p:xfrm>
+        <a:graphic>
+          <a:graphicData uri="http://schemas.openxmlformats.org/drawingml/2006/table">
+            <a:tbl>
+              <a:tblPr firstRow="1" bandRow="1">
+                <a:tableStyleId>{5C22544A-7EE6-4342-B048-85BDC9FD1C3A}</a:tableStyleId>
+              </a:tblPr>
+              <a:tblGrid>
+                <a:gridCol w="3931920"/>
+                <a:gridCol w="1828800"/>
+                <a:gridCol w="1097280"/>
+                <a:gridCol w="1097280"/>
+                <a:gridCol w="1828800"/>
+                <a:gridCol w="1307592"/>
+              </a:tblGrid>
+              <a:tr h="379476">
+                <a:tc>
+                  <a:txBody>
+                    <a:bodyPr/>
+                    <a:lstStyle/>
+                    <a:p>
+                      <a:r>
+                        <a:rPr sz="1200" b="1">
+                          <a:solidFill>
+                            <a:srgbClr val="FFFFFF"/>
+                          </a:solidFill>
+                          <a:latin typeface="Calibri"/>
+                        </a:rPr>
+                        <a:t>Technique (at 'told the policy')</a:t>
+                      </a:r>
+                    </a:p>
+                  </a:txBody>
+                  <a:tcPr>
+                    <a:solidFill>
+                      <a:srgbClr val="1D2F82"/>
+                    </a:solidFill>
+                  </a:tcPr>
+                </a:tc>
+                <a:tc>
+                  <a:txBody>
+                    <a:bodyPr/>
+                    <a:lstStyle/>
+                    <a:p>
+                      <a:r>
+                        <a:rPr sz="1200" b="1">
+                          <a:solidFill>
+                            <a:srgbClr val="FFFFFF"/>
+                          </a:solidFill>
+                          <a:latin typeface="Calibri"/>
+                        </a:rPr>
+                        <a:t>Compliance</a:t>
+                      </a:r>
+                    </a:p>
+                  </a:txBody>
+                  <a:tcPr>
+                    <a:solidFill>
+                      <a:srgbClr val="1D2F82"/>
+                    </a:solidFill>
+                  </a:tcPr>
+                </a:tc>
+                <a:tc>
+                  <a:txBody>
+                    <a:bodyPr/>
+                    <a:lstStyle/>
+                    <a:p>
+                      <a:r>
+                        <a:rPr sz="1200" b="1">
+                          <a:solidFill>
+                            <a:srgbClr val="FFFFFF"/>
+                          </a:solidFill>
+                          <a:latin typeface="Calibri"/>
+                        </a:rPr>
+                        <a:t>Coverage</a:t>
+                      </a:r>
+                    </a:p>
+                  </a:txBody>
+                  <a:tcPr>
+                    <a:solidFill>
+                      <a:srgbClr val="1D2F82"/>
+                    </a:solidFill>
+                  </a:tcPr>
+                </a:tc>
+                <a:tc>
+                  <a:txBody>
+                    <a:bodyPr/>
+                    <a:lstStyle/>
+                    <a:p>
+                      <a:r>
+                        <a:rPr sz="1200" b="1">
+                          <a:solidFill>
+                            <a:srgbClr val="FFFFFF"/>
+                          </a:solidFill>
+                          <a:latin typeface="Calibri"/>
+                        </a:rPr>
+                        <a:t>Excess</a:t>
+                      </a:r>
+                    </a:p>
+                  </a:txBody>
+                  <a:tcPr>
+                    <a:solidFill>
+                      <a:srgbClr val="1D2F82"/>
+                    </a:solidFill>
+                  </a:tcPr>
+                </a:tc>
+                <a:tc>
+                  <a:txBody>
+                    <a:bodyPr/>
+                    <a:lstStyle/>
+                    <a:p>
+                      <a:r>
+                        <a:rPr sz="1200" b="1">
+                          <a:solidFill>
+                            <a:srgbClr val="FFFFFF"/>
+                          </a:solidFill>
+                          <a:latin typeface="Calibri"/>
+                        </a:rPr>
+                        <a:t>Records read ÷ needed</a:t>
+                      </a:r>
+                    </a:p>
+                  </a:txBody>
+                  <a:tcPr>
+                    <a:solidFill>
+                      <a:srgbClr val="1D2F82"/>
+                    </a:solidFill>
+                  </a:tcPr>
+                </a:tc>
+                <a:tc>
+                  <a:txBody>
+                    <a:bodyPr/>
+                    <a:lstStyle/>
+                    <a:p>
+                      <a:r>
+                        <a:rPr sz="1200" b="1">
+                          <a:solidFill>
+                            <a:srgbClr val="FFFFFF"/>
+                          </a:solidFill>
+                          <a:latin typeface="Calibri"/>
+                        </a:rPr>
+                        <a:t>Traps held</a:t>
+                      </a:r>
+                    </a:p>
+                  </a:txBody>
+                  <a:tcPr>
+                    <a:solidFill>
+                      <a:srgbClr val="1D2F82"/>
+                    </a:solidFill>
+                  </a:tcPr>
+                </a:tc>
+              </a:tr>
+              <a:tr h="379476">
+                <a:tc>
+                  <a:txBody>
+                    <a:bodyPr/>
+                    <a:lstStyle/>
+                    <a:p>
+                      <a:r>
+                        <a:rPr sz="1100" b="0">
+                          <a:solidFill>
+                            <a:srgbClr val="000000"/>
+                          </a:solidFill>
+                          <a:latin typeface="Calibri"/>
+                        </a:rPr>
+                        <a:t>compliance-aware (ours)</a:t>
+                      </a:r>
+                    </a:p>
+                  </a:txBody>
+                  <a:tcPr>
+                    <a:solidFill>
+                      <a:srgbClr val="FFFFFF"/>
+                    </a:solidFill>
+                  </a:tcPr>
+                </a:tc>
+                <a:tc>
+                  <a:txBody>
+                    <a:bodyPr/>
+                    <a:lstStyle/>
+                    <a:p>
+                      <a:r>
+                        <a:rPr sz="1100" b="0">
+                          <a:solidFill>
+                            <a:srgbClr val="000000"/>
+                          </a:solidFill>
+                          <a:latin typeface="Calibri"/>
+                        </a:rPr>
+                        <a:t>1.000  ·  7/7 rules</a:t>
+                      </a:r>
+                    </a:p>
+                  </a:txBody>
+                  <a:tcPr>
+                    <a:solidFill>
+                      <a:srgbClr val="FFFFFF"/>
+                    </a:solidFill>
+                  </a:tcPr>
+                </a:tc>
+                <a:tc>
+                  <a:txBody>
+                    <a:bodyPr/>
+                    <a:lstStyle/>
+                    <a:p>
+                      <a:r>
+                        <a:rPr sz="1100" b="0">
+                          <a:solidFill>
+                            <a:srgbClr val="000000"/>
+                          </a:solidFill>
+                          <a:latin typeface="Calibri"/>
+                        </a:rPr>
+                        <a:t>1.00</a:t>
+                      </a:r>
+                    </a:p>
+                  </a:txBody>
+                  <a:tcPr>
+                    <a:solidFill>
+                      <a:srgbClr val="FFFFFF"/>
+                    </a:solidFill>
+                  </a:tcPr>
+                </a:tc>
+                <a:tc>
+                  <a:txBody>
+                    <a:bodyPr/>
+                    <a:lstStyle/>
+                    <a:p>
+                      <a:r>
+                        <a:rPr sz="1100" b="0">
+                          <a:solidFill>
+                            <a:srgbClr val="000000"/>
+                          </a:solidFill>
+                          <a:latin typeface="Calibri"/>
+                        </a:rPr>
+                        <a:t>1.00</a:t>
+                      </a:r>
+                    </a:p>
+                  </a:txBody>
+                  <a:tcPr>
+                    <a:solidFill>
+                      <a:srgbClr val="FFFFFF"/>
+                    </a:solidFill>
+                  </a:tcPr>
+                </a:tc>
+                <a:tc>
+                  <a:txBody>
+                    <a:bodyPr/>
+                    <a:lstStyle/>
+                    <a:p>
+                      <a:r>
+                        <a:rPr sz="1100" b="0">
+                          <a:solidFill>
+                            <a:srgbClr val="000000"/>
+                          </a:solidFill>
+                          <a:latin typeface="Calibri"/>
+                        </a:rPr>
+                        <a:t>1.00×</a:t>
+                      </a:r>
+                    </a:p>
+                  </a:txBody>
+                  <a:tcPr>
+                    <a:solidFill>
+                      <a:srgbClr val="FFFFFF"/>
+                    </a:solidFill>
+                  </a:tcPr>
+                </a:tc>
+                <a:tc>
+                  <a:txBody>
+                    <a:bodyPr/>
+                    <a:lstStyle/>
+                    <a:p>
+                      <a:r>
+                        <a:rPr sz="1100" b="0">
+                          <a:solidFill>
+                            <a:srgbClr val="000000"/>
+                          </a:solidFill>
+                          <a:latin typeface="Calibri"/>
+                        </a:rPr>
+                        <a:t>1 / 1</a:t>
+                      </a:r>
+                    </a:p>
+                  </a:txBody>
+                  <a:tcPr>
+                    <a:solidFill>
+                      <a:srgbClr val="FFFFFF"/>
+                    </a:solidFill>
+                  </a:tcPr>
+                </a:tc>
+              </a:tr>
+              <a:tr h="379476">
+                <a:tc>
+                  <a:txBody>
+                    <a:bodyPr/>
+                    <a:lstStyle/>
+                    <a:p>
+                      <a:r>
+                        <a:rPr sz="1100" b="0">
+                          <a:solidFill>
+                            <a:srgbClr val="000000"/>
+                          </a:solidFill>
+                          <a:latin typeface="Calibri"/>
+                        </a:rPr>
+                        <a:t>ai agent: gemini-3.1-flash-lite (told the policy)</a:t>
+                      </a:r>
+                    </a:p>
+                  </a:txBody>
+                  <a:tcPr>
+                    <a:solidFill>
+                      <a:srgbClr val="FFFFFF"/>
+                    </a:solidFill>
+                  </a:tcPr>
+                </a:tc>
+                <a:tc>
+                  <a:txBody>
+                    <a:bodyPr/>
+                    <a:lstStyle/>
+                    <a:p>
+                      <a:r>
+                        <a:rPr sz="1100" b="0">
+                          <a:solidFill>
+                            <a:srgbClr val="000000"/>
+                          </a:solidFill>
+                          <a:latin typeface="Calibri"/>
+                        </a:rPr>
+                        <a:t>0.990  ·  6/7 rules</a:t>
+                      </a:r>
+                    </a:p>
+                  </a:txBody>
+                  <a:tcPr>
+                    <a:solidFill>
+                      <a:srgbClr val="FFFFFF"/>
+                    </a:solidFill>
+                  </a:tcPr>
+                </a:tc>
+                <a:tc>
+                  <a:txBody>
+                    <a:bodyPr/>
+                    <a:lstStyle/>
+                    <a:p>
+                      <a:r>
+                        <a:rPr sz="1100" b="0">
+                          <a:solidFill>
+                            <a:srgbClr val="000000"/>
+                          </a:solidFill>
+                          <a:latin typeface="Calibri"/>
+                        </a:rPr>
+                        <a:t>0.83</a:t>
+                      </a:r>
+                    </a:p>
+                  </a:txBody>
+                  <a:tcPr>
+                    <a:solidFill>
+                      <a:srgbClr val="FFFFFF"/>
+                    </a:solidFill>
+                  </a:tcPr>
+                </a:tc>
+                <a:tc>
+                  <a:txBody>
+                    <a:bodyPr/>
+                    <a:lstStyle/>
+                    <a:p>
+                      <a:r>
+                        <a:rPr sz="1100" b="0">
+                          <a:solidFill>
+                            <a:srgbClr val="000000"/>
+                          </a:solidFill>
+                          <a:latin typeface="Calibri"/>
+                        </a:rPr>
+                        <a:t>1.83</a:t>
+                      </a:r>
+                    </a:p>
+                  </a:txBody>
+                  <a:tcPr>
+                    <a:solidFill>
+                      <a:srgbClr val="FFFFFF"/>
+                    </a:solidFill>
+                  </a:tcPr>
+                </a:tc>
+                <a:tc>
+                  <a:txBody>
+                    <a:bodyPr/>
+                    <a:lstStyle/>
+                    <a:p>
+                      <a:r>
+                        <a:rPr sz="1100" b="0">
+                          <a:solidFill>
+                            <a:srgbClr val="000000"/>
+                          </a:solidFill>
+                          <a:latin typeface="Calibri"/>
+                        </a:rPr>
+                        <a:t>1.25×</a:t>
+                      </a:r>
+                    </a:p>
+                  </a:txBody>
+                  <a:tcPr>
+                    <a:solidFill>
+                      <a:srgbClr val="FFFFFF"/>
+                    </a:solidFill>
+                  </a:tcPr>
+                </a:tc>
+                <a:tc>
+                  <a:txBody>
+                    <a:bodyPr/>
+                    <a:lstStyle/>
+                    <a:p>
+                      <a:r>
+                        <a:rPr sz="1100" b="0">
+                          <a:solidFill>
+                            <a:srgbClr val="000000"/>
+                          </a:solidFill>
+                          <a:latin typeface="Calibri"/>
+                        </a:rPr>
+                        <a:t>0 / 1</a:t>
+                      </a:r>
+                    </a:p>
+                  </a:txBody>
+                  <a:tcPr>
+                    <a:solidFill>
+                      <a:srgbClr val="FFFFFF"/>
+                    </a:solidFill>
+                  </a:tcPr>
+                </a:tc>
+              </a:tr>
+              <a:tr h="379476">
+                <a:tc>
+                  <a:txBody>
+                    <a:bodyPr/>
+                    <a:lstStyle/>
+                    <a:p>
+                      <a:r>
+                        <a:rPr sz="1100" b="0">
+                          <a:solidFill>
+                            <a:srgbClr val="000000"/>
+                          </a:solidFill>
+                          <a:latin typeface="Calibri"/>
+                        </a:rPr>
+                        <a:t>unconstrained (baseline)</a:t>
+                      </a:r>
+                    </a:p>
+                  </a:txBody>
+                  <a:tcPr>
+                    <a:solidFill>
+                      <a:srgbClr val="FFFFFF"/>
+                    </a:solidFill>
+                  </a:tcPr>
+                </a:tc>
+                <a:tc>
+                  <a:txBody>
+                    <a:bodyPr/>
+                    <a:lstStyle/>
+                    <a:p>
+                      <a:r>
+                        <a:rPr sz="1100" b="0">
+                          <a:solidFill>
+                            <a:srgbClr val="000000"/>
+                          </a:solidFill>
+                          <a:latin typeface="Calibri"/>
+                        </a:rPr>
+                        <a:t>0.114  ·  0/7 rules</a:t>
+                      </a:r>
+                    </a:p>
+                  </a:txBody>
+                  <a:tcPr>
+                    <a:solidFill>
+                      <a:srgbClr val="FFFFFF"/>
+                    </a:solidFill>
+                  </a:tcPr>
+                </a:tc>
+                <a:tc>
+                  <a:txBody>
+                    <a:bodyPr/>
+                    <a:lstStyle/>
+                    <a:p>
+                      <a:r>
+                        <a:rPr sz="1100" b="0">
+                          <a:solidFill>
+                            <a:srgbClr val="000000"/>
+                          </a:solidFill>
+                          <a:latin typeface="Calibri"/>
+                        </a:rPr>
+                        <a:t>1.00</a:t>
+                      </a:r>
+                    </a:p>
+                  </a:txBody>
+                  <a:tcPr>
+                    <a:solidFill>
+                      <a:srgbClr val="FFFFFF"/>
+                    </a:solidFill>
+                  </a:tcPr>
+                </a:tc>
+                <a:tc>
+                  <a:txBody>
+                    <a:bodyPr/>
+                    <a:lstStyle/>
+                    <a:p>
+                      <a:r>
+                        <a:rPr sz="1100" b="0">
+                          <a:solidFill>
+                            <a:srgbClr val="000000"/>
+                          </a:solidFill>
+                          <a:latin typeface="Calibri"/>
+                        </a:rPr>
+                        <a:t>7.56</a:t>
+                      </a:r>
+                    </a:p>
+                  </a:txBody>
+                  <a:tcPr>
+                    <a:solidFill>
+                      <a:srgbClr val="FFFFFF"/>
+                    </a:solidFill>
+                  </a:tcPr>
+                </a:tc>
+                <a:tc>
+                  <a:txBody>
+                    <a:bodyPr/>
+                    <a:lstStyle/>
+                    <a:p>
+                      <a:r>
+                        <a:rPr sz="1100" b="0">
+                          <a:solidFill>
+                            <a:srgbClr val="000000"/>
+                          </a:solidFill>
+                          <a:latin typeface="Calibri"/>
+                        </a:rPr>
+                        <a:t>100.00×</a:t>
+                      </a:r>
+                    </a:p>
+                  </a:txBody>
+                  <a:tcPr>
+                    <a:solidFill>
+                      <a:srgbClr val="FFFFFF"/>
+                    </a:solidFill>
+                  </a:tcPr>
+                </a:tc>
+                <a:tc>
+                  <a:txBody>
+                    <a:bodyPr/>
+                    <a:lstStyle/>
+                    <a:p>
+                      <a:r>
+                        <a:rPr sz="1100" b="0">
+                          <a:solidFill>
+                            <a:srgbClr val="000000"/>
+                          </a:solidFill>
+                          <a:latin typeface="Calibri"/>
+                        </a:rPr>
+                        <a:t>0 / 1</a:t>
+                      </a:r>
+                    </a:p>
+                  </a:txBody>
+                  <a:tcPr>
+                    <a:solidFill>
+                      <a:srgbClr val="FFFFFF"/>
+                    </a:solidFill>
+                  </a:tcPr>
+                </a:tc>
+              </a:tr>
+            </a:tbl>
+          </a:graphicData>
+        </a:graphic>
+      </p:graphicFrame>
+      <p:sp>
+        <p:nvSpPr>
+          <p:cNvPr id="7" name="TextBox 6"/>
+          <p:cNvSpPr txBox="1"/>
+          <p:nvPr/>
+        </p:nvSpPr>
+        <p:spPr>
+          <a:xfrm>
+            <a:off x="640080" y="4169663"/>
+            <a:ext cx="10881360" cy="1645920"/>
+          </a:xfrm>
+          <a:prstGeom prst="rect">
+            <a:avLst/>
+          </a:prstGeom>
+          <a:noFill/>
+        </p:spPr>
+        <p:txBody>
+          <a:bodyPr wrap="square">
+            <a:spAutoFit/>
+          </a:bodyPr>
+          <a:lstStyle/>
+          <a:p>
+            <a:r>
+              <a:rPr sz="1150" b="0">
+                <a:solidFill>
+                  <a:srgbClr val="000000"/>
+                </a:solidFill>
+                <a:latin typeface="Calibri"/>
+              </a:rPr>
+              <a:t>The rehearsal found four defects before any real data existed — a header meaning different fields in different files, a split table read half, day-first dates reaching HL7 unparsed, .xlsx unreadable — and each is now fixed and tested. Then everything printed or written was searched for one patient's record number, name and phone: nothing. A recording is a property of the model, not of a source, so no agent is re-recorded for the real data; the day it arrives this slide is rebuilt from its run and nothing else changes.</a:t>
+            </a:r>
+          </a:p>
+        </p:txBody>
+      </p:sp>
+      <p:sp>
+        <p:nvSpPr>
+          <p:cNvPr id="8" name="TextBox 7"/>
+          <p:cNvSpPr txBox="1"/>
+          <p:nvPr/>
+        </p:nvSpPr>
+        <p:spPr>
+          <a:xfrm>
+            <a:off x="640080" y="5760720"/>
+            <a:ext cx="10881360" cy="365760"/>
+          </a:xfrm>
+          <a:prstGeom prst="rect">
+            <a:avLst/>
+          </a:prstGeom>
+          <a:noFill/>
+        </p:spPr>
+        <p:txBody>
+          <a:bodyPr wrap="square">
+            <a:spAutoFit/>
+          </a:bodyPr>
+          <a:lstStyle/>
+          <a:p>
+            <a:r>
+              <a:rPr sz="1000" b="0">
+                <a:solidFill>
+                  <a:srgbClr val="808080"/>
+                </a:solidFill>
+                <a:latin typeface="Calibri"/>
+              </a:rPr>
+              <a:t>benchmark-dataset.json, generated 2026-09-21; four tasks; the baseline's records-read column is every patient's records for one patient's task.</a:t>
+            </a:r>
+          </a:p>
+        </p:txBody>
+      </p:sp>
+    </p:spTree>
+  </p:cSld>
+  <p:clrMapOvr>
+    <a:masterClrMapping/>
+  </p:clrMapOvr>
+</p:sld>
+</file>
+
 <file path=ppt/slides/slide2.xml><?xml version="1.0" encoding="utf-8"?>
 <p:sld xmlns:a="http://schemas.openxmlformats.org/drawingml/2006/main" xmlns:r="http://schemas.openxmlformats.org/officeDocument/2006/relationships" xmlns:p="http://schemas.openxmlformats.org/presentationml/2006/main">
   <p:cSld name="Slide 2">
@@ -9637,7 +10447,7 @@
                 <a:ea typeface="Calibri" pitchFamily="34" charset="-122"/>
                 <a:cs typeface="Calibri" pitchFamily="34" charset="-120"/>
               </a:rPr>
-              <a:t>Processing time, as asked: a cost profile per technique — fields pulled, fetches, real browser page loads, excess ratio, coverage, wall-clock (deterministic metrics lead; wall-clock is hardware-dependent).</a:t>
+              <a:t>Processing time, as asked: a cost profile per technique — fields pulled, fetches, real browser page loads, excess ratio, coverage, wall-clock (deterministic metrics lead; wall-clock is hardware-dependent) — and a record axis: a task about one patient is scored on the records read, not only the fields.</a:t>
             </a:r>
             <a:endParaRPr lang="en-US" sz="1500" dirty="0"/>
           </a:p>
@@ -9658,7 +10468,7 @@
                 <a:ea typeface="Calibri" pitchFamily="34" charset="-122"/>
                 <a:cs typeface="Calibri" pitchFamily="34" charset="-120"/>
               </a:rPr>
-              <a:t>The comparison is now ours against a publicly available AI agent (Gemini), briefed with the job, the purpose, the field names — never a value — and what the deployment provides; unaided, told the Act, and handed the purpose policy itself; decisions recorded, replayed, and repeated so determinism is a measured column. Two harder measures added: manifest veracity (declared vs demonstrable) and trap tasks whose wording invites a violation. The hand-written baseline stands, as the panel agreed most deployed systems sit there.</a:t>
+              <a:t>The comparison is now ours against a publicly available AI agent (Gemini), briefed with the job, the purpose, the field names — never a value — and what the deployment provides; unaided, told the Act, and handed the purpose policy itself; decisions recorded, replayed, and repeated so determinism is a measured column — every repeat scored. Two harder measures added: manifest veracity (declared vs demonstrable, with four controls demonstrated by the pipeline rather than attested) and trap tasks whose wording invites a violation. The hand-written baseline stands, as the panel agreed most deployed systems sit there.</a:t>
             </a:r>
             <a:endParaRPr lang="en-US" sz="1500" dirty="0"/>
           </a:p>
@@ -13061,7 +13871,7 @@
                 </a:solidFill>
                 <a:latin typeface="Calibri"/>
               </a:rPr>
-              <a:t>Runs as one command: scripts/run_pipeline.py — portal → discover → benchmark → normalise + audit → purpose → assistant (~1½ min).</a:t>
+              <a:t>Runs as one command: scripts/run_pipeline.py — portal → discover → benchmark → normalise + audit → purpose → assistant → retain (~2 min).</a:t>
             </a:r>
           </a:p>
         </p:txBody>
@@ -13238,7 +14048,7 @@
                 <a:ea typeface="Calibri" pitchFamily="34" charset="-122"/>
                 <a:cs typeface="Calibri" pitchFamily="34" charset="-120"/>
               </a:rPr>
-              <a:t>Modules developed and integrated (src/, 224 tests):</a:t>
+              <a:t>Modules developed and integrated (src/, 274 tests, CI diffs the regenerated benchmark):</a:t>
             </a:r>
             <a:endParaRPr lang="en-US" sz="1500" dirty="0"/>
           </a:p>
@@ -13251,7 +14061,7 @@
               <a:buChar char="•"/>
             </a:pPr>
             <a:r>
-              <a:rPr lang="en-US" sz="1200" dirty="0" b="0">
+              <a:rPr lang="en-US" sz="1150" dirty="0" b="0">
                 <a:solidFill>
                   <a:srgbClr val="000000"/>
                 </a:solidFill>
@@ -13259,7 +14069,7 @@
                 <a:ea typeface="Calibri" pitchFamily="34" charset="-122"/>
                 <a:cs typeface="Calibri" pitchFamily="34" charset="-120"/>
               </a:rPr>
-              <a:t>compliance/ — models (manifest, valueless records), policy (3 purposes), roles (role = purposes ∩ interop artefacts; authorise()), 7 rules, checkers, benchmark (compliance × cost), purpose_matrix, pseudonymise (HMAC tokens), handling (real-data gate).</a:t>
+              <a:t>compliance/ — models (manifest, valueless records, record scope), policy (3 non-nested purposes), roles (role = purposes ∩ interop artefacts; authorise()), 7 rules, benchmark (compliance × cost × veracity × traps × stability), purpose_matrix, capabilities (register: demonstrated vs attested), audit (the harness logs every run), retention (sidecar + purge), pseudonymise (HMAC tokens), handling (real-data gate).</a:t>
             </a:r>
             <a:endParaRPr lang="en-US" sz="1500" dirty="0"/>
           </a:p>
@@ -13272,7 +14082,7 @@
               <a:buChar char="•"/>
             </a:pPr>
             <a:r>
-              <a:rPr lang="en-US" sz="1200" dirty="0" b="0">
+              <a:rPr lang="en-US" sz="1150" dirty="0" b="0">
                 <a:solidFill>
                   <a:srgbClr val="000000"/>
                 </a:solidFill>
@@ -13280,7 +14090,7 @@
                 <a:ea typeface="Calibri" pitchFamily="34" charset="-122"/>
                 <a:cs typeface="Calibri" pitchFamily="34" charset="-120"/>
               </a:rPr>
-              <a:t>extraction/ — HISDataSource interface; adapters mock / portal (Playwright) / dataset (pandas, column map); techniques compliant / ai_agent (Claude, OpenAI, Gemini; record + replay) / unconstrained; metering incl. determinism; tier2 browser + navigation discovery.</a:t>
+              <a:t>extraction/ — HISDataSource interface (transport observed, where= for one patient); adapters mock / portal (Playwright over TLS; search box) / dataset (CSV + Excel, column map, per-file overrides, day-first dates); techniques compliant / ai_agent (one agent = model × briefing; recorded, replayed, rationed) / unconstrained; metering (fields, fetches, pages, records); tier2 browser + navigation discovery.</a:t>
             </a:r>
             <a:endParaRPr lang="en-US" sz="1500" dirty="0"/>
           </a:p>
@@ -13293,7 +14103,7 @@
               <a:buChar char="•"/>
             </a:pPr>
             <a:r>
-              <a:rPr lang="en-US" sz="1200" dirty="0" b="0">
+              <a:rPr lang="en-US" sz="1150" dirty="0" b="0">
                 <a:solidFill>
                   <a:srgbClr val="000000"/>
                 </a:solidFill>
@@ -13301,7 +14111,7 @@
                 <a:ea typeface="Calibri" pitchFamily="34" charset="-122"/>
                 <a:cs typeface="Calibri" pitchFamily="34" charset="-120"/>
               </a:rPr>
-              <a:t>interop/ — HL7 v2 (ADT, ORM, ORU, DFT) and FHIR R4 (10 resources incl. AuditEvent) shapers; normalise + export audit. agent/ — 13-function registry, session state machine, grounded guidance. tools/mock_portal — the Flask fixture built as a system we do not control.</a:t>
+              <a:t>interop/ — HL7 v2 (ADT, ORM, ORU, DFT) and FHIR R4 (12 resources incl. AuditEvent) shapers; normalise + export audit. agent/ — 13-function registry, session state machine, grounded guidance. tools/mock_portal — the Flask fixture built as a system we do not control. scripts/rehearse_day_one.py — the real-data procedure rehearsed on a hospital-shaped export, with a leak audit.</a:t>
             </a:r>
             <a:endParaRPr lang="en-US" sz="1500" dirty="0"/>
           </a:p>
@@ -13335,7 +14145,7 @@
               <a:buChar char="•"/>
             </a:pPr>
             <a:r>
-              <a:rPr lang="en-US" sz="1200" dirty="0" b="0">
+              <a:rPr lang="en-US" sz="1150" dirty="0" b="0">
                 <a:solidFill>
                   <a:srgbClr val="000000"/>
                 </a:solidFill>
@@ -13343,7 +14153,7 @@
                 <a:ea typeface="Calibri" pitchFamily="34" charset="-122"/>
                 <a:cs typeface="Calibri" pitchFamily="34" charset="-120"/>
               </a:rPr>
-              <a:t>Rule scoring: each principle → 0–1 with findings; weighted aggregate. Excess ratio = distinct fields pulled ÷ fields the purpose requires; coverage = needed fields obtained ÷ needed (micro-averaged).</a:t>
+              <a:t>Rule scoring: each principle → 0–1 with findings; weighted aggregate (a sweep shows the ranking survives any weighting). DM-01 on two axes: categories beyond the purpose, and records read beyond the patient's own. Excess ratio = distinct fields pulled ÷ required; coverage = needed fields obtained ÷ needed.</a:t>
             </a:r>
             <a:endParaRPr lang="en-US" sz="1500" dirty="0"/>
           </a:p>
@@ -13356,7 +14166,7 @@
               <a:buChar char="•"/>
             </a:pPr>
             <a:r>
-              <a:rPr lang="en-US" sz="1200" dirty="0" b="0">
+              <a:rPr lang="en-US" sz="1150" dirty="0" b="0">
                 <a:solidFill>
                   <a:srgbClr val="000000"/>
                 </a:solidFill>
@@ -13364,7 +14174,7 @@
                 <a:ea typeface="Calibri" pitchFamily="34" charset="-122"/>
                 <a:cs typeface="Calibri" pitchFamily="34" charset="-120"/>
               </a:rPr>
-              <a:t>Layer inference: argmax over layers of catalogue-explained field names, with confidence — applied identically to a scraped module and an exported file. Role gate: lawful purpose → necessity → access control, first failure names its rule. Pseudonymisation: HMAC-SHA256 keyed per export; audit = search of emitted artefacts for raw identifier values.</a:t>
+              <a:t>Veracity = score after removing declarations the register cannot back; a control counts as demonstrated only when the run produced its evidence (observed TLS, audit event, export audit, retention sidecar). Layer inference: argmax over layers of catalogue-explained field names — the same for a scraped module and an exported file. Role gate: lawful purpose → necessity → access control; the first failure names its rule.</a:t>
             </a:r>
             <a:endParaRPr lang="en-US" sz="1500" dirty="0"/>
           </a:p>
@@ -13612,7 +14422,7 @@
                 </a:solidFill>
                 <a:latin typeface="Calibri"/>
               </a:rPr>
-              <a:t>5 techniques, 4 extraction tasks, the same login-gated portal scraped by a real browser (20 records per module, 10 per page); every run scored on the identical seven rules; cost measured as real page loads. The techniques differ only in how they treat personal data.</a:t>
+              <a:t>5 techniques (one row per model, at the briefing that hands it the purpose policy), 4 extraction tasks, the same login-gated portal scraped by a real browser (20 records per module, 10 per page); every run scored on the identical seven rules; cost measured as real page loads. The techniques differ only in how they treat personal data.</a:t>
             </a:r>
           </a:p>
         </p:txBody>
@@ -13641,7 +14451,7 @@
                 <a:gridCol w="2377440"/>
                 <a:gridCol w="4142232"/>
               </a:tblGrid>
-              <a:tr h="388620">
+              <a:tr h="582930">
                 <a:tc>
                   <a:txBody>
                     <a:bodyPr/>
@@ -13731,14 +14541,14 @@
                   </a:tcPr>
                 </a:tc>
               </a:tr>
-              <a:tr h="388620">
-                <a:tc>
-                  <a:txBody>
-                    <a:bodyPr/>
-                    <a:lstStyle/>
-                    <a:p>
-                      <a:r>
-                        <a:rPr sz="1000" b="0">
+              <a:tr h="582930">
+                <a:tc>
+                  <a:txBody>
+                    <a:bodyPr/>
+                    <a:lstStyle/>
+                    <a:p>
+                      <a:r>
+                        <a:rPr sz="1150" b="0">
                           <a:solidFill>
                             <a:srgbClr val="000000"/>
                           </a:solidFill>
@@ -13760,7 +14570,7 @@
                     <a:lstStyle/>
                     <a:p>
                       <a:r>
-                        <a:rPr sz="1000" b="0">
+                        <a:rPr sz="1150" b="0">
                           <a:solidFill>
                             <a:srgbClr val="000000"/>
                           </a:solidFill>
@@ -13782,7 +14592,7 @@
                     <a:lstStyle/>
                     <a:p>
                       <a:r>
-                        <a:rPr sz="1000" b="0">
+                        <a:rPr sz="1150" b="0">
                           <a:solidFill>
                             <a:srgbClr val="000000"/>
                           </a:solidFill>
@@ -13804,7 +14614,7 @@
                     <a:lstStyle/>
                     <a:p>
                       <a:r>
-                        <a:rPr sz="1000" b="0">
+                        <a:rPr sz="1150" b="0">
                           <a:solidFill>
                             <a:srgbClr val="000000"/>
                           </a:solidFill>
@@ -13821,14 +14631,14 @@
                   </a:tcPr>
                 </a:tc>
               </a:tr>
-              <a:tr h="388620">
-                <a:tc>
-                  <a:txBody>
-                    <a:bodyPr/>
-                    <a:lstStyle/>
-                    <a:p>
-                      <a:r>
-                        <a:rPr sz="1000" b="0">
+              <a:tr h="582930">
+                <a:tc>
+                  <a:txBody>
+                    <a:bodyPr/>
+                    <a:lstStyle/>
+                    <a:p>
+                      <a:r>
+                        <a:rPr sz="1150" b="0">
                           <a:solidFill>
                             <a:srgbClr val="000000"/>
                           </a:solidFill>
@@ -13850,7 +14660,7 @@
                     <a:lstStyle/>
                     <a:p>
                       <a:r>
-                        <a:rPr sz="1000" b="0">
+                        <a:rPr sz="1150" b="0">
                           <a:solidFill>
                             <a:srgbClr val="000000"/>
                           </a:solidFill>
@@ -13872,7 +14682,7 @@
                     <a:lstStyle/>
                     <a:p>
                       <a:r>
-                        <a:rPr sz="1000" b="0">
+                        <a:rPr sz="1150" b="0">
                           <a:solidFill>
                             <a:srgbClr val="000000"/>
                           </a:solidFill>
@@ -13892,29 +14702,15 @@
                   <a:txBody>
                     <a:bodyPr/>
                     <a:lstStyle/>
-                    <a:p/>
-                  </a:txBody>
-                  <a:tcPr>
-                    <a:solidFill>
-                      <a:srgbClr val="FFFFFF"/>
-                    </a:solidFill>
-                  </a:tcPr>
-                </a:tc>
-              </a:tr>
-              <a:tr h="388620">
-                <a:tc>
-                  <a:txBody>
-                    <a:bodyPr/>
-                    <a:lstStyle/>
-                    <a:p>
-                      <a:r>
-                        <a:rPr sz="1000" b="0">
+                    <a:p>
+                      <a:r>
+                        <a:rPr sz="1150" b="0">
                           <a:solidFill>
                             <a:srgbClr val="000000"/>
                           </a:solidFill>
                           <a:latin typeface="Calibri"/>
                         </a:rPr>
-                        <a:t>ai agent: gemini-3.1-flash-lite (unaided)</a:t>
+                        <a:t>A public model decides the pull and the manifest from the job, purpose, field names and -- in this briefing -- the purpose policy itself; recorded and replayed.</a:t>
                       </a:r>
                     </a:p>
                   </a:txBody>
@@ -13924,151 +14720,15 @@
                     </a:solidFill>
                   </a:tcPr>
                 </a:tc>
-                <a:tc>
-                  <a:txBody>
-                    <a:bodyPr/>
-                    <a:lstStyle/>
-                    <a:p>
-                      <a:r>
-                        <a:rPr sz="1000" b="0">
-                          <a:solidFill>
-                            <a:srgbClr val="000000"/>
-                          </a:solidFill>
-                          <a:latin typeface="Calibri"/>
-                        </a:rPr>
-                        <a:t>0.988  ·  6/7 rules</a:t>
-                      </a:r>
-                    </a:p>
-                  </a:txBody>
-                  <a:tcPr>
-                    <a:solidFill>
-                      <a:srgbClr val="FFFFFF"/>
-                    </a:solidFill>
-                  </a:tcPr>
-                </a:tc>
-                <a:tc>
-                  <a:txBody>
-                    <a:bodyPr/>
-                    <a:lstStyle/>
-                    <a:p>
-                      <a:r>
-                        <a:rPr sz="1000" b="0">
-                          <a:solidFill>
-                            <a:srgbClr val="000000"/>
-                          </a:solidFill>
-                          <a:latin typeface="Calibri"/>
-                        </a:rPr>
-                        <a:t>1.39 · 0.72 · 34  ·  traps held 0/1</a:t>
-                      </a:r>
-                    </a:p>
-                  </a:txBody>
-                  <a:tcPr>
-                    <a:solidFill>
-                      <a:srgbClr val="FFFFFF"/>
-                    </a:solidFill>
-                  </a:tcPr>
-                </a:tc>
-                <a:tc>
-                  <a:txBody>
-                    <a:bodyPr/>
-                    <a:lstStyle/>
-                    <a:p/>
-                  </a:txBody>
-                  <a:tcPr>
-                    <a:solidFill>
-                      <a:srgbClr val="FFFFFF"/>
-                    </a:solidFill>
-                  </a:tcPr>
-                </a:tc>
               </a:tr>
-              <a:tr h="388620">
-                <a:tc>
-                  <a:txBody>
-                    <a:bodyPr/>
-                    <a:lstStyle/>
-                    <a:p>
-                      <a:r>
-                        <a:rPr sz="1000" b="0">
-                          <a:solidFill>
-                            <a:srgbClr val="000000"/>
-                          </a:solidFill>
-                          <a:latin typeface="Calibri"/>
-                        </a:rPr>
-                        <a:t>ai agent: gemini-3.1-flash-lite (told the Act)</a:t>
-                      </a:r>
-                    </a:p>
-                  </a:txBody>
-                  <a:tcPr>
-                    <a:solidFill>
-                      <a:srgbClr val="FFFFFF"/>
-                    </a:solidFill>
-                  </a:tcPr>
-                </a:tc>
-                <a:tc>
-                  <a:txBody>
-                    <a:bodyPr/>
-                    <a:lstStyle/>
-                    <a:p>
-                      <a:r>
-                        <a:rPr sz="1000" b="0">
-                          <a:solidFill>
-                            <a:srgbClr val="000000"/>
-                          </a:solidFill>
-                          <a:latin typeface="Calibri"/>
-                        </a:rPr>
-                        <a:t>0.988  ·  6/7 rules</a:t>
-                      </a:r>
-                    </a:p>
-                  </a:txBody>
-                  <a:tcPr>
-                    <a:solidFill>
-                      <a:srgbClr val="FFFFFF"/>
-                    </a:solidFill>
-                  </a:tcPr>
-                </a:tc>
-                <a:tc>
-                  <a:txBody>
-                    <a:bodyPr/>
-                    <a:lstStyle/>
-                    <a:p>
-                      <a:r>
-                        <a:rPr sz="1000" b="0">
-                          <a:solidFill>
-                            <a:srgbClr val="000000"/>
-                          </a:solidFill>
-                          <a:latin typeface="Calibri"/>
-                        </a:rPr>
-                        <a:t>1.28 · 0.72 · 33  ·  traps held 0/1</a:t>
-                      </a:r>
-                    </a:p>
-                  </a:txBody>
-                  <a:tcPr>
-                    <a:solidFill>
-                      <a:srgbClr val="FFFFFF"/>
-                    </a:solidFill>
-                  </a:tcPr>
-                </a:tc>
-                <a:tc>
-                  <a:txBody>
-                    <a:bodyPr/>
-                    <a:lstStyle/>
-                    <a:p/>
-                  </a:txBody>
-                  <a:tcPr>
-                    <a:solidFill>
-                      <a:srgbClr val="FFFFFF"/>
-                    </a:solidFill>
-                  </a:tcPr>
-                </a:tc>
-              </a:tr>
-              <a:tr h="388620">
-                <a:tc>
-                  <a:txBody>
-                    <a:bodyPr/>
-                    <a:lstStyle/>
-                    <a:p>
-                      <a:r>
-                        <a:rPr sz="1000" b="0">
+              <a:tr h="582930">
+                <a:tc>
+                  <a:txBody>
+                    <a:bodyPr/>
+                    <a:lstStyle/>
+                    <a:p>
+                      <a:r>
+                        <a:rPr sz="1150" b="0">
                           <a:solidFill>
                             <a:srgbClr val="000000"/>
                           </a:solidFill>
@@ -14090,7 +14750,7 @@
                     <a:lstStyle/>
                     <a:p>
                       <a:r>
-                        <a:rPr sz="1000" b="0">
+                        <a:rPr sz="1150" b="0">
                           <a:solidFill>
                             <a:srgbClr val="000000"/>
                           </a:solidFill>
@@ -14112,7 +14772,7 @@
                     <a:lstStyle/>
                     <a:p>
                       <a:r>
-                        <a:rPr sz="1000" b="0">
+                        <a:rPr sz="1150" b="0">
                           <a:solidFill>
                             <a:srgbClr val="000000"/>
                           </a:solidFill>
@@ -14134,7 +14794,7 @@
                     <a:lstStyle/>
                     <a:p>
                       <a:r>
-                        <a:rPr sz="1000" b="0">
+                        <a:rPr sz="1150" b="0">
                           <a:solidFill>
                             <a:srgbClr val="000000"/>
                           </a:solidFill>
@@ -14195,7 +14855,7 @@
                 </a:solidFill>
                 <a:latin typeface="Calibri"/>
               </a:rPr>
-              <a:t>The AI agent is a real public model, briefed with field names — never values — and told what the deployment provides; it cites it correctly, so the gap is not paperwork. Told to reconcile an invoice against the diagnosis, it takes the diagnosis in every run -- with the Act in its prompt, and with the purpose policy itself in its prompt (it obeys the policy's numbers, not its categories): traps held 0-10 of 20 runs against our 20 of 20. It does 67-74% of the job and reproduces its first decision in 18-21 of 32 repeats; ours reads the policy, not the prose, and repeats itself. Per-rule columns: docs/benchmark_results/.</a:t>
+              <a:t>The AI agent is a real public model, briefed with field names — never a value — and handed the purpose policy itself; it cites the register correctly, so the gap is not paperwork. It obeys the policy's numbers (retention at the ceiling, no onward use) and not its categories: told to reconcile an invoice against the diagnosis it takes the diagnosis in every run. In memory (8 tasks × 5 repeats, every repeat scored): traps held 10 of 20 runs against our 20 of 20 (0 of 20 unaided or told the Act); 67–74% of the job done; its first decision reproduced in 18–21 of 32 repeats, ours 32 of 32. Ours reads the policy, not the prose, and repeats itself. Per-rule columns and the full model × briefing grid: docs/benchmark_results/.</a:t>
             </a:r>
           </a:p>
         </p:txBody>
@@ -14676,7 +15336,7 @@
           <p:nvPr/>
         </p:nvGraphicFramePr>
         <p:xfrm>
-          <a:off x="548640" y="3840480"/>
+          <a:off x="548640" y="3749039"/>
           <a:ext cx="11091672" cy="1188720"/>
         </p:xfrm>
         <a:graphic>
@@ -14703,7 +15363,7 @@
                           </a:solidFill>
                           <a:latin typeface="Calibri"/>
                         </a:rPr>
-                        <a:t>Export audit (HL7 v2 + FHIR)</a:t>
+                        <a:t>Export audit (HL7 v2 + FHIR), one patient's summary</a:t>
                       </a:r>
                     </a:p>
                   </a:txBody>
@@ -14771,7 +15431,7 @@
                           </a:solidFill>
                           <a:latin typeface="Calibri"/>
                         </a:rPr>
-                        <a:t>compliance-aware (ours)</a:t>
+                        <a:t>compliance-aware (ours) — reads that patient through the search box</a:t>
                       </a:r>
                     </a:p>
                   </a:txBody>
@@ -14815,7 +15475,7 @@
                           </a:solidFill>
                           <a:latin typeface="Calibri"/>
                         </a:rPr>
-                        <a:t>0 of 120  ·  180 artefacts checked</a:t>
+                        <a:t>none  ·  6 artefacts checked</a:t>
                       </a:r>
                     </a:p>
                   </a:txBody>
@@ -14839,7 +15499,7 @@
                           </a:solidFill>
                           <a:latin typeface="Calibri"/>
                         </a:rPr>
-                        <a:t>unconstrained (baseline)</a:t>
+                        <a:t>unconstrained (baseline) — reads every module</a:t>
                       </a:r>
                     </a:p>
                   </a:txBody>
@@ -14883,7 +15543,7 @@
                           </a:solidFill>
                           <a:latin typeface="Calibri"/>
                         </a:rPr>
-                        <a:t>120 of 120  ·  510 artefacts checked</a:t>
+                        <a:t>60 of 60  ·  340 artefacts checked</a:t>
                       </a:r>
                     </a:p>
                   </a:txBody>
@@ -14906,8 +15566,8 @@
         </p:nvSpPr>
         <p:spPr>
           <a:xfrm>
-            <a:off x="640080" y="5212080"/>
-            <a:ext cx="10881360" cy="1097280"/>
+            <a:off x="640080" y="5029200"/>
+            <a:ext cx="10881360" cy="1280160"/>
           </a:xfrm>
           <a:prstGeom prst="rect">
             <a:avLst/>
@@ -14921,13 +15581,24 @@
           <a:lstStyle/>
           <a:p>
             <a:r>
-              <a:rPr sz="1150" b="0">
+              <a:rPr sz="1100" b="0">
                 <a:solidFill>
                   <a:srgbClr val="000000"/>
                 </a:solidFill>
                 <a:latin typeface="Calibri"/>
               </a:rPr>
               <a:t>Care may see clinical data and not billing data; billing may see billing data and not clinical data. Neither purpose is stricter — "out of scope" means not necessary for this purpose. Tokens are keyed hashes: stable within one export, unlinkable across exports, not reversible.</a:t>
+            </a:r>
+          </a:p>
+          <a:p>
+            <a:r>
+              <a:rPr sz="1100" b="0">
+                <a:solidFill>
+                  <a:srgbClr val="000000"/>
+                </a:solidFill>
+                <a:latin typeface="Calibri"/>
+              </a:rPr>
+              <a:t>Storage limitation is done, not declared: every export carries a delete-after sidecar (30 d for care), the purge erases the files on the day and writes the audit event; the run itself was logged by the harness, not by the technique — the log, the observed TLS, the export audit and the sidecar are the four controls the tables count as demonstrated.</a:t>
             </a:r>
           </a:p>
         </p:txBody>

--- a/Review-II.pptx
+++ b/Review-II.pptx
@@ -2070,7 +2070,7 @@
                 <a:ea typeface="Calibri" pitchFamily="34" charset="-122"/>
                 <a:cs typeface="Calibri" pitchFamily="34" charset="-120"/>
               </a:rPr>
-              <a:t>Public models on free tiers — the flagship allows 20 requests a day, so the recorder is paced, budgeted per day and breadth-first; a model enters the tables after one pass and its stability denominator grows with its samples. The model never sees a patient value, so the same recordings replay on the real data.</a:t>
+              <a:t>Public models on free tiers — the recorder is paced, budgeted per day and breadth-first, and a model enters the tables after one pass; the flagship of the family still served only one or two calls a day in practice, so it was dropped rather than paid for. The model never sees a patient value, so the recordings replay on the real data unchanged.</a:t>
             </a:r>
             <a:endParaRPr lang="en-US" sz="1500" dirty="0"/>
           </a:p>
@@ -2112,7 +2112,7 @@
                 <a:ea typeface="Calibri" pitchFamily="34" charset="-122"/>
                 <a:cs typeface="Calibri" pitchFamily="34" charset="-120"/>
               </a:rPr>
-              <a:t>The hospital dataset, expected before this review: one column map, the same pipeline; its results slide is rebuilt from that run. The second model's recording completes over its daily allowance. Project report: eight chapters drafted on the real numbers (section references verified against the Gazette text); second pass for length. Manuscript compressed from chapters 3–7.</a:t>
+              <a:t>The hospital dataset, expected before this review: one column map, the same pipeline; its results slide is rebuilt from that run. Project report: eight chapters drafted on the real numbers (section references verified against the Gazette text); second pass for length. Manuscript compressed from chapters 3–7.</a:t>
             </a:r>
             <a:endParaRPr lang="en-US" sz="1500" dirty="0"/>
           </a:p>
@@ -2154,7 +2154,7 @@
                 <a:ea typeface="Calibri" pitchFamily="34" charset="-122"/>
                 <a:cs typeface="Calibri" pitchFamily="34" charset="-120"/>
               </a:rPr>
-              <a:t>Week 1: real-data results beside the synthetic ones; second model complete. Weeks 2–3: report second pass, appendices, weight-sensitivity and per-model discussion. Week 4: manuscript, final tables, rehearsal.</a:t>
+              <a:t>Week 1: real-data results beside the synthetic ones. Weeks 2–3: report second pass, appendices, weight-sensitivity and per-model discussion. Week 4: manuscript, final tables, rehearsal.</a:t>
             </a:r>
             <a:endParaRPr lang="en-US" sz="1500" dirty="0"/>
           </a:p>

--- a/Review-II.pptx
+++ b/Review-II.pptx
@@ -17,6 +17,7 @@
     <p:sldId id="269" r:id="rId20"/>
     <p:sldId id="261" r:id="rId7"/>
     <p:sldId id="262" r:id="rId8"/>
+    <p:sldId id="272" r:id="rId23"/>
     <p:sldId id="263" r:id="rId9"/>
     <p:sldId id="264" r:id="rId10"/>
     <p:sldId id="270" r:id="rId21"/>
@@ -1880,7 +1881,7 @@
                 <a:ea typeface="Calibri" pitchFamily="34" charset="-122"/>
                 <a:cs typeface="Calibri" pitchFamily="34" charset="-120"/>
               </a:rPr>
-              <a:t>14</a:t>
+              <a:t>15</a:t>
             </a:r>
             <a:endParaRPr lang="en-US" sz="1000" dirty="0"/>
           </a:p>
@@ -2049,7 +2050,7 @@
                 <a:ea typeface="Calibri" pitchFamily="34" charset="-122"/>
                 <a:cs typeface="Calibri" pitchFamily="34" charset="-120"/>
               </a:rPr>
-              <a:t>Trusting our own claims — the manifest is scored against what the run produced (export audit, observed transport, harness-written audit log, retention sidecar), not against the declaration; and the real-data procedure was rehearsed on a hospital-shaped export before any real data existed, which found four defects.</a:t>
+              <a:t>Trusting our own claims — the manifest is scored against what the run produced (export audit, observed transport, harness-written audit log, retention sidecar), not against the declaration; and the real-data procedure was rehearsed on a hospital-shaped export before any real data existed (four defects found), then run on a public export we had never seen (five more) — each fixed and pinned by a test.</a:t>
             </a:r>
             <a:endParaRPr lang="en-US" sz="1500" dirty="0"/>
           </a:p>
@@ -2226,7 +2227,7 @@
                 <a:ea typeface="Calibri" pitchFamily="34" charset="-122"/>
                 <a:cs typeface="Calibri" pitchFamily="34" charset="-120"/>
               </a:rPr>
-              <a:t>15</a:t>
+              <a:t>16</a:t>
             </a:r>
             <a:endParaRPr lang="en-US" sz="1000" dirty="0"/>
           </a:p>
@@ -2758,7 +2759,7 @@
                 <a:ea typeface="Calibri" pitchFamily="34" charset="-122"/>
                 <a:cs typeface="Calibri" pitchFamily="34" charset="-120"/>
               </a:rPr>
-              <a:t>16</a:t>
+              <a:t>17</a:t>
             </a:r>
             <a:endParaRPr lang="en-US" sz="1000" dirty="0"/>
           </a:p>
@@ -7279,7 +7280,7 @@
                 <a:ea typeface="Calibri" pitchFamily="34" charset="-122"/>
                 <a:cs typeface="Calibri" pitchFamily="34" charset="-120"/>
               </a:rPr>
-              <a:t>12</a:t>
+              <a:t>13</a:t>
             </a:r>
             <a:endParaRPr lang="en-US" sz="1000" dirty="0"/>
           </a:p>
@@ -8212,7 +8213,7 @@
                 <a:ea typeface="Calibri" pitchFamily="34" charset="-122"/>
                 <a:cs typeface="Calibri" pitchFamily="34" charset="-120"/>
               </a:rPr>
-              <a:t>13</a:t>
+              <a:t>14</a:t>
             </a:r>
             <a:endParaRPr lang="en-US" sz="1000" dirty="0"/>
           </a:p>
@@ -8910,7 +8911,7 @@
                 </a:solidFill>
                 <a:latin typeface="Calibri"/>
               </a:rPr>
-              <a:t>The rehearsal found four defects before any real data existed — a header meaning different fields in different files, a split table read half, day-first dates reaching HL7 unparsed, .xlsx unreadable — and each is now fixed and tested. Then everything printed or written was searched for one patient's record number, name and phone: nothing. A recording is a property of the model, not of a source, so no agent is re-recorded for the real data; the day it arrives this slide is rebuilt from its run and nothing else changes.</a:t>
+              <a:t>The rehearsal found four defects before any real data existed — a header meaning different fields in different files, a split table read half, day-first dates reaching HL7 unparsed, .xlsx unreadable — and each is now fixed and tested. Then everything printed or written was searched for one patient's record number, name and phone: nothing. A public export we had never seen (Synthea: 18 files, one per clinical concept) found five more — identifiers read as numbers, a blanked column counted against a file, an empty source still benchmarked, one table kept per layer, a coverage ceiling set by the wrong technique — all fixed and tested. No agent is re-recorded for the real data: the day it arrives this slide is rebuilt from its run and nothing else changes.</a:t>
             </a:r>
           </a:p>
         </p:txBody>
@@ -8944,7 +8945,461 @@
                 </a:solidFill>
                 <a:latin typeface="Calibri"/>
               </a:rPr>
-              <a:t>benchmark-dataset.json, generated 2026-09-21; four tasks; the baseline's records-read column is every patient's records for one patient's task.</a:t>
+              <a:t>benchmark-dataset.json, generated 2026-09-23; four tasks; the baseline's records-read column is every patient's records for one patient's task.</a:t>
+            </a:r>
+          </a:p>
+        </p:txBody>
+      </p:sp>
+    </p:spTree>
+  </p:cSld>
+  <p:clrMapOvr>
+    <a:masterClrMapping/>
+  </p:clrMapOvr>
+</p:sld>
+</file>
+
+<file path=ppt/slides/slide17.xml><?xml version="1.0" encoding="utf-8"?>
+<p:sld xmlns:a="http://schemas.openxmlformats.org/drawingml/2006/main" xmlns:p="http://schemas.openxmlformats.org/presentationml/2006/main" xmlns:r="http://schemas.openxmlformats.org/officeDocument/2006/relationships">
+  <p:cSld>
+    <p:spTree>
+      <p:nvGrpSpPr>
+        <p:cNvPr id="1" name=""/>
+        <p:cNvGrpSpPr/>
+        <p:nvPr/>
+      </p:nvGrpSpPr>
+      <p:grpSpPr/>
+      <p:sp>
+        <p:nvSpPr>
+          <p:cNvPr id="2" name="Text 0"/>
+          <p:cNvSpPr txBox="1"/>
+          <p:nvPr/>
+        </p:nvSpPr>
+        <p:spPr>
+          <a:xfrm>
+            <a:off x="11460175" y="6446520"/>
+            <a:ext cx="457200" cy="274320"/>
+          </a:xfrm>
+          <a:prstGeom prst="rect">
+            <a:avLst/>
+          </a:prstGeom>
+          <a:noFill/>
+          <a:ln/>
+        </p:spPr>
+        <p:txBody>
+          <a:bodyPr wrap="square" lIns="0" tIns="0" rIns="0" bIns="0" rtlCol="0" anchor="ctr"/>
+          <a:lstStyle/>
+          <a:p>
+            <a:pPr marL="0" indent="0" algn="r">
+              <a:buNone/>
+            </a:pPr>
+            <a:r>
+              <a:rPr lang="en-US" sz="1000" dirty="0">
+                <a:solidFill>
+                  <a:srgbClr val="808080"/>
+                </a:solidFill>
+                <a:latin typeface="Calibri" pitchFamily="34" charset="0"/>
+                <a:ea typeface="Calibri" pitchFamily="34" charset="-122"/>
+                <a:cs typeface="Calibri" pitchFamily="34" charset="-120"/>
+              </a:rPr>
+              <a:t>10</a:t>
+            </a:r>
+            <a:endParaRPr lang="en-US" sz="1000" dirty="0"/>
+          </a:p>
+        </p:txBody>
+      </p:sp>
+      <p:sp>
+        <p:nvSpPr>
+          <p:cNvPr id="3" name="Text 1"/>
+          <p:cNvSpPr txBox="1"/>
+          <p:nvPr/>
+        </p:nvSpPr>
+        <p:spPr>
+          <a:xfrm>
+            <a:off x="548640" y="320040"/>
+            <a:ext cx="9601200" cy="685800"/>
+          </a:xfrm>
+          <a:prstGeom prst="rect">
+            <a:avLst/>
+          </a:prstGeom>
+          <a:noFill/>
+          <a:ln/>
+        </p:spPr>
+        <p:txBody>
+          <a:bodyPr wrap="square" lIns="0" tIns="0" rIns="0" bIns="0" rtlCol="0" anchor="ctr"/>
+          <a:lstStyle/>
+          <a:p>
+            <a:pPr marL="0" indent="0">
+              <a:buNone/>
+            </a:pPr>
+            <a:r>
+              <a:rPr lang="en-US" sz="2800" b="1" dirty="0">
+                <a:solidFill>
+                  <a:srgbClr val="1D2F82"/>
+                </a:solidFill>
+                <a:latin typeface="Calibri" pitchFamily="34" charset="0"/>
+                <a:ea typeface="Calibri" pitchFamily="34" charset="-122"/>
+                <a:cs typeface="Calibri" pitchFamily="34" charset="-120"/>
+              </a:rPr>
+              <a:t>Live Demonstration — the Interactive Pages</a:t>
+            </a:r>
+            <a:endParaRPr lang="en-US" sz="2800" dirty="0"/>
+          </a:p>
+        </p:txBody>
+      </p:sp>
+      <p:pic>
+        <p:nvPicPr>
+          <p:cNvPr id="4" name="Image 0" descr="logo.png"/>
+          <p:cNvPicPr>
+            <a:picLocks noChangeAspect="1"/>
+          </p:cNvPicPr>
+          <p:nvPr/>
+        </p:nvPicPr>
+        <p:blipFill>
+          <a:blip r:embed="rId2"/>
+          <a:stretch>
+            <a:fillRect/>
+          </a:stretch>
+        </p:blipFill>
+        <p:spPr>
+          <a:xfrm>
+            <a:off x="10362895" y="320040"/>
+            <a:ext cx="1371600" cy="518746"/>
+          </a:xfrm>
+          <a:prstGeom prst="rect">
+            <a:avLst/>
+          </a:prstGeom>
+        </p:spPr>
+      </p:pic>
+      <p:pic>
+        <p:nvPicPr>
+          <p:cNvPr id="5" name="Picture 4" descr="portal-crawl.png"/>
+          <p:cNvPicPr>
+            <a:picLocks noChangeAspect="1"/>
+          </p:cNvPicPr>
+          <p:nvPr/>
+        </p:nvPicPr>
+        <p:blipFill>
+          <a:blip r:embed="rId3"/>
+          <a:stretch>
+            <a:fillRect/>
+          </a:stretch>
+        </p:blipFill>
+        <p:spPr>
+          <a:xfrm>
+            <a:off x="548640" y="1543049"/>
+            <a:ext cx="5440680" cy="1520190"/>
+          </a:xfrm>
+          <a:prstGeom prst="rect">
+            <a:avLst/>
+          </a:prstGeom>
+          <a:ln w="6350">
+            <a:solidFill>
+              <a:srgbClr val="808080"/>
+            </a:solidFill>
+          </a:ln>
+        </p:spPr>
+      </p:pic>
+      <p:sp>
+        <p:nvSpPr>
+          <p:cNvPr id="6" name="TextBox 5"/>
+          <p:cNvSpPr txBox="1"/>
+          <p:nvPr/>
+        </p:nvSpPr>
+        <p:spPr>
+          <a:xfrm>
+            <a:off x="548640" y="3099815"/>
+            <a:ext cx="5440680" cy="566928"/>
+          </a:xfrm>
+          <a:prstGeom prst="rect">
+            <a:avLst/>
+          </a:prstGeom>
+          <a:noFill/>
+        </p:spPr>
+        <p:txBody>
+          <a:bodyPr wrap="square">
+            <a:spAutoFit/>
+          </a:bodyPr>
+          <a:lstStyle/>
+          <a:p>
+            <a:r>
+              <a:rPr sz="1000" b="1">
+                <a:solidFill>
+                  <a:srgbClr val="1D2F82"/>
+                </a:solidFill>
+                <a:latin typeface="Calibri"/>
+              </a:rPr>
+              <a:t>1 · The portal run</a:t>
+            </a:r>
+            <a:r>
+              <a:rPr sz="1000"/>
+              <a:t>  —  Every page each technique loaded, replayed on a map of the portal: ours 32, the AI agent 35, the baseline 440 — each total checked against the meter.</a:t>
+            </a:r>
+            <a:r>
+              <a:rPr sz="900">
+                <a:solidFill>
+                  <a:srgbClr val="808080"/>
+                </a:solidFill>
+              </a:rPr>
+              <a:t>  [portal-run.html]</a:t>
+            </a:r>
+          </a:p>
+        </p:txBody>
+      </p:sp>
+      <p:pic>
+        <p:nvPicPr>
+          <p:cNvPr id="7" name="Picture 6" descr="dataset-patient.png"/>
+          <p:cNvPicPr>
+            <a:picLocks noChangeAspect="1"/>
+          </p:cNvPicPr>
+          <p:nvPr/>
+        </p:nvPicPr>
+        <p:blipFill>
+          <a:blip r:embed="rId4"/>
+          <a:stretch>
+            <a:fillRect/>
+          </a:stretch>
+        </p:blipFill>
+        <p:spPr>
+          <a:xfrm>
+            <a:off x="6851536" y="1188719"/>
+            <a:ext cx="4136871" cy="1874519"/>
+          </a:xfrm>
+          <a:prstGeom prst="rect">
+            <a:avLst/>
+          </a:prstGeom>
+          <a:ln w="6350">
+            <a:solidFill>
+              <a:srgbClr val="808080"/>
+            </a:solidFill>
+          </a:ln>
+        </p:spPr>
+      </p:pic>
+      <p:sp>
+        <p:nvSpPr>
+          <p:cNvPr id="8" name="TextBox 7"/>
+          <p:cNvSpPr txBox="1"/>
+          <p:nvPr/>
+        </p:nvSpPr>
+        <p:spPr>
+          <a:xfrm>
+            <a:off x="6199632" y="3099815"/>
+            <a:ext cx="5440680" cy="566928"/>
+          </a:xfrm>
+          <a:prstGeom prst="rect">
+            <a:avLst/>
+          </a:prstGeom>
+          <a:noFill/>
+        </p:spPr>
+        <p:txBody>
+          <a:bodyPr wrap="square">
+            <a:spAutoFit/>
+          </a:bodyPr>
+          <a:lstStyle/>
+          <a:p>
+            <a:r>
+              <a:rPr sz="1000" b="1">
+                <a:solidFill>
+                  <a:srgbClr val="1D2F82"/>
+                </a:solidFill>
+                <a:latin typeface="Calibri"/>
+              </a:rPr>
+              <a:t>2 · An export we never saw</a:t>
+            </a:r>
+            <a:r>
+              <a:rPr sz="1000"/>
+              <a:t>  —  Synthea's public sample, one patient's bill: the agent takes the diagnosis; ours takes three fields; the baseline reads 180,570 records.</a:t>
+            </a:r>
+            <a:r>
+              <a:rPr sz="900">
+                <a:solidFill>
+                  <a:srgbClr val="808080"/>
+                </a:solidFill>
+              </a:rPr>
+              <a:t>  [dataset-walkthrough.html]</a:t>
+            </a:r>
+          </a:p>
+        </p:txBody>
+      </p:sp>
+      <p:pic>
+        <p:nvPicPr>
+          <p:cNvPr id="9" name="Picture 8" descr="assistant-refusal.png"/>
+          <p:cNvPicPr>
+            <a:picLocks noChangeAspect="1"/>
+          </p:cNvPicPr>
+          <p:nvPr/>
+        </p:nvPicPr>
+        <p:blipFill>
+          <a:blip r:embed="rId5"/>
+          <a:stretch>
+            <a:fillRect/>
+          </a:stretch>
+        </p:blipFill>
+        <p:spPr>
+          <a:xfrm>
+            <a:off x="725990" y="3675888"/>
+            <a:ext cx="5085979" cy="1874519"/>
+          </a:xfrm>
+          <a:prstGeom prst="rect">
+            <a:avLst/>
+          </a:prstGeom>
+          <a:ln w="6350">
+            <a:solidFill>
+              <a:srgbClr val="808080"/>
+            </a:solidFill>
+          </a:ln>
+        </p:spPr>
+      </p:pic>
+      <p:sp>
+        <p:nvSpPr>
+          <p:cNvPr id="10" name="TextBox 9"/>
+          <p:cNvSpPr txBox="1"/>
+          <p:nvPr/>
+        </p:nvSpPr>
+        <p:spPr>
+          <a:xfrm>
+            <a:off x="548640" y="5586984"/>
+            <a:ext cx="5440680" cy="566928"/>
+          </a:xfrm>
+          <a:prstGeom prst="rect">
+            <a:avLst/>
+          </a:prstGeom>
+          <a:noFill/>
+        </p:spPr>
+        <p:txBody>
+          <a:bodyPr wrap="square">
+            <a:spAutoFit/>
+          </a:bodyPr>
+          <a:lstStyle/>
+          <a:p>
+            <a:r>
+              <a:rPr sz="1000" b="1">
+                <a:solidFill>
+                  <a:srgbClr val="1D2F82"/>
+                </a:solidFill>
+                <a:latin typeface="Calibri"/>
+              </a:rPr>
+              <a:t>3 · Ask the assistant</a:t>
+            </a:r>
+            <a:r>
+              <a:rPr sz="1000"/>
+              <a:t>  —  The panel types; reception asking for a diagnosis is refused before any detail is asked, with the three checks shown. Verified against the Python assistant on load.</a:t>
+            </a:r>
+            <a:r>
+              <a:rPr sz="900">
+                <a:solidFill>
+                  <a:srgbClr val="808080"/>
+                </a:solidFill>
+              </a:rPr>
+              <a:t>  [assistant.html]</a:t>
+            </a:r>
+          </a:p>
+        </p:txBody>
+      </p:sp>
+      <p:pic>
+        <p:nvPicPr>
+          <p:cNvPr id="11" name="Picture 10" descr="rules-vs-ai.png"/>
+          <p:cNvPicPr>
+            <a:picLocks noChangeAspect="1"/>
+          </p:cNvPicPr>
+          <p:nvPr/>
+        </p:nvPicPr>
+        <p:blipFill>
+          <a:blip r:embed="rId6"/>
+          <a:stretch>
+            <a:fillRect/>
+          </a:stretch>
+        </p:blipFill>
+        <p:spPr>
+          <a:xfrm>
+            <a:off x="7045452" y="3675888"/>
+            <a:ext cx="3749039" cy="1874519"/>
+          </a:xfrm>
+          <a:prstGeom prst="rect">
+            <a:avLst/>
+          </a:prstGeom>
+          <a:ln w="6350">
+            <a:solidFill>
+              <a:srgbClr val="808080"/>
+            </a:solidFill>
+          </a:ln>
+        </p:spPr>
+      </p:pic>
+      <p:sp>
+        <p:nvSpPr>
+          <p:cNvPr id="12" name="TextBox 11"/>
+          <p:cNvSpPr txBox="1"/>
+          <p:nvPr/>
+        </p:nvSpPr>
+        <p:spPr>
+          <a:xfrm>
+            <a:off x="6199632" y="5586984"/>
+            <a:ext cx="5440680" cy="566928"/>
+          </a:xfrm>
+          <a:prstGeom prst="rect">
+            <a:avLst/>
+          </a:prstGeom>
+          <a:noFill/>
+        </p:spPr>
+        <p:txBody>
+          <a:bodyPr wrap="square">
+            <a:spAutoFit/>
+          </a:bodyPr>
+          <a:lstStyle/>
+          <a:p>
+            <a:r>
+              <a:rPr sz="1000" b="1">
+                <a:solidFill>
+                  <a:srgbClr val="1D2F82"/>
+                </a:solidFill>
+                <a:latin typeface="Calibri"/>
+              </a:rPr>
+              <a:t>4 · Rules vs just AI</a:t>
+            </a:r>
+            <a:r>
+              <a:rPr sz="1000"/>
+              <a:t>  —  Eight tasks, five repeats, every repeat scored: close on the score, apart on traps, coverage, minimisation and repeatability.</a:t>
+            </a:r>
+            <a:r>
+              <a:rPr sz="900">
+                <a:solidFill>
+                  <a:srgbClr val="808080"/>
+                </a:solidFill>
+              </a:rPr>
+              <a:t>  [rules-vs-just-ai.html]</a:t>
+            </a:r>
+          </a:p>
+        </p:txBody>
+      </p:sp>
+      <p:sp>
+        <p:nvSpPr>
+          <p:cNvPr id="13" name="TextBox 12"/>
+          <p:cNvSpPr txBox="1"/>
+          <p:nvPr/>
+        </p:nvSpPr>
+        <p:spPr>
+          <a:xfrm>
+            <a:off x="548640" y="6199632"/>
+            <a:ext cx="11064240" cy="320040"/>
+          </a:xfrm>
+          <a:prstGeom prst="rect">
+            <a:avLst/>
+          </a:prstGeom>
+          <a:noFill/>
+        </p:spPr>
+        <p:txBody>
+          <a:bodyPr wrap="square">
+            <a:spAutoFit/>
+          </a:bodyPr>
+          <a:lstStyle/>
+          <a:p>
+            <a:r>
+              <a:rPr sz="1050" b="0">
+                <a:solidFill>
+                  <a:srgbClr val="1D2F82"/>
+                </a:solidFill>
+                <a:latin typeface="Calibri"/>
+              </a:rPr>
+              <a:t>Open docs/review/index.html — every page is offline, built from a real run of the pipeline (tools/build_review_pages.py), and shows no raw patient identifier.</a:t>
             </a:r>
           </a:p>
         </p:txBody>
@@ -14048,7 +14503,7 @@
                 <a:ea typeface="Calibri" pitchFamily="34" charset="-122"/>
                 <a:cs typeface="Calibri" pitchFamily="34" charset="-120"/>
               </a:rPr>
-              <a:t>Modules developed and integrated (src/, 274 tests, CI diffs the regenerated benchmark):</a:t>
+              <a:t>Modules developed and integrated (src/, 300 tests, CI diffs the regenerated benchmark):</a:t>
             </a:r>
             <a:endParaRPr lang="en-US" sz="1500" dirty="0"/>
           </a:p>
@@ -14090,7 +14545,7 @@
                 <a:ea typeface="Calibri" pitchFamily="34" charset="-122"/>
                 <a:cs typeface="Calibri" pitchFamily="34" charset="-120"/>
               </a:rPr>
-              <a:t>extraction/ — HISDataSource interface (transport observed, where= for one patient); adapters mock / portal (Playwright over TLS; search box) / dataset (CSV + Excel, column map, per-file overrides, day-first dates); techniques compliant / ai_agent (one agent = model × briefing; recorded, replayed, rationed) / unconstrained; metering (fields, fetches, pages, records); tier2 browser + navigation discovery.</a:t>
+              <a:t>extraction/ — HISDataSource interface (transport observed, where= for one patient); adapters mock / portal (Playwright over TLS; search box) / dataset (CSV + Excel, column map, per-file overrides, day-first dates, values kept as text, per-concept files stacked); techniques compliant / ai_agent (one agent = model × briefing; recorded, replayed, rationed) / unconstrained; metering (fields, fetches, pages, records); tier2 browser + navigation discovery.</a:t>
             </a:r>
             <a:endParaRPr lang="en-US" sz="1500" dirty="0"/>
           </a:p>
@@ -14111,7 +14566,7 @@
                 <a:ea typeface="Calibri" pitchFamily="34" charset="-122"/>
                 <a:cs typeface="Calibri" pitchFamily="34" charset="-120"/>
               </a:rPr>
-              <a:t>interop/ — HL7 v2 (ADT, ORM, ORU, DFT) and FHIR R4 (12 resources incl. AuditEvent) shapers; normalise + export audit. agent/ — 13-function registry, session state machine, grounded guidance. tools/mock_portal — the Flask fixture built as a system we do not control. scripts/rehearse_day_one.py — the real-data procedure rehearsed on a hospital-shaped export, with a leak audit.</a:t>
+              <a:t>interop/ — HL7 v2 (ADT, ORM, ORU, DFT) and FHIR R4 (12 resources incl. AuditEvent) shapers; normalise + export audit. agent/ — 13-function registry, session state machine, grounded guidance. tools/mock_portal — the Flask fixture built as a system we do not control. scripts/rehearse_day_one.py — the real-data procedure rehearsed on a hospital-shaped export, with a leak audit. tools/build_review_pages.py — four offline demo pages built from real runs.</a:t>
             </a:r>
             <a:endParaRPr lang="en-US" sz="1500" dirty="0"/>
           </a:p>
@@ -14324,7 +14779,7 @@
                 <a:ea typeface="Calibri" pitchFamily="34" charset="-122"/>
                 <a:cs typeface="Calibri" pitchFamily="34" charset="-120"/>
               </a:rPr>
-              <a:t>10</a:t>
+              <a:t>11</a:t>
             </a:r>
             <a:endParaRPr lang="en-US" sz="1000" dirty="0"/>
           </a:p>
@@ -14926,7 +15381,7 @@
                 <a:ea typeface="Calibri" pitchFamily="34" charset="-122"/>
                 <a:cs typeface="Calibri" pitchFamily="34" charset="-120"/>
               </a:rPr>
-              <a:t>11</a:t>
+              <a:t>12</a:t>
             </a:r>
             <a:endParaRPr lang="en-US" sz="1000" dirty="0"/>
           </a:p>

--- a/Review-II.pptx
+++ b/Review-II.pptx
@@ -2071,7 +2071,7 @@
                 <a:ea typeface="Calibri" pitchFamily="34" charset="-122"/>
                 <a:cs typeface="Calibri" pitchFamily="34" charset="-120"/>
               </a:rPr>
-              <a:t>Public models on free tiers — the recorder is paced, budgeted per day and breadth-first, and a model enters the tables after one pass; the flagship of the family still served only one or two calls a day in practice, so it was dropped rather than paid for. The model never sees a patient value, so the recordings replay on the real data unchanged.</a:t>
+              <a:t>Public models without paying — the recorder is paced, budgeted per day and breadth-first, and a model enters the tables after one pass; a free-tier flagship served only one or two calls a day, so it was dropped; the Claude models were recorded through a subscription's command line (headless, our brief as the whole system prompt, no tools, effort pinned), no API credit spent. The model never sees a patient value, so the recordings replay on the real data unchanged.</a:t>
             </a:r>
             <a:endParaRPr lang="en-US" sz="1500" dirty="0"/>
           </a:p>
@@ -8326,7 +8326,7 @@
         </p:nvGraphicFramePr>
         <p:xfrm>
           <a:off x="548640" y="2514600"/>
-          <a:ext cx="11091672" cy="1517904"/>
+          <a:ext cx="11091672" cy="1874520"/>
         </p:xfrm>
         <a:graphic>
           <a:graphicData uri="http://schemas.openxmlformats.org/drawingml/2006/table">
@@ -8342,7 +8342,7 @@
                 <a:gridCol w="1828800"/>
                 <a:gridCol w="1307592"/>
               </a:tblGrid>
-              <a:tr h="379476">
+              <a:tr h="312420">
                 <a:tc>
                   <a:txBody>
                     <a:bodyPr/>
@@ -8476,14 +8476,14 @@
                   </a:tcPr>
                 </a:tc>
               </a:tr>
-              <a:tr h="379476">
-                <a:tc>
-                  <a:txBody>
-                    <a:bodyPr/>
-                    <a:lstStyle/>
-                    <a:p>
-                      <a:r>
-                        <a:rPr sz="1100" b="0">
+              <a:tr h="312420">
+                <a:tc>
+                  <a:txBody>
+                    <a:bodyPr/>
+                    <a:lstStyle/>
+                    <a:p>
+                      <a:r>
+                        <a:rPr sz="1050" b="0">
                           <a:solidFill>
                             <a:srgbClr val="000000"/>
                           </a:solidFill>
@@ -8505,7 +8505,7 @@
                     <a:lstStyle/>
                     <a:p>
                       <a:r>
-                        <a:rPr sz="1100" b="0">
+                        <a:rPr sz="1050" b="0">
                           <a:solidFill>
                             <a:srgbClr val="000000"/>
                           </a:solidFill>
@@ -8527,7 +8527,7 @@
                     <a:lstStyle/>
                     <a:p>
                       <a:r>
-                        <a:rPr sz="1100" b="0">
+                        <a:rPr sz="1050" b="0">
                           <a:solidFill>
                             <a:srgbClr val="000000"/>
                           </a:solidFill>
@@ -8549,7 +8549,7 @@
                     <a:lstStyle/>
                     <a:p>
                       <a:r>
-                        <a:rPr sz="1100" b="0">
+                        <a:rPr sz="1050" b="0">
                           <a:solidFill>
                             <a:srgbClr val="000000"/>
                           </a:solidFill>
@@ -8571,7 +8571,7 @@
                     <a:lstStyle/>
                     <a:p>
                       <a:r>
-                        <a:rPr sz="1100" b="0">
+                        <a:rPr sz="1050" b="0">
                           <a:solidFill>
                             <a:srgbClr val="000000"/>
                           </a:solidFill>
@@ -8593,7 +8593,7 @@
                     <a:lstStyle/>
                     <a:p>
                       <a:r>
-                        <a:rPr sz="1100" b="0">
+                        <a:rPr sz="1050" b="0">
                           <a:solidFill>
                             <a:srgbClr val="000000"/>
                           </a:solidFill>
@@ -8610,14 +8610,14 @@
                   </a:tcPr>
                 </a:tc>
               </a:tr>
-              <a:tr h="379476">
-                <a:tc>
-                  <a:txBody>
-                    <a:bodyPr/>
-                    <a:lstStyle/>
-                    <a:p>
-                      <a:r>
-                        <a:rPr sz="1100" b="0">
+              <a:tr h="312420">
+                <a:tc>
+                  <a:txBody>
+                    <a:bodyPr/>
+                    <a:lstStyle/>
+                    <a:p>
+                      <a:r>
+                        <a:rPr sz="1050" b="0">
                           <a:solidFill>
                             <a:srgbClr val="000000"/>
                           </a:solidFill>
@@ -8639,7 +8639,7 @@
                     <a:lstStyle/>
                     <a:p>
                       <a:r>
-                        <a:rPr sz="1100" b="0">
+                        <a:rPr sz="1050" b="0">
                           <a:solidFill>
                             <a:srgbClr val="000000"/>
                           </a:solidFill>
@@ -8661,7 +8661,7 @@
                     <a:lstStyle/>
                     <a:p>
                       <a:r>
-                        <a:rPr sz="1100" b="0">
+                        <a:rPr sz="1050" b="0">
                           <a:solidFill>
                             <a:srgbClr val="000000"/>
                           </a:solidFill>
@@ -8683,7 +8683,7 @@
                     <a:lstStyle/>
                     <a:p>
                       <a:r>
-                        <a:rPr sz="1100" b="0">
+                        <a:rPr sz="1050" b="0">
                           <a:solidFill>
                             <a:srgbClr val="000000"/>
                           </a:solidFill>
@@ -8705,7 +8705,7 @@
                     <a:lstStyle/>
                     <a:p>
                       <a:r>
-                        <a:rPr sz="1100" b="0">
+                        <a:rPr sz="1050" b="0">
                           <a:solidFill>
                             <a:srgbClr val="000000"/>
                           </a:solidFill>
@@ -8727,7 +8727,7 @@
                     <a:lstStyle/>
                     <a:p>
                       <a:r>
-                        <a:rPr sz="1100" b="0">
+                        <a:rPr sz="1050" b="0">
                           <a:solidFill>
                             <a:srgbClr val="000000"/>
                           </a:solidFill>
@@ -8744,14 +8744,282 @@
                   </a:tcPr>
                 </a:tc>
               </a:tr>
-              <a:tr h="379476">
-                <a:tc>
-                  <a:txBody>
-                    <a:bodyPr/>
-                    <a:lstStyle/>
-                    <a:p>
-                      <a:r>
-                        <a:rPr sz="1100" b="0">
+              <a:tr h="312420">
+                <a:tc>
+                  <a:txBody>
+                    <a:bodyPr/>
+                    <a:lstStyle/>
+                    <a:p>
+                      <a:r>
+                        <a:rPr sz="1050" b="0">
+                          <a:solidFill>
+                            <a:srgbClr val="000000"/>
+                          </a:solidFill>
+                          <a:latin typeface="Calibri"/>
+                        </a:rPr>
+                        <a:t>ai agent: claude-haiku-4-5 (told the policy)</a:t>
+                      </a:r>
+                    </a:p>
+                  </a:txBody>
+                  <a:tcPr>
+                    <a:solidFill>
+                      <a:srgbClr val="FFFFFF"/>
+                    </a:solidFill>
+                  </a:tcPr>
+                </a:tc>
+                <a:tc>
+                  <a:txBody>
+                    <a:bodyPr/>
+                    <a:lstStyle/>
+                    <a:p>
+                      <a:r>
+                        <a:rPr sz="1050" b="0">
+                          <a:solidFill>
+                            <a:srgbClr val="000000"/>
+                          </a:solidFill>
+                          <a:latin typeface="Calibri"/>
+                        </a:rPr>
+                        <a:t>0.988  ·  6/7 rules</a:t>
+                      </a:r>
+                    </a:p>
+                  </a:txBody>
+                  <a:tcPr>
+                    <a:solidFill>
+                      <a:srgbClr val="FFFFFF"/>
+                    </a:solidFill>
+                  </a:tcPr>
+                </a:tc>
+                <a:tc>
+                  <a:txBody>
+                    <a:bodyPr/>
+                    <a:lstStyle/>
+                    <a:p>
+                      <a:r>
+                        <a:rPr sz="1050" b="0">
+                          <a:solidFill>
+                            <a:srgbClr val="000000"/>
+                          </a:solidFill>
+                          <a:latin typeface="Calibri"/>
+                        </a:rPr>
+                        <a:t>0.94</a:t>
+                      </a:r>
+                    </a:p>
+                  </a:txBody>
+                  <a:tcPr>
+                    <a:solidFill>
+                      <a:srgbClr val="FFFFFF"/>
+                    </a:solidFill>
+                  </a:tcPr>
+                </a:tc>
+                <a:tc>
+                  <a:txBody>
+                    <a:bodyPr/>
+                    <a:lstStyle/>
+                    <a:p>
+                      <a:r>
+                        <a:rPr sz="1050" b="0">
+                          <a:solidFill>
+                            <a:srgbClr val="000000"/>
+                          </a:solidFill>
+                          <a:latin typeface="Calibri"/>
+                        </a:rPr>
+                        <a:t>1.78</a:t>
+                      </a:r>
+                    </a:p>
+                  </a:txBody>
+                  <a:tcPr>
+                    <a:solidFill>
+                      <a:srgbClr val="FFFFFF"/>
+                    </a:solidFill>
+                  </a:tcPr>
+                </a:tc>
+                <a:tc>
+                  <a:txBody>
+                    <a:bodyPr/>
+                    <a:lstStyle/>
+                    <a:p>
+                      <a:r>
+                        <a:rPr sz="1050" b="0">
+                          <a:solidFill>
+                            <a:srgbClr val="000000"/>
+                          </a:solidFill>
+                          <a:latin typeface="Calibri"/>
+                        </a:rPr>
+                        <a:t>1.50×</a:t>
+                      </a:r>
+                    </a:p>
+                  </a:txBody>
+                  <a:tcPr>
+                    <a:solidFill>
+                      <a:srgbClr val="FFFFFF"/>
+                    </a:solidFill>
+                  </a:tcPr>
+                </a:tc>
+                <a:tc>
+                  <a:txBody>
+                    <a:bodyPr/>
+                    <a:lstStyle/>
+                    <a:p>
+                      <a:r>
+                        <a:rPr sz="1050" b="0">
+                          <a:solidFill>
+                            <a:srgbClr val="000000"/>
+                          </a:solidFill>
+                          <a:latin typeface="Calibri"/>
+                        </a:rPr>
+                        <a:t>1 / 1</a:t>
+                      </a:r>
+                    </a:p>
+                  </a:txBody>
+                  <a:tcPr>
+                    <a:solidFill>
+                      <a:srgbClr val="FFFFFF"/>
+                    </a:solidFill>
+                  </a:tcPr>
+                </a:tc>
+              </a:tr>
+              <a:tr h="312420">
+                <a:tc>
+                  <a:txBody>
+                    <a:bodyPr/>
+                    <a:lstStyle/>
+                    <a:p>
+                      <a:r>
+                        <a:rPr sz="1050" b="0">
+                          <a:solidFill>
+                            <a:srgbClr val="000000"/>
+                          </a:solidFill>
+                          <a:latin typeface="Calibri"/>
+                        </a:rPr>
+                        <a:t>ai agent: claude-sonnet-5 (told the policy)</a:t>
+                      </a:r>
+                    </a:p>
+                  </a:txBody>
+                  <a:tcPr>
+                    <a:solidFill>
+                      <a:srgbClr val="FFFFFF"/>
+                    </a:solidFill>
+                  </a:tcPr>
+                </a:tc>
+                <a:tc>
+                  <a:txBody>
+                    <a:bodyPr/>
+                    <a:lstStyle/>
+                    <a:p>
+                      <a:r>
+                        <a:rPr sz="1050" b="0">
+                          <a:solidFill>
+                            <a:srgbClr val="000000"/>
+                          </a:solidFill>
+                          <a:latin typeface="Calibri"/>
+                        </a:rPr>
+                        <a:t>0.988  ·  6/7 rules</a:t>
+                      </a:r>
+                    </a:p>
+                  </a:txBody>
+                  <a:tcPr>
+                    <a:solidFill>
+                      <a:srgbClr val="FFFFFF"/>
+                    </a:solidFill>
+                  </a:tcPr>
+                </a:tc>
+                <a:tc>
+                  <a:txBody>
+                    <a:bodyPr/>
+                    <a:lstStyle/>
+                    <a:p>
+                      <a:r>
+                        <a:rPr sz="1050" b="0">
+                          <a:solidFill>
+                            <a:srgbClr val="000000"/>
+                          </a:solidFill>
+                          <a:latin typeface="Calibri"/>
+                        </a:rPr>
+                        <a:t>0.89</a:t>
+                      </a:r>
+                    </a:p>
+                  </a:txBody>
+                  <a:tcPr>
+                    <a:solidFill>
+                      <a:srgbClr val="FFFFFF"/>
+                    </a:solidFill>
+                  </a:tcPr>
+                </a:tc>
+                <a:tc>
+                  <a:txBody>
+                    <a:bodyPr/>
+                    <a:lstStyle/>
+                    <a:p>
+                      <a:r>
+                        <a:rPr sz="1050" b="0">
+                          <a:solidFill>
+                            <a:srgbClr val="000000"/>
+                          </a:solidFill>
+                          <a:latin typeface="Calibri"/>
+                        </a:rPr>
+                        <a:t>2.00</a:t>
+                      </a:r>
+                    </a:p>
+                  </a:txBody>
+                  <a:tcPr>
+                    <a:solidFill>
+                      <a:srgbClr val="FFFFFF"/>
+                    </a:solidFill>
+                  </a:tcPr>
+                </a:tc>
+                <a:tc>
+                  <a:txBody>
+                    <a:bodyPr/>
+                    <a:lstStyle/>
+                    <a:p>
+                      <a:r>
+                        <a:rPr sz="1050" b="0">
+                          <a:solidFill>
+                            <a:srgbClr val="000000"/>
+                          </a:solidFill>
+                          <a:latin typeface="Calibri"/>
+                        </a:rPr>
+                        <a:t>1.25×</a:t>
+                      </a:r>
+                    </a:p>
+                  </a:txBody>
+                  <a:tcPr>
+                    <a:solidFill>
+                      <a:srgbClr val="FFFFFF"/>
+                    </a:solidFill>
+                  </a:tcPr>
+                </a:tc>
+                <a:tc>
+                  <a:txBody>
+                    <a:bodyPr/>
+                    <a:lstStyle/>
+                    <a:p>
+                      <a:r>
+                        <a:rPr sz="1050" b="0">
+                          <a:solidFill>
+                            <a:srgbClr val="000000"/>
+                          </a:solidFill>
+                          <a:latin typeface="Calibri"/>
+                        </a:rPr>
+                        <a:t>0 / 1</a:t>
+                      </a:r>
+                    </a:p>
+                  </a:txBody>
+                  <a:tcPr>
+                    <a:solidFill>
+                      <a:srgbClr val="FFFFFF"/>
+                    </a:solidFill>
+                  </a:tcPr>
+                </a:tc>
+              </a:tr>
+              <a:tr h="312420">
+                <a:tc>
+                  <a:txBody>
+                    <a:bodyPr/>
+                    <a:lstStyle/>
+                    <a:p>
+                      <a:r>
+                        <a:rPr sz="1050" b="0">
                           <a:solidFill>
                             <a:srgbClr val="000000"/>
                           </a:solidFill>
@@ -8773,7 +9041,7 @@
                     <a:lstStyle/>
                     <a:p>
                       <a:r>
-                        <a:rPr sz="1100" b="0">
+                        <a:rPr sz="1050" b="0">
                           <a:solidFill>
                             <a:srgbClr val="000000"/>
                           </a:solidFill>
@@ -8795,7 +9063,7 @@
                     <a:lstStyle/>
                     <a:p>
                       <a:r>
-                        <a:rPr sz="1100" b="0">
+                        <a:rPr sz="1050" b="0">
                           <a:solidFill>
                             <a:srgbClr val="000000"/>
                           </a:solidFill>
@@ -8817,7 +9085,7 @@
                     <a:lstStyle/>
                     <a:p>
                       <a:r>
-                        <a:rPr sz="1100" b="0">
+                        <a:rPr sz="1050" b="0">
                           <a:solidFill>
                             <a:srgbClr val="000000"/>
                           </a:solidFill>
@@ -8839,7 +9107,7 @@
                     <a:lstStyle/>
                     <a:p>
                       <a:r>
-                        <a:rPr sz="1100" b="0">
+                        <a:rPr sz="1050" b="0">
                           <a:solidFill>
                             <a:srgbClr val="000000"/>
                           </a:solidFill>
@@ -8861,7 +9129,7 @@
                     <a:lstStyle/>
                     <a:p>
                       <a:r>
-                        <a:rPr sz="1100" b="0">
+                        <a:rPr sz="1050" b="0">
                           <a:solidFill>
                             <a:srgbClr val="000000"/>
                           </a:solidFill>
@@ -8890,7 +9158,7 @@
         </p:nvSpPr>
         <p:spPr>
           <a:xfrm>
-            <a:off x="640080" y="4169663"/>
+            <a:off x="640080" y="4526280"/>
             <a:ext cx="10881360" cy="1645920"/>
           </a:xfrm>
           <a:prstGeom prst="rect">
@@ -8905,7 +9173,7 @@
           <a:lstStyle/>
           <a:p>
             <a:r>
-              <a:rPr sz="1150" b="0">
+              <a:rPr sz="1100" b="0">
                 <a:solidFill>
                   <a:srgbClr val="000000"/>
                 </a:solidFill>
@@ -8924,7 +9192,7 @@
         </p:nvSpPr>
         <p:spPr>
           <a:xfrm>
-            <a:off x="640080" y="5760720"/>
+            <a:off x="640080" y="6172200"/>
             <a:ext cx="10881360" cy="365760"/>
           </a:xfrm>
           <a:prstGeom prst="rect">
@@ -10923,7 +11191,7 @@
                 <a:ea typeface="Calibri" pitchFamily="34" charset="-122"/>
                 <a:cs typeface="Calibri" pitchFamily="34" charset="-120"/>
               </a:rPr>
-              <a:t>The comparison is now ours against a publicly available AI agent (Gemini), briefed with the job, the purpose, the field names — never a value — and what the deployment provides; unaided, told the Act, and handed the purpose policy itself; decisions recorded, replayed, and repeated so determinism is a measured column — every repeat scored. Two harder measures added: manifest veracity (declared vs demonstrable, with four controls demonstrated by the pipeline rather than attested) and trap tasks whose wording invites a violation. The hand-written baseline stands, as the panel agreed most deployed systems sit there.</a:t>
+              <a:t>The comparison is now ours against publicly available AI models (claude-haiku-4-5, claude-sonnet-5, gemini-3.1-flash-lite), briefed with the job, the purpose, the field names — never a value — and what the deployment provides; unaided, told the Act, and handed the purpose policy itself; decisions recorded, replayed, and repeated so determinism is a measured column — every repeat scored. Two harder measures added: manifest veracity (declared vs demonstrable, with four controls demonstrated by the pipeline rather than attested) and trap tasks whose wording invites a violation. The hand-written baseline stands, as the panel agreed most deployed systems sit there.</a:t>
             </a:r>
             <a:endParaRPr lang="en-US" sz="1500" dirty="0"/>
           </a:p>
@@ -14503,7 +14771,7 @@
                 <a:ea typeface="Calibri" pitchFamily="34" charset="-122"/>
                 <a:cs typeface="Calibri" pitchFamily="34" charset="-120"/>
               </a:rPr>
-              <a:t>Modules developed and integrated (src/, 300 tests, CI diffs the regenerated benchmark):</a:t>
+              <a:t>Modules developed and integrated (src/, 308 tests, CI diffs the regenerated benchmark):</a:t>
             </a:r>
             <a:endParaRPr lang="en-US" sz="1500" dirty="0"/>
           </a:p>
@@ -14877,7 +15145,7 @@
                 </a:solidFill>
                 <a:latin typeface="Calibri"/>
               </a:rPr>
-              <a:t>5 techniques (one row per model, at the briefing that hands it the purpose policy), 4 extraction tasks, the same login-gated portal scraped by a real browser (20 records per module, 10 per page); every run scored on the identical seven rules; cost measured as real page loads. The techniques differ only in how they treat personal data.</a:t>
+              <a:t>9 techniques (one row per model, at the briefing that hands it the purpose policy), 4 extraction tasks, the same login-gated portal scraped by a real browser (20 records per module, 10 per page); every run scored on the identical seven rules; cost measured as real page loads. The techniques differ only in how they treat personal data.</a:t>
             </a:r>
           </a:p>
         </p:txBody>
@@ -14906,7 +15174,7 @@
                 <a:gridCol w="2377440"/>
                 <a:gridCol w="4142232"/>
               </a:tblGrid>
-              <a:tr h="582930">
+              <a:tr h="388620">
                 <a:tc>
                   <a:txBody>
                     <a:bodyPr/>
@@ -14996,14 +15264,14 @@
                   </a:tcPr>
                 </a:tc>
               </a:tr>
-              <a:tr h="582930">
-                <a:tc>
-                  <a:txBody>
-                    <a:bodyPr/>
-                    <a:lstStyle/>
-                    <a:p>
-                      <a:r>
-                        <a:rPr sz="1150" b="0">
+              <a:tr h="388620">
+                <a:tc>
+                  <a:txBody>
+                    <a:bodyPr/>
+                    <a:lstStyle/>
+                    <a:p>
+                      <a:r>
+                        <a:rPr sz="1000" b="0">
                           <a:solidFill>
                             <a:srgbClr val="000000"/>
                           </a:solidFill>
@@ -15025,7 +15293,7 @@
                     <a:lstStyle/>
                     <a:p>
                       <a:r>
-                        <a:rPr sz="1150" b="0">
+                        <a:rPr sz="1000" b="0">
                           <a:solidFill>
                             <a:srgbClr val="000000"/>
                           </a:solidFill>
@@ -15047,7 +15315,7 @@
                     <a:lstStyle/>
                     <a:p>
                       <a:r>
-                        <a:rPr sz="1150" b="0">
+                        <a:rPr sz="1000" b="0">
                           <a:solidFill>
                             <a:srgbClr val="000000"/>
                           </a:solidFill>
@@ -15069,7 +15337,7 @@
                     <a:lstStyle/>
                     <a:p>
                       <a:r>
-                        <a:rPr sz="1150" b="0">
+                        <a:rPr sz="1000" b="0">
                           <a:solidFill>
                             <a:srgbClr val="000000"/>
                           </a:solidFill>
@@ -15086,14 +15354,14 @@
                   </a:tcPr>
                 </a:tc>
               </a:tr>
-              <a:tr h="582930">
-                <a:tc>
-                  <a:txBody>
-                    <a:bodyPr/>
-                    <a:lstStyle/>
-                    <a:p>
-                      <a:r>
-                        <a:rPr sz="1150" b="0">
+              <a:tr h="388620">
+                <a:tc>
+                  <a:txBody>
+                    <a:bodyPr/>
+                    <a:lstStyle/>
+                    <a:p>
+                      <a:r>
+                        <a:rPr sz="1000" b="0">
                           <a:solidFill>
                             <a:srgbClr val="000000"/>
                           </a:solidFill>
@@ -15115,7 +15383,7 @@
                     <a:lstStyle/>
                     <a:p>
                       <a:r>
-                        <a:rPr sz="1150" b="0">
+                        <a:rPr sz="1000" b="0">
                           <a:solidFill>
                             <a:srgbClr val="000000"/>
                           </a:solidFill>
@@ -15137,7 +15405,7 @@
                     <a:lstStyle/>
                     <a:p>
                       <a:r>
-                        <a:rPr sz="1150" b="0">
+                        <a:rPr sz="1000" b="0">
                           <a:solidFill>
                             <a:srgbClr val="000000"/>
                           </a:solidFill>
@@ -15159,13 +15427,13 @@
                     <a:lstStyle/>
                     <a:p>
                       <a:r>
-                        <a:rPr sz="1150" b="0">
+                        <a:rPr sz="1000" b="0">
                           <a:solidFill>
                             <a:srgbClr val="000000"/>
                           </a:solidFill>
                           <a:latin typeface="Calibri"/>
                         </a:rPr>
-                        <a:t>A public model decides the pull and the manifest from the job, purpose, field names and -- in this briefing -- the purpose policy itself; recorded and replayed.</a:t>
+                        <a:t>Public model; decides pull and manifest from field names and the purpose policy; recorded, replayed.</a:t>
                       </a:r>
                     </a:p>
                   </a:txBody>
@@ -15176,14 +15444,194 @@
                   </a:tcPr>
                 </a:tc>
               </a:tr>
-              <a:tr h="582930">
-                <a:tc>
-                  <a:txBody>
-                    <a:bodyPr/>
-                    <a:lstStyle/>
-                    <a:p>
-                      <a:r>
-                        <a:rPr sz="1150" b="0">
+              <a:tr h="388620">
+                <a:tc>
+                  <a:txBody>
+                    <a:bodyPr/>
+                    <a:lstStyle/>
+                    <a:p>
+                      <a:r>
+                        <a:rPr sz="1000" b="0">
+                          <a:solidFill>
+                            <a:srgbClr val="000000"/>
+                          </a:solidFill>
+                          <a:latin typeface="Calibri"/>
+                        </a:rPr>
+                        <a:t>ai agent: claude-haiku-4-5 (told the policy)</a:t>
+                      </a:r>
+                    </a:p>
+                  </a:txBody>
+                  <a:tcPr>
+                    <a:solidFill>
+                      <a:srgbClr val="FFFFFF"/>
+                    </a:solidFill>
+                  </a:tcPr>
+                </a:tc>
+                <a:tc>
+                  <a:txBody>
+                    <a:bodyPr/>
+                    <a:lstStyle/>
+                    <a:p>
+                      <a:r>
+                        <a:rPr sz="1000" b="0">
+                          <a:solidFill>
+                            <a:srgbClr val="000000"/>
+                          </a:solidFill>
+                          <a:latin typeface="Calibri"/>
+                        </a:rPr>
+                        <a:t>0.988  ·  6/7 rules</a:t>
+                      </a:r>
+                    </a:p>
+                  </a:txBody>
+                  <a:tcPr>
+                    <a:solidFill>
+                      <a:srgbClr val="FFFFFF"/>
+                    </a:solidFill>
+                  </a:tcPr>
+                </a:tc>
+                <a:tc>
+                  <a:txBody>
+                    <a:bodyPr/>
+                    <a:lstStyle/>
+                    <a:p>
+                      <a:r>
+                        <a:rPr sz="1000" b="0">
+                          <a:solidFill>
+                            <a:srgbClr val="000000"/>
+                          </a:solidFill>
+                          <a:latin typeface="Calibri"/>
+                        </a:rPr>
+                        <a:t>1.78 · 0.94 · 36  ·  traps held 1/1</a:t>
+                      </a:r>
+                    </a:p>
+                  </a:txBody>
+                  <a:tcPr>
+                    <a:solidFill>
+                      <a:srgbClr val="FFFFFF"/>
+                    </a:solidFill>
+                  </a:tcPr>
+                </a:tc>
+                <a:tc>
+                  <a:txBody>
+                    <a:bodyPr/>
+                    <a:lstStyle/>
+                    <a:p>
+                      <a:r>
+                        <a:rPr sz="1000" b="0">
+                          <a:solidFill>
+                            <a:srgbClr val="000000"/>
+                          </a:solidFill>
+                          <a:latin typeface="Calibri"/>
+                        </a:rPr>
+                        <a:t>Public model; decides pull and manifest from field names and the purpose policy; recorded, replayed.</a:t>
+                      </a:r>
+                    </a:p>
+                  </a:txBody>
+                  <a:tcPr>
+                    <a:solidFill>
+                      <a:srgbClr val="FFFFFF"/>
+                    </a:solidFill>
+                  </a:tcPr>
+                </a:tc>
+              </a:tr>
+              <a:tr h="388620">
+                <a:tc>
+                  <a:txBody>
+                    <a:bodyPr/>
+                    <a:lstStyle/>
+                    <a:p>
+                      <a:r>
+                        <a:rPr sz="1000" b="0">
+                          <a:solidFill>
+                            <a:srgbClr val="000000"/>
+                          </a:solidFill>
+                          <a:latin typeface="Calibri"/>
+                        </a:rPr>
+                        <a:t>ai agent: claude-sonnet-5 (told the policy)</a:t>
+                      </a:r>
+                    </a:p>
+                  </a:txBody>
+                  <a:tcPr>
+                    <a:solidFill>
+                      <a:srgbClr val="FFFFFF"/>
+                    </a:solidFill>
+                  </a:tcPr>
+                </a:tc>
+                <a:tc>
+                  <a:txBody>
+                    <a:bodyPr/>
+                    <a:lstStyle/>
+                    <a:p>
+                      <a:r>
+                        <a:rPr sz="1000" b="0">
+                          <a:solidFill>
+                            <a:srgbClr val="000000"/>
+                          </a:solidFill>
+                          <a:latin typeface="Calibri"/>
+                        </a:rPr>
+                        <a:t>0.988  ·  6/7 rules</a:t>
+                      </a:r>
+                    </a:p>
+                  </a:txBody>
+                  <a:tcPr>
+                    <a:solidFill>
+                      <a:srgbClr val="FFFFFF"/>
+                    </a:solidFill>
+                  </a:tcPr>
+                </a:tc>
+                <a:tc>
+                  <a:txBody>
+                    <a:bodyPr/>
+                    <a:lstStyle/>
+                    <a:p>
+                      <a:r>
+                        <a:rPr sz="1000" b="0">
+                          <a:solidFill>
+                            <a:srgbClr val="000000"/>
+                          </a:solidFill>
+                          <a:latin typeface="Calibri"/>
+                        </a:rPr>
+                        <a:t>2.00 · 0.89 · 55  ·  traps held 0/1</a:t>
+                      </a:r>
+                    </a:p>
+                  </a:txBody>
+                  <a:tcPr>
+                    <a:solidFill>
+                      <a:srgbClr val="FFFFFF"/>
+                    </a:solidFill>
+                  </a:tcPr>
+                </a:tc>
+                <a:tc>
+                  <a:txBody>
+                    <a:bodyPr/>
+                    <a:lstStyle/>
+                    <a:p>
+                      <a:r>
+                        <a:rPr sz="1000" b="0">
+                          <a:solidFill>
+                            <a:srgbClr val="000000"/>
+                          </a:solidFill>
+                          <a:latin typeface="Calibri"/>
+                        </a:rPr>
+                        <a:t>Public model; decides pull and manifest from field names and the purpose policy; recorded, replayed.</a:t>
+                      </a:r>
+                    </a:p>
+                  </a:txBody>
+                  <a:tcPr>
+                    <a:solidFill>
+                      <a:srgbClr val="FFFFFF"/>
+                    </a:solidFill>
+                  </a:tcPr>
+                </a:tc>
+              </a:tr>
+              <a:tr h="388620">
+                <a:tc>
+                  <a:txBody>
+                    <a:bodyPr/>
+                    <a:lstStyle/>
+                    <a:p>
+                      <a:r>
+                        <a:rPr sz="1000" b="0">
                           <a:solidFill>
                             <a:srgbClr val="000000"/>
                           </a:solidFill>
@@ -15205,7 +15653,7 @@
                     <a:lstStyle/>
                     <a:p>
                       <a:r>
-                        <a:rPr sz="1150" b="0">
+                        <a:rPr sz="1000" b="0">
                           <a:solidFill>
                             <a:srgbClr val="000000"/>
                           </a:solidFill>
@@ -15227,7 +15675,7 @@
                     <a:lstStyle/>
                     <a:p>
                       <a:r>
-                        <a:rPr sz="1150" b="0">
+                        <a:rPr sz="1000" b="0">
                           <a:solidFill>
                             <a:srgbClr val="000000"/>
                           </a:solidFill>
@@ -15249,7 +15697,7 @@
                     <a:lstStyle/>
                     <a:p>
                       <a:r>
-                        <a:rPr sz="1150" b="0">
+                        <a:rPr sz="1000" b="0">
                           <a:solidFill>
                             <a:srgbClr val="000000"/>
                           </a:solidFill>
@@ -15310,7 +15758,7 @@
                 </a:solidFill>
                 <a:latin typeface="Calibri"/>
               </a:rPr>
-              <a:t>The AI agent is a real public model, briefed with field names — never a value — and handed the purpose policy itself; it cites the register correctly, so the gap is not paperwork. It obeys the policy's numbers (retention at the ceiling, no onward use) and not its categories: told to reconcile an invoice against the diagnosis it takes the diagnosis in every run. In memory (8 tasks × 5 repeats, every repeat scored): traps held 10 of 20 runs against our 20 of 20 (0 of 20 unaided or told the Act); 67–74% of the job done; its first decision reproduced in 18–21 of 32 repeats, ours 32 of 32. Ours reads the policy, not the prose, and repeats itself. Per-rule columns and the full model × briefing grid: docs/benchmark_results/.</a:t>
+              <a:t>The AI agents are real public models, briefed with field names — never a value — and, in the row shown, handed the purpose policy itself. In memory (8 tasks × 5 repeats, 2 for claude-haiku-4-5 and claude-sonnet-5; every repeat scored): claude-haiku-4-5 held 8 of 8 trap runs (0 of 4 unaided), did 79% of the job and reproduced its first decision in 0 of 8 repeats; claude-sonnet-5 held 6 of 8 trap runs (0 of 4 unaided), did 81% of the job and reproduced its first decision in 6 of 8 repeats; gemini-3.1-flash-lite held 10 of 20 trap runs (0 of 20 unaided or told the Act), did 74% of the job and reproduced its first decision in 21 of 32 repeats. Ours held 20 of 20 and reproduced itself in 32 of 32 — it reads the policy, not the prose, and repeats itself. Per-rule columns and the full model × briefing grid: docs/benchmark_results/.</a:t>
             </a:r>
           </a:p>
         </p:txBody>

--- a/Review-II.pptx
+++ b/Review-II.pptx
@@ -2092,7 +2092,7 @@
                 <a:ea typeface="Calibri" pitchFamily="34" charset="-122"/>
                 <a:cs typeface="Calibri" pitchFamily="34" charset="-120"/>
               </a:rPr>
-              <a:t>Remaining work (ledger at 98%, PLAN.md §5):</a:t>
+              <a:t>Remaining work (ledger at 99%, PLAN.md §5):</a:t>
             </a:r>
             <a:endParaRPr lang="en-US" sz="1500" dirty="0"/>
           </a:p>
@@ -2113,7 +2113,7 @@
                 <a:ea typeface="Calibri" pitchFamily="34" charset="-122"/>
                 <a:cs typeface="Calibri" pitchFamily="34" charset="-120"/>
               </a:rPr>
-              <a:t>The hospital dataset, expected before this review: one column map, the same pipeline; its results slide is rebuilt from that run. Project report: eight chapters drafted on the real numbers (section references verified against the Gazette text); second pass for length. Manuscript compressed from chapters 3–7.</a:t>
+              <a:t>Nothing depends on the hospital dataset: the evaluation stands on synthetic data, the live portal and a public export we never saw. If an export is released, it is one column map and the same pipeline, and its slide rebuilds itself. Report: eight chapters and five appendices written, section references verified against the Gazette text, every table generated from the results and checked in CI. Manuscript: a complete first draft, to be fitted to the venue chosen with the guide — the one remaining point on the ledger.</a:t>
             </a:r>
             <a:endParaRPr lang="en-US" sz="1500" dirty="0"/>
           </a:p>
@@ -2155,7 +2155,7 @@
                 <a:ea typeface="Calibri" pitchFamily="34" charset="-122"/>
                 <a:cs typeface="Calibri" pitchFamily="34" charset="-120"/>
               </a:rPr>
-              <a:t>Week 1: real-data results beside the synthetic ones. Weeks 2–3: report second pass, appendices, weight-sensitivity and per-model discussion. Week 4: manuscript, final tables, rehearsal.</a:t>
+              <a:t>Week 1: venue chosen with the guide; the manuscript to its template and page budget. Weeks 2–3: the report assembled — front matter, cross-references, a final read for length. Week 4: every result regenerated from a clean checkout, rehearsal.</a:t>
             </a:r>
             <a:endParaRPr lang="en-US" sz="1500" dirty="0"/>
           </a:p>
@@ -8252,7 +8252,7 @@
                 <a:ea typeface="Calibri" pitchFamily="34" charset="-122"/>
                 <a:cs typeface="Calibri" pitchFamily="34" charset="-120"/>
               </a:rPr>
-              <a:t>Results &amp; Analysis (contd.) — Real Data, Rehearsed</a:t>
+              <a:t>Results &amp; Analysis (contd.) — A Public Export We Never Saw</a:t>
             </a:r>
             <a:endParaRPr lang="en-US" sz="2800" dirty="0"/>
           </a:p>
@@ -8311,7 +8311,7 @@
                 </a:solidFill>
                 <a:latin typeface="Calibri"/>
               </a:rPr>
-              <a:t>The hospital's export was not in when this deck was built, so the day-one procedure was run on an export shaped like one: the hospital's own column names, a column we do not model, an Excel file among the CSVs, dd/mm/yyyy dates, one table split across two files — and no synthetic manifest, so the handling gate treats it as real (refused without provenance under data/, git-ignored). check_source.py wrote the mapping template, a person filled it, run_pipeline.py --dataset ran the same techniques and recordings unchanged.</a:t>
+              <a:t>A hospital's export is personal data, and may never be released to a student project — which is exactly the risk this work is about. So the dataset path was proven on data we did not generate: the public Synthea sample (108 synthetic patients, 18 CSV files, one per clinical concept, a 28-column registration file with SSN, passport and licence columns). It went through the real handling gate (no synthetic manifest; a provenance note required), a column map written once, and run_pipeline.py --dataset: the same techniques and recordings, unchanged.</a:t>
             </a:r>
           </a:p>
         </p:txBody>
@@ -8533,7 +8533,7 @@
                           </a:solidFill>
                           <a:latin typeface="Calibri"/>
                         </a:rPr>
-                        <a:t>1.00</a:t>
+                        <a:t>0.61</a:t>
                       </a:r>
                     </a:p>
                   </a:txBody>
@@ -8555,7 +8555,7 @@
                           </a:solidFill>
                           <a:latin typeface="Calibri"/>
                         </a:rPr>
-                        <a:t>1.00</a:t>
+                        <a:t>0.61</a:t>
                       </a:r>
                     </a:p>
                   </a:txBody>
@@ -8577,7 +8577,7 @@
                           </a:solidFill>
                           <a:latin typeface="Calibri"/>
                         </a:rPr>
-                        <a:t>1.00×</a:t>
+                        <a:t>0.51×</a:t>
                       </a:r>
                     </a:p>
                   </a:txBody>
@@ -8623,7 +8623,7 @@
                           </a:solidFill>
                           <a:latin typeface="Calibri"/>
                         </a:rPr>
-                        <a:t>ai agent: gemini-3.1-flash-lite (told the policy)</a:t>
+                        <a:t>ai agent: claude-haiku-4-5 (told the policy)</a:t>
                       </a:r>
                     </a:p>
                   </a:txBody>
@@ -8645,7 +8645,7 @@
                           </a:solidFill>
                           <a:latin typeface="Calibri"/>
                         </a:rPr>
-                        <a:t>0.990  ·  6/7 rules</a:t>
+                        <a:t>0.999  ·  6/7 rules</a:t>
                       </a:r>
                     </a:p>
                   </a:txBody>
@@ -8667,7 +8667,7 @@
                           </a:solidFill>
                           <a:latin typeface="Calibri"/>
                         </a:rPr>
-                        <a:t>0.83</a:t>
+                        <a:t>0.56</a:t>
                       </a:r>
                     </a:p>
                   </a:txBody>
@@ -8689,7 +8689,7 @@
                           </a:solidFill>
                           <a:latin typeface="Calibri"/>
                         </a:rPr>
-                        <a:t>1.83</a:t>
+                        <a:t>0.94</a:t>
                       </a:r>
                     </a:p>
                   </a:txBody>
@@ -8711,7 +8711,141 @@
                           </a:solidFill>
                           <a:latin typeface="Calibri"/>
                         </a:rPr>
-                        <a:t>1.25×</a:t>
+                        <a:t>1.03×</a:t>
+                      </a:r>
+                    </a:p>
+                  </a:txBody>
+                  <a:tcPr>
+                    <a:solidFill>
+                      <a:srgbClr val="FFFFFF"/>
+                    </a:solidFill>
+                  </a:tcPr>
+                </a:tc>
+                <a:tc>
+                  <a:txBody>
+                    <a:bodyPr/>
+                    <a:lstStyle/>
+                    <a:p>
+                      <a:r>
+                        <a:rPr sz="1050" b="0">
+                          <a:solidFill>
+                            <a:srgbClr val="000000"/>
+                          </a:solidFill>
+                          <a:latin typeface="Calibri"/>
+                        </a:rPr>
+                        <a:t>1 / 1</a:t>
+                      </a:r>
+                    </a:p>
+                  </a:txBody>
+                  <a:tcPr>
+                    <a:solidFill>
+                      <a:srgbClr val="FFFFFF"/>
+                    </a:solidFill>
+                  </a:tcPr>
+                </a:tc>
+              </a:tr>
+              <a:tr h="312420">
+                <a:tc>
+                  <a:txBody>
+                    <a:bodyPr/>
+                    <a:lstStyle/>
+                    <a:p>
+                      <a:r>
+                        <a:rPr sz="1050" b="0">
+                          <a:solidFill>
+                            <a:srgbClr val="000000"/>
+                          </a:solidFill>
+                          <a:latin typeface="Calibri"/>
+                        </a:rPr>
+                        <a:t>ai agent: gemini-3.1-flash-lite (told the policy)</a:t>
+                      </a:r>
+                    </a:p>
+                  </a:txBody>
+                  <a:tcPr>
+                    <a:solidFill>
+                      <a:srgbClr val="FFFFFF"/>
+                    </a:solidFill>
+                  </a:tcPr>
+                </a:tc>
+                <a:tc>
+                  <a:txBody>
+                    <a:bodyPr/>
+                    <a:lstStyle/>
+                    <a:p>
+                      <a:r>
+                        <a:rPr sz="1050" b="0">
+                          <a:solidFill>
+                            <a:srgbClr val="000000"/>
+                          </a:solidFill>
+                          <a:latin typeface="Calibri"/>
+                        </a:rPr>
+                        <a:t>0.994  ·  6/7 rules</a:t>
+                      </a:r>
+                    </a:p>
+                  </a:txBody>
+                  <a:tcPr>
+                    <a:solidFill>
+                      <a:srgbClr val="FFFFFF"/>
+                    </a:solidFill>
+                  </a:tcPr>
+                </a:tc>
+                <a:tc>
+                  <a:txBody>
+                    <a:bodyPr/>
+                    <a:lstStyle/>
+                    <a:p>
+                      <a:r>
+                        <a:rPr sz="1050" b="0">
+                          <a:solidFill>
+                            <a:srgbClr val="000000"/>
+                          </a:solidFill>
+                          <a:latin typeface="Calibri"/>
+                        </a:rPr>
+                        <a:t>0.50</a:t>
+                      </a:r>
+                    </a:p>
+                  </a:txBody>
+                  <a:tcPr>
+                    <a:solidFill>
+                      <a:srgbClr val="FFFFFF"/>
+                    </a:solidFill>
+                  </a:tcPr>
+                </a:tc>
+                <a:tc>
+                  <a:txBody>
+                    <a:bodyPr/>
+                    <a:lstStyle/>
+                    <a:p>
+                      <a:r>
+                        <a:rPr sz="1050" b="0">
+                          <a:solidFill>
+                            <a:srgbClr val="000000"/>
+                          </a:solidFill>
+                          <a:latin typeface="Calibri"/>
+                        </a:rPr>
+                        <a:t>1.06</a:t>
+                      </a:r>
+                    </a:p>
+                  </a:txBody>
+                  <a:tcPr>
+                    <a:solidFill>
+                      <a:srgbClr val="FFFFFF"/>
+                    </a:solidFill>
+                  </a:tcPr>
+                </a:tc>
+                <a:tc>
+                  <a:txBody>
+                    <a:bodyPr/>
+                    <a:lstStyle/>
+                    <a:p>
+                      <a:r>
+                        <a:rPr sz="1050" b="0">
+                          <a:solidFill>
+                            <a:srgbClr val="000000"/>
+                          </a:solidFill>
+                          <a:latin typeface="Calibri"/>
+                        </a:rPr>
+                        <a:t>1.06×</a:t>
                       </a:r>
                     </a:p>
                   </a:txBody>
@@ -8757,7 +8891,7 @@
                           </a:solidFill>
                           <a:latin typeface="Calibri"/>
                         </a:rPr>
-                        <a:t>ai agent: claude-haiku-4-5 (told the policy)</a:t>
+                        <a:t>ai agent: claude-sonnet-5 (told the policy)</a:t>
                       </a:r>
                     </a:p>
                   </a:txBody>
@@ -8779,7 +8913,7 @@
                           </a:solidFill>
                           <a:latin typeface="Calibri"/>
                         </a:rPr>
-                        <a:t>0.988  ·  6/7 rules</a:t>
+                        <a:t>0.992  ·  6/7 rules</a:t>
                       </a:r>
                     </a:p>
                   </a:txBody>
@@ -8801,7 +8935,7 @@
                           </a:solidFill>
                           <a:latin typeface="Calibri"/>
                         </a:rPr>
-                        <a:t>0.94</a:t>
+                        <a:t>0.56</a:t>
                       </a:r>
                     </a:p>
                   </a:txBody>
@@ -8823,7 +8957,7 @@
                           </a:solidFill>
                           <a:latin typeface="Calibri"/>
                         </a:rPr>
-                        <a:t>1.78</a:t>
+                        <a:t>1.17</a:t>
                       </a:r>
                     </a:p>
                   </a:txBody>
@@ -8845,141 +8979,7 @@
                           </a:solidFill>
                           <a:latin typeface="Calibri"/>
                         </a:rPr>
-                        <a:t>1.50×</a:t>
-                      </a:r>
-                    </a:p>
-                  </a:txBody>
-                  <a:tcPr>
-                    <a:solidFill>
-                      <a:srgbClr val="FFFFFF"/>
-                    </a:solidFill>
-                  </a:tcPr>
-                </a:tc>
-                <a:tc>
-                  <a:txBody>
-                    <a:bodyPr/>
-                    <a:lstStyle/>
-                    <a:p>
-                      <a:r>
-                        <a:rPr sz="1050" b="0">
-                          <a:solidFill>
-                            <a:srgbClr val="000000"/>
-                          </a:solidFill>
-                          <a:latin typeface="Calibri"/>
-                        </a:rPr>
-                        <a:t>1 / 1</a:t>
-                      </a:r>
-                    </a:p>
-                  </a:txBody>
-                  <a:tcPr>
-                    <a:solidFill>
-                      <a:srgbClr val="FFFFFF"/>
-                    </a:solidFill>
-                  </a:tcPr>
-                </a:tc>
-              </a:tr>
-              <a:tr h="312420">
-                <a:tc>
-                  <a:txBody>
-                    <a:bodyPr/>
-                    <a:lstStyle/>
-                    <a:p>
-                      <a:r>
-                        <a:rPr sz="1050" b="0">
-                          <a:solidFill>
-                            <a:srgbClr val="000000"/>
-                          </a:solidFill>
-                          <a:latin typeface="Calibri"/>
-                        </a:rPr>
-                        <a:t>ai agent: claude-sonnet-5 (told the policy)</a:t>
-                      </a:r>
-                    </a:p>
-                  </a:txBody>
-                  <a:tcPr>
-                    <a:solidFill>
-                      <a:srgbClr val="FFFFFF"/>
-                    </a:solidFill>
-                  </a:tcPr>
-                </a:tc>
-                <a:tc>
-                  <a:txBody>
-                    <a:bodyPr/>
-                    <a:lstStyle/>
-                    <a:p>
-                      <a:r>
-                        <a:rPr sz="1050" b="0">
-                          <a:solidFill>
-                            <a:srgbClr val="000000"/>
-                          </a:solidFill>
-                          <a:latin typeface="Calibri"/>
-                        </a:rPr>
-                        <a:t>0.988  ·  6/7 rules</a:t>
-                      </a:r>
-                    </a:p>
-                  </a:txBody>
-                  <a:tcPr>
-                    <a:solidFill>
-                      <a:srgbClr val="FFFFFF"/>
-                    </a:solidFill>
-                  </a:tcPr>
-                </a:tc>
-                <a:tc>
-                  <a:txBody>
-                    <a:bodyPr/>
-                    <a:lstStyle/>
-                    <a:p>
-                      <a:r>
-                        <a:rPr sz="1050" b="0">
-                          <a:solidFill>
-                            <a:srgbClr val="000000"/>
-                          </a:solidFill>
-                          <a:latin typeface="Calibri"/>
-                        </a:rPr>
-                        <a:t>0.89</a:t>
-                      </a:r>
-                    </a:p>
-                  </a:txBody>
-                  <a:tcPr>
-                    <a:solidFill>
-                      <a:srgbClr val="FFFFFF"/>
-                    </a:solidFill>
-                  </a:tcPr>
-                </a:tc>
-                <a:tc>
-                  <a:txBody>
-                    <a:bodyPr/>
-                    <a:lstStyle/>
-                    <a:p>
-                      <a:r>
-                        <a:rPr sz="1050" b="0">
-                          <a:solidFill>
-                            <a:srgbClr val="000000"/>
-                          </a:solidFill>
-                          <a:latin typeface="Calibri"/>
-                        </a:rPr>
-                        <a:t>2.00</a:t>
-                      </a:r>
-                    </a:p>
-                  </a:txBody>
-                  <a:tcPr>
-                    <a:solidFill>
-                      <a:srgbClr val="FFFFFF"/>
-                    </a:solidFill>
-                  </a:tcPr>
-                </a:tc>
-                <a:tc>
-                  <a:txBody>
-                    <a:bodyPr/>
-                    <a:lstStyle/>
-                    <a:p>
-                      <a:r>
-                        <a:rPr sz="1050" b="0">
-                          <a:solidFill>
-                            <a:srgbClr val="000000"/>
-                          </a:solidFill>
-                          <a:latin typeface="Calibri"/>
-                        </a:rPr>
-                        <a:t>1.25×</a:t>
+                        <a:t>1.06×</a:t>
                       </a:r>
                     </a:p>
                   </a:txBody>
@@ -9047,7 +9047,7 @@
                           </a:solidFill>
                           <a:latin typeface="Calibri"/>
                         </a:rPr>
-                        <a:t>0.114  ·  0/7 rules</a:t>
+                        <a:t>0.113  ·  0/7 rules</a:t>
                       </a:r>
                     </a:p>
                   </a:txBody>
@@ -9069,7 +9069,7 @@
                           </a:solidFill>
                           <a:latin typeface="Calibri"/>
                         </a:rPr>
-                        <a:t>1.00</a:t>
+                        <a:t>0.72</a:t>
                       </a:r>
                     </a:p>
                   </a:txBody>
@@ -9091,7 +9091,7 @@
                           </a:solidFill>
                           <a:latin typeface="Calibri"/>
                         </a:rPr>
-                        <a:t>7.56</a:t>
+                        <a:t>4.44</a:t>
                       </a:r>
                     </a:p>
                   </a:txBody>
@@ -9113,7 +9113,7 @@
                           </a:solidFill>
                           <a:latin typeface="Calibri"/>
                         </a:rPr>
-                        <a:t>100.00×</a:t>
+                        <a:t>548.85×</a:t>
                       </a:r>
                     </a:p>
                   </a:txBody>
@@ -9179,7 +9179,7 @@
                 </a:solidFill>
                 <a:latin typeface="Calibri"/>
               </a:rPr>
-              <a:t>The rehearsal found four defects before any real data existed — a header meaning different fields in different files, a split table read half, day-first dates reaching HL7 unparsed, .xlsx unreadable — and each is now fixed and tested. Then everything printed or written was searched for one patient's record number, name and phone: nothing. A public export we had never seen (Synthea: 18 files, one per clinical concept) found five more — identifiers read as numbers, a blanked column counted against a file, an empty source still benchmarked, one table kept per layer, a coverage ceiling set by the wrong technique — all fixed and tested. No agent is re-recorded for the real data: the day it arrives this slide is rebuilt from its run and nothing else changes.</a:t>
+              <a:t>SSN, passport and licence numbers stopped at the adapter: no technique saw them and nothing exported them. The export found five defects our own data had not — identifiers read as numbers, a blanked column counted against a file, an empty source still benchmarked, one table kept per layer, a coverage ceiling set by the wrong technique — each fixed and tested; a hospital-shaped rehearsal had found four more. The coverage ceiling is measured from the source — 5 of the 18 fields the tasks need are not in the export, 2 are not in the chosen patient's records — so no technique is blamed for what the data lacks. If a hospital export is ever released, this slide is rebuilt from its run and nothing else changes.</a:t>
             </a:r>
           </a:p>
         </p:txBody>
@@ -9213,7 +9213,7 @@
                 </a:solidFill>
                 <a:latin typeface="Calibri"/>
               </a:rPr>
-              <a:t>benchmark-dataset.json, generated 2026-09-23; four tasks; the baseline's records-read column is every patient's records for one patient's task.</a:t>
+              <a:t>benchmark-public.json, generated 2026-09-23; four tasks; the baseline's records-read column is every patient's records for one patient's task.</a:t>
             </a:r>
           </a:p>
         </p:txBody>
@@ -14771,7 +14771,7 @@
                 <a:ea typeface="Calibri" pitchFamily="34" charset="-122"/>
                 <a:cs typeface="Calibri" pitchFamily="34" charset="-120"/>
               </a:rPr>
-              <a:t>Modules developed and integrated (src/, 308 tests, CI diffs the regenerated benchmark):</a:t>
+              <a:t>Modules developed and integrated (src/, 309 tests, CI diffs the regenerated benchmark):</a:t>
             </a:r>
             <a:endParaRPr lang="en-US" sz="1500" dirty="0"/>
           </a:p>
@@ -14876,7 +14876,7 @@
                 <a:ea typeface="Calibri" pitchFamily="34" charset="-122"/>
                 <a:cs typeface="Calibri" pitchFamily="34" charset="-120"/>
               </a:rPr>
-              <a:t>Rule scoring: each principle → 0–1 with findings; weighted aggregate (a sweep shows the ranking survives any weighting). DM-01 on two axes: categories beyond the purpose, and records read beyond the patient's own. Excess ratio = distinct fields pulled ÷ required; coverage = needed fields obtained ÷ needed.</a:t>
+              <a:t>Rule scoring: each principle → 0–1 with findings; weighted aggregate (21 alternative weightings never put another technique above ours). DM-01 on two axes: categories beyond the purpose, and records read beyond the patient's own. Excess ratio = distinct fields pulled ÷ required; coverage = needed fields obtained ÷ needed.</a:t>
             </a:r>
             <a:endParaRPr lang="en-US" sz="1500" dirty="0"/>
           </a:p>
@@ -15747,7 +15747,7 @@
                 </a:solidFill>
                 <a:latin typeface="Calibri"/>
               </a:rPr>
-              <a:t>Reading the table. The baseline loads about five times the pages for the same coverage; its surplus is exactly the overreach DM-01 penalises, so compliance and cost move together rather than trading off.</a:t>
+              <a:t>Reading the table. The baseline loads fourteen times the pages for the same coverage; its surplus is exactly the overreach DM-01 penalises, so compliance and cost move together rather than trading off.</a:t>
             </a:r>
           </a:p>
           <a:p>

--- a/Review-II.pptx
+++ b/Review-II.pptx
@@ -9354,8 +9354,8 @@
         </p:blipFill>
         <p:spPr>
           <a:xfrm>
-            <a:off x="548640" y="1543049"/>
-            <a:ext cx="5440680" cy="1520190"/>
+            <a:off x="548640" y="1598806"/>
+            <a:ext cx="5440680" cy="1464433"/>
           </a:xfrm>
           <a:prstGeom prst="rect">
             <a:avLst/>
@@ -9429,8 +9429,8 @@
         </p:blipFill>
         <p:spPr>
           <a:xfrm>
-            <a:off x="6851536" y="1188719"/>
-            <a:ext cx="4136871" cy="1874519"/>
+            <a:off x="6199632" y="1617763"/>
+            <a:ext cx="5440680" cy="1445476"/>
           </a:xfrm>
           <a:prstGeom prst="rect">
             <a:avLst/>
@@ -9504,8 +9504,8 @@
         </p:blipFill>
         <p:spPr>
           <a:xfrm>
-            <a:off x="725990" y="3675888"/>
-            <a:ext cx="5085979" cy="1874519"/>
+            <a:off x="585751" y="3675888"/>
+            <a:ext cx="5366456" cy="1874519"/>
           </a:xfrm>
           <a:prstGeom prst="rect">
             <a:avLst/>
@@ -9579,8 +9579,8 @@
         </p:blipFill>
         <p:spPr>
           <a:xfrm>
-            <a:off x="7045452" y="3675888"/>
-            <a:ext cx="3749039" cy="1874519"/>
+            <a:off x="6938435" y="3675888"/>
+            <a:ext cx="3963073" cy="1874519"/>
           </a:xfrm>
           <a:prstGeom prst="rect">
             <a:avLst/>
